--- a/00 PRESENTACIONES compartida alumnos/ED02a - Diagramas de comportamiento CU.pptx
+++ b/00 PRESENTACIONES compartida alumnos/ED02a - Diagramas de comportamiento CU.pptx
@@ -244,9 +244,6 @@
         </p15:guide>
       </p15:sldGuideLst>
     </p:ext>
-    <p:ext uri="{2D200454-40CA-4A62-9FC3-DE9A4176ACB9}">
-      <p15:notesGuideLst xmlns:p15="http://schemas.microsoft.com/office/powerpoint/2012/main"/>
-    </p:ext>
   </p:extLst>
 </p:presentation>
 </file>
@@ -261,7 +258,8 @@
 <file path=ppt/revisionInfo.xml><?xml version="1.0" encoding="utf-8"?>
 <p1510:revInfo xmlns:a="http://schemas.openxmlformats.org/drawingml/2006/main" xmlns:r="http://schemas.openxmlformats.org/officeDocument/2006/relationships" xmlns:p1510="http://schemas.microsoft.com/office/powerpoint/2015/10/main">
   <p1510:revLst>
-    <p1510:client id="{90E2A9E7-7C12-B274-D7CB-01D663E1F7C2}" v="44" dt="2025-11-02T06:24:38.731"/>
+    <p1510:client id="{037E1A52-2D06-290C-270F-AAF8E2BD7F8E}" v="39" dt="2025-12-18T20:26:04.462"/>
+    <p1510:client id="{7DB55E39-0D0B-6B48-85AB-63C26D46838F}" v="2" dt="2025-12-19T08:06:06.968"/>
   </p1510:revLst>
 </p1510:revInfo>
 </file>
@@ -269,119 +267,175 @@
 <file path=ppt/changesInfos/changesInfo1.xml><?xml version="1.0" encoding="utf-8"?>
 <pc:chgInfo xmlns:a="http://schemas.openxmlformats.org/drawingml/2006/main" xmlns:r="http://schemas.openxmlformats.org/officeDocument/2006/relationships" xmlns:ac="http://schemas.microsoft.com/office/drawing/2013/main/command" xmlns:pc="http://schemas.microsoft.com/office/powerpoint/2013/main/command">
   <pc:docChgLst>
-    <pc:chgData name="MIGUEL TRIGUEROS MUÑOZ" userId="S::miguel.trigueros@aulaxxi.murciaeduca.es::a4ee0321-97d7-430f-98a8-7ed13ff9a4bf" providerId="AD" clId="Web-{E09DD130-612E-646E-A622-1F0A4BF8BCB8}"/>
-    <pc:docChg chg="modSld sldOrd">
-      <pc:chgData name="MIGUEL TRIGUEROS MUÑOZ" userId="S::miguel.trigueros@aulaxxi.murciaeduca.es::a4ee0321-97d7-430f-98a8-7ed13ff9a4bf" providerId="AD" clId="Web-{E09DD130-612E-646E-A622-1F0A4BF8BCB8}" dt="2025-10-04T07:15:30.355" v="28" actId="20577"/>
+    <pc:chgData name="MIGUEL TRIGUEROS MUÑOZ" userId="S::miguel.trigueros@aulaxxi.murciaeduca.es::a4ee0321-97d7-430f-98a8-7ed13ff9a4bf" providerId="AD" clId="Web-{083F2E99-DF8D-816D-E287-81C0FB36B117}"/>
+    <pc:docChg chg="modSld">
+      <pc:chgData name="MIGUEL TRIGUEROS MUÑOZ" userId="S::miguel.trigueros@aulaxxi.murciaeduca.es::a4ee0321-97d7-430f-98a8-7ed13ff9a4bf" providerId="AD" clId="Web-{083F2E99-DF8D-816D-E287-81C0FB36B117}" dt="2025-11-29T07:43:56.298" v="125"/>
       <pc:docMkLst>
         <pc:docMk/>
       </pc:docMkLst>
-      <pc:sldChg chg="ord">
-        <pc:chgData name="MIGUEL TRIGUEROS MUÑOZ" userId="S::miguel.trigueros@aulaxxi.murciaeduca.es::a4ee0321-97d7-430f-98a8-7ed13ff9a4bf" providerId="AD" clId="Web-{E09DD130-612E-646E-A622-1F0A4BF8BCB8}" dt="2025-10-04T07:06:29.649" v="0"/>
+      <pc:sldChg chg="modSp modNotes">
+        <pc:chgData name="MIGUEL TRIGUEROS MUÑOZ" userId="S::miguel.trigueros@aulaxxi.murciaeduca.es::a4ee0321-97d7-430f-98a8-7ed13ff9a4bf" providerId="AD" clId="Web-{083F2E99-DF8D-816D-E287-81C0FB36B117}" dt="2025-11-29T07:43:56.298" v="125"/>
         <pc:sldMkLst>
           <pc:docMk/>
-          <pc:sldMk cId="651048111" sldId="297"/>
+          <pc:sldMk cId="2861142992" sldId="316"/>
         </pc:sldMkLst>
+        <pc:graphicFrameChg chg="mod modGraphic">
+          <ac:chgData name="MIGUEL TRIGUEROS MUÑOZ" userId="S::miguel.trigueros@aulaxxi.murciaeduca.es::a4ee0321-97d7-430f-98a8-7ed13ff9a4bf" providerId="AD" clId="Web-{083F2E99-DF8D-816D-E287-81C0FB36B117}" dt="2025-11-29T07:43:25.407" v="73"/>
+          <ac:graphicFrameMkLst>
+            <pc:docMk/>
+            <pc:sldMk cId="2861142992" sldId="316"/>
+            <ac:graphicFrameMk id="14" creationId="{96A8E327-999F-F209-BF6F-5631386368BD}"/>
+          </ac:graphicFrameMkLst>
+        </pc:graphicFrameChg>
+      </pc:sldChg>
+    </pc:docChg>
+  </pc:docChgLst>
+  <pc:docChgLst>
+    <pc:chgData name="CONDORI ARGOLLO, NELSON GABRIEL" userId="S::13762741@alu365.murciaeduca.es::226c2f5f-8132-41ef-aa3e-e4667f621121" providerId="AD" clId="Web-{037E1A52-2D06-290C-270F-AAF8E2BD7F8E}"/>
+    <pc:docChg chg="modSld">
+      <pc:chgData name="CONDORI ARGOLLO, NELSON GABRIEL" userId="S::13762741@alu365.murciaeduca.es::226c2f5f-8132-41ef-aa3e-e4667f621121" providerId="AD" clId="Web-{037E1A52-2D06-290C-270F-AAF8E2BD7F8E}" dt="2025-12-18T20:26:04.462" v="38"/>
+      <pc:docMkLst>
+        <pc:docMk/>
+      </pc:docMkLst>
+      <pc:sldChg chg="modSp">
+        <pc:chgData name="CONDORI ARGOLLO, NELSON GABRIEL" userId="S::13762741@alu365.murciaeduca.es::226c2f5f-8132-41ef-aa3e-e4667f621121" providerId="AD" clId="Web-{037E1A52-2D06-290C-270F-AAF8E2BD7F8E}" dt="2025-12-18T20:26:04.462" v="38"/>
+        <pc:sldMkLst>
+          <pc:docMk/>
+          <pc:sldMk cId="2861142992" sldId="316"/>
+        </pc:sldMkLst>
+        <pc:grpChg chg="mod">
+          <ac:chgData name="CONDORI ARGOLLO, NELSON GABRIEL" userId="S::13762741@alu365.murciaeduca.es::226c2f5f-8132-41ef-aa3e-e4667f621121" providerId="AD" clId="Web-{037E1A52-2D06-290C-270F-AAF8E2BD7F8E}" dt="2025-12-18T20:25:27.915" v="24" actId="1076"/>
+          <ac:grpSpMkLst>
+            <pc:docMk/>
+            <pc:sldMk cId="2861142992" sldId="316"/>
+            <ac:grpSpMk id="8" creationId="{30AD3789-136B-A7C5-612F-DF642BAD70B4}"/>
+          </ac:grpSpMkLst>
+        </pc:grpChg>
+        <pc:graphicFrameChg chg="mod modGraphic">
+          <ac:chgData name="CONDORI ARGOLLO, NELSON GABRIEL" userId="S::13762741@alu365.murciaeduca.es::226c2f5f-8132-41ef-aa3e-e4667f621121" providerId="AD" clId="Web-{037E1A52-2D06-290C-270F-AAF8E2BD7F8E}" dt="2025-12-18T20:26:04.462" v="38"/>
+          <ac:graphicFrameMkLst>
+            <pc:docMk/>
+            <pc:sldMk cId="2861142992" sldId="316"/>
+            <ac:graphicFrameMk id="14" creationId="{96A8E327-999F-F209-BF6F-5631386368BD}"/>
+          </ac:graphicFrameMkLst>
+        </pc:graphicFrameChg>
       </pc:sldChg>
       <pc:sldChg chg="modSp">
-        <pc:chgData name="MIGUEL TRIGUEROS MUÑOZ" userId="S::miguel.trigueros@aulaxxi.murciaeduca.es::a4ee0321-97d7-430f-98a8-7ed13ff9a4bf" providerId="AD" clId="Web-{E09DD130-612E-646E-A622-1F0A4BF8BCB8}" dt="2025-10-04T07:15:30.355" v="28" actId="20577"/>
+        <pc:chgData name="CONDORI ARGOLLO, NELSON GABRIEL" userId="S::13762741@alu365.murciaeduca.es::226c2f5f-8132-41ef-aa3e-e4667f621121" providerId="AD" clId="Web-{037E1A52-2D06-290C-270F-AAF8E2BD7F8E}" dt="2025-12-18T20:22:24.993" v="22" actId="14100"/>
         <pc:sldMkLst>
           <pc:docMk/>
-          <pc:sldMk cId="1441313987" sldId="308"/>
+          <pc:sldMk cId="544873430" sldId="330"/>
+        </pc:sldMkLst>
+        <pc:picChg chg="mod modCrop">
+          <ac:chgData name="CONDORI ARGOLLO, NELSON GABRIEL" userId="S::13762741@alu365.murciaeduca.es::226c2f5f-8132-41ef-aa3e-e4667f621121" providerId="AD" clId="Web-{037E1A52-2D06-290C-270F-AAF8E2BD7F8E}" dt="2025-12-18T20:21:05.665" v="19"/>
+          <ac:picMkLst>
+            <pc:docMk/>
+            <pc:sldMk cId="544873430" sldId="330"/>
+            <ac:picMk id="5" creationId="{D9B92CBC-5DAE-570B-9262-97919050B5E3}"/>
+          </ac:picMkLst>
+        </pc:picChg>
+        <pc:picChg chg="mod modCrop">
+          <ac:chgData name="CONDORI ARGOLLO, NELSON GABRIEL" userId="S::13762741@alu365.murciaeduca.es::226c2f5f-8132-41ef-aa3e-e4667f621121" providerId="AD" clId="Web-{037E1A52-2D06-290C-270F-AAF8E2BD7F8E}" dt="2025-12-18T20:22:24.993" v="22" actId="14100"/>
+          <ac:picMkLst>
+            <pc:docMk/>
+            <pc:sldMk cId="544873430" sldId="330"/>
+            <ac:picMk id="8" creationId="{F339A8FA-F9EF-E9C9-ECBB-0495193655A1}"/>
+          </ac:picMkLst>
+        </pc:picChg>
+      </pc:sldChg>
+      <pc:sldChg chg="modSp">
+        <pc:chgData name="CONDORI ARGOLLO, NELSON GABRIEL" userId="S::13762741@alu365.murciaeduca.es::226c2f5f-8132-41ef-aa3e-e4667f621121" providerId="AD" clId="Web-{037E1A52-2D06-290C-270F-AAF8E2BD7F8E}" dt="2025-12-18T19:45:43.856" v="0" actId="1076"/>
+        <pc:sldMkLst>
+          <pc:docMk/>
+          <pc:sldMk cId="548552804" sldId="339"/>
         </pc:sldMkLst>
         <pc:spChg chg="mod">
-          <ac:chgData name="MIGUEL TRIGUEROS MUÑOZ" userId="S::miguel.trigueros@aulaxxi.murciaeduca.es::a4ee0321-97d7-430f-98a8-7ed13ff9a4bf" providerId="AD" clId="Web-{E09DD130-612E-646E-A622-1F0A4BF8BCB8}" dt="2025-10-04T07:15:30.355" v="28" actId="20577"/>
+          <ac:chgData name="CONDORI ARGOLLO, NELSON GABRIEL" userId="S::13762741@alu365.murciaeduca.es::226c2f5f-8132-41ef-aa3e-e4667f621121" providerId="AD" clId="Web-{037E1A52-2D06-290C-270F-AAF8E2BD7F8E}" dt="2025-12-18T19:45:43.856" v="0" actId="1076"/>
           <ac:spMkLst>
             <pc:docMk/>
-            <pc:sldMk cId="1441313987" sldId="308"/>
-            <ac:spMk id="7" creationId="{03FD58B7-5F60-8ED6-BC4F-7B286447C10A}"/>
-          </ac:spMkLst>
-        </pc:spChg>
-      </pc:sldChg>
-      <pc:sldChg chg="addSp delSp modSp mod modClrScheme chgLayout">
-        <pc:chgData name="MIGUEL TRIGUEROS MUÑOZ" userId="S::miguel.trigueros@aulaxxi.murciaeduca.es::a4ee0321-97d7-430f-98a8-7ed13ff9a4bf" providerId="AD" clId="Web-{E09DD130-612E-646E-A622-1F0A4BF8BCB8}" dt="2025-10-04T07:12:59.197" v="26" actId="20577"/>
-        <pc:sldMkLst>
-          <pc:docMk/>
-          <pc:sldMk cId="1679762254" sldId="309"/>
-        </pc:sldMkLst>
-        <pc:spChg chg="mod ord">
-          <ac:chgData name="MIGUEL TRIGUEROS MUÑOZ" userId="S::miguel.trigueros@aulaxxi.murciaeduca.es::a4ee0321-97d7-430f-98a8-7ed13ff9a4bf" providerId="AD" clId="Web-{E09DD130-612E-646E-A622-1F0A4BF8BCB8}" dt="2025-10-04T07:10:12.428" v="2"/>
-          <ac:spMkLst>
-            <pc:docMk/>
-            <pc:sldMk cId="1679762254" sldId="309"/>
-            <ac:spMk id="2" creationId="{3EA543D3-C58C-1AE7-0D94-9F33892E7FF5}"/>
-          </ac:spMkLst>
-        </pc:spChg>
-        <pc:spChg chg="mod ord">
-          <ac:chgData name="MIGUEL TRIGUEROS MUÑOZ" userId="S::miguel.trigueros@aulaxxi.murciaeduca.es::a4ee0321-97d7-430f-98a8-7ed13ff9a4bf" providerId="AD" clId="Web-{E09DD130-612E-646E-A622-1F0A4BF8BCB8}" dt="2025-10-04T07:10:12.428" v="2"/>
-          <ac:spMkLst>
-            <pc:docMk/>
-            <pc:sldMk cId="1679762254" sldId="309"/>
-            <ac:spMk id="3" creationId="{45075051-CFEA-750E-7BF4-B90054C05CEF}"/>
-          </ac:spMkLst>
-        </pc:spChg>
-        <pc:spChg chg="mod ord">
-          <ac:chgData name="MIGUEL TRIGUEROS MUÑOZ" userId="S::miguel.trigueros@aulaxxi.murciaeduca.es::a4ee0321-97d7-430f-98a8-7ed13ff9a4bf" providerId="AD" clId="Web-{E09DD130-612E-646E-A622-1F0A4BF8BCB8}" dt="2025-10-04T07:10:12.428" v="2"/>
-          <ac:spMkLst>
-            <pc:docMk/>
-            <pc:sldMk cId="1679762254" sldId="309"/>
-            <ac:spMk id="5" creationId="{8636E657-EAB7-E19E-B348-18CFA0661CB8}"/>
-          </ac:spMkLst>
-        </pc:spChg>
-        <pc:spChg chg="mod ord">
-          <ac:chgData name="MIGUEL TRIGUEROS MUÑOZ" userId="S::miguel.trigueros@aulaxxi.murciaeduca.es::a4ee0321-97d7-430f-98a8-7ed13ff9a4bf" providerId="AD" clId="Web-{E09DD130-612E-646E-A622-1F0A4BF8BCB8}" dt="2025-10-04T07:12:59.197" v="26" actId="20577"/>
-          <ac:spMkLst>
-            <pc:docMk/>
-            <pc:sldMk cId="1679762254" sldId="309"/>
-            <ac:spMk id="6" creationId="{6AF26118-0494-EB9E-7176-C80456E36815}"/>
+            <pc:sldMk cId="548552804" sldId="339"/>
+            <ac:spMk id="3" creationId="{172EB05F-3146-ABBB-BEE2-7AFD16066B9D}"/>
           </ac:spMkLst>
         </pc:spChg>
       </pc:sldChg>
     </pc:docChg>
   </pc:docChgLst>
   <pc:docChgLst>
-    <pc:chgData name="MIGUEL TRIGUEROS MUÑOZ" userId="S::miguel.trigueros@aulaxxi.murciaeduca.es::a4ee0321-97d7-430f-98a8-7ed13ff9a4bf" providerId="AD" clId="Web-{90E2A9E7-7C12-B274-D7CB-01D663E1F7C2}"/>
+    <pc:chgData name="MIGUEL TRIGUEROS MUÑOZ" userId="S::miguel.trigueros@aulaxxi.murciaeduca.es::a4ee0321-97d7-430f-98a8-7ed13ff9a4bf" providerId="AD" clId="Web-{48405ED2-EDE2-83CA-124F-BE744D0212E4}"/>
     <pc:docChg chg="modSld">
-      <pc:chgData name="MIGUEL TRIGUEROS MUÑOZ" userId="S::miguel.trigueros@aulaxxi.murciaeduca.es::a4ee0321-97d7-430f-98a8-7ed13ff9a4bf" providerId="AD" clId="Web-{90E2A9E7-7C12-B274-D7CB-01D663E1F7C2}" dt="2025-11-02T06:24:38.434" v="26" actId="1076"/>
+      <pc:chgData name="MIGUEL TRIGUEROS MUÑOZ" userId="S::miguel.trigueros@aulaxxi.murciaeduca.es::a4ee0321-97d7-430f-98a8-7ed13ff9a4bf" providerId="AD" clId="Web-{48405ED2-EDE2-83CA-124F-BE744D0212E4}" dt="2025-11-28T11:09:44.908" v="67"/>
       <pc:docMkLst>
         <pc:docMk/>
       </pc:docMkLst>
-      <pc:sldChg chg="delSp modSp">
-        <pc:chgData name="MIGUEL TRIGUEROS MUÑOZ" userId="S::miguel.trigueros@aulaxxi.murciaeduca.es::a4ee0321-97d7-430f-98a8-7ed13ff9a4bf" providerId="AD" clId="Web-{90E2A9E7-7C12-B274-D7CB-01D663E1F7C2}" dt="2025-11-02T06:23:37.398" v="6"/>
+      <pc:sldChg chg="modSp">
+        <pc:chgData name="MIGUEL TRIGUEROS MUÑOZ" userId="S::miguel.trigueros@aulaxxi.murciaeduca.es::a4ee0321-97d7-430f-98a8-7ed13ff9a4bf" providerId="AD" clId="Web-{48405ED2-EDE2-83CA-124F-BE744D0212E4}" dt="2025-11-28T11:09:44.908" v="67"/>
         <pc:sldMkLst>
           <pc:docMk/>
-          <pc:sldMk cId="1813723418" sldId="311"/>
+          <pc:sldMk cId="2861142992" sldId="316"/>
         </pc:sldMkLst>
-        <pc:spChg chg="mod">
-          <ac:chgData name="MIGUEL TRIGUEROS MUÑOZ" userId="S::miguel.trigueros@aulaxxi.murciaeduca.es::a4ee0321-97d7-430f-98a8-7ed13ff9a4bf" providerId="AD" clId="Web-{90E2A9E7-7C12-B274-D7CB-01D663E1F7C2}" dt="2025-11-02T06:23:37.398" v="6"/>
-          <ac:spMkLst>
+        <pc:grpChg chg="mod">
+          <ac:chgData name="MIGUEL TRIGUEROS MUÑOZ" userId="S::miguel.trigueros@aulaxxi.murciaeduca.es::a4ee0321-97d7-430f-98a8-7ed13ff9a4bf" providerId="AD" clId="Web-{48405ED2-EDE2-83CA-124F-BE744D0212E4}" dt="2025-11-28T11:05:08.585" v="29" actId="1076"/>
+          <ac:grpSpMkLst>
             <pc:docMk/>
-            <pc:sldMk cId="1813723418" sldId="311"/>
-            <ac:spMk id="5" creationId="{88D7B9B6-425E-3377-41A4-67288BA48F5C}"/>
-          </ac:spMkLst>
-        </pc:spChg>
-        <pc:cxnChg chg="del">
-          <ac:chgData name="MIGUEL TRIGUEROS MUÑOZ" userId="S::miguel.trigueros@aulaxxi.murciaeduca.es::a4ee0321-97d7-430f-98a8-7ed13ff9a4bf" providerId="AD" clId="Web-{90E2A9E7-7C12-B274-D7CB-01D663E1F7C2}" dt="2025-11-02T06:23:03.708" v="0"/>
-          <ac:cxnSpMkLst>
+            <pc:sldMk cId="2861142992" sldId="316"/>
+            <ac:grpSpMk id="8" creationId="{30AD3789-136B-A7C5-612F-DF642BAD70B4}"/>
+          </ac:grpSpMkLst>
+        </pc:grpChg>
+        <pc:graphicFrameChg chg="mod modGraphic">
+          <ac:chgData name="MIGUEL TRIGUEROS MUÑOZ" userId="S::miguel.trigueros@aulaxxi.murciaeduca.es::a4ee0321-97d7-430f-98a8-7ed13ff9a4bf" providerId="AD" clId="Web-{48405ED2-EDE2-83CA-124F-BE744D0212E4}" dt="2025-11-28T11:09:44.908" v="67"/>
+          <ac:graphicFrameMkLst>
             <pc:docMk/>
-            <pc:sldMk cId="1813723418" sldId="311"/>
-            <ac:cxnSpMk id="3" creationId="{7D902D33-A590-277A-4920-2646C6AF1BCD}"/>
-          </ac:cxnSpMkLst>
-        </pc:cxnChg>
+            <pc:sldMk cId="2861142992" sldId="316"/>
+            <ac:graphicFrameMk id="14" creationId="{96A8E327-999F-F209-BF6F-5631386368BD}"/>
+          </ac:graphicFrameMkLst>
+        </pc:graphicFrameChg>
+        <pc:picChg chg="mod">
+          <ac:chgData name="MIGUEL TRIGUEROS MUÑOZ" userId="S::miguel.trigueros@aulaxxi.murciaeduca.es::a4ee0321-97d7-430f-98a8-7ed13ff9a4bf" providerId="AD" clId="Web-{48405ED2-EDE2-83CA-124F-BE744D0212E4}" dt="2025-11-28T11:05:07.022" v="25" actId="14100"/>
+          <ac:picMkLst>
+            <pc:docMk/>
+            <pc:sldMk cId="2861142992" sldId="316"/>
+            <ac:picMk id="16" creationId="{A998C36C-8D26-A866-00BB-BF0C8B810838}"/>
+          </ac:picMkLst>
+        </pc:picChg>
       </pc:sldChg>
-      <pc:sldChg chg="addSp modSp">
-        <pc:chgData name="MIGUEL TRIGUEROS MUÑOZ" userId="S::miguel.trigueros@aulaxxi.murciaeduca.es::a4ee0321-97d7-430f-98a8-7ed13ff9a4bf" providerId="AD" clId="Web-{90E2A9E7-7C12-B274-D7CB-01D663E1F7C2}" dt="2025-11-02T06:24:38.434" v="26" actId="1076"/>
+    </pc:docChg>
+  </pc:docChgLst>
+  <pc:docChgLst>
+    <pc:chgData name="Usuario invitado" userId="S::urn:spo:tenantanon#e8824902-b014-4524-99bd-d1ab5711db13::" providerId="AD" clId="Web-{7DB55E39-0D0B-6B48-85AB-63C26D46838F}"/>
+    <pc:docChg chg="modSld">
+      <pc:chgData name="Usuario invitado" userId="S::urn:spo:tenantanon#e8824902-b014-4524-99bd-d1ab5711db13::" providerId="AD" clId="Web-{7DB55E39-0D0B-6B48-85AB-63C26D46838F}" dt="2025-12-19T08:06:06.968" v="1" actId="1076"/>
+      <pc:docMkLst>
+        <pc:docMk/>
+      </pc:docMkLst>
+      <pc:sldChg chg="modSp">
+        <pc:chgData name="Usuario invitado" userId="S::urn:spo:tenantanon#e8824902-b014-4524-99bd-d1ab5711db13::" providerId="AD" clId="Web-{7DB55E39-0D0B-6B48-85AB-63C26D46838F}" dt="2025-12-19T08:05:10.273" v="0" actId="1076"/>
         <pc:sldMkLst>
           <pc:docMk/>
-          <pc:sldMk cId="1814859966" sldId="313"/>
+          <pc:sldMk cId="2861142992" sldId="316"/>
         </pc:sldMkLst>
-        <pc:spChg chg="add mod">
-          <ac:chgData name="MIGUEL TRIGUEROS MUÑOZ" userId="S::miguel.trigueros@aulaxxi.murciaeduca.es::a4ee0321-97d7-430f-98a8-7ed13ff9a4bf" providerId="AD" clId="Web-{90E2A9E7-7C12-B274-D7CB-01D663E1F7C2}" dt="2025-11-02T06:24:38.434" v="26" actId="1076"/>
-          <ac:spMkLst>
+        <pc:grpChg chg="mod">
+          <ac:chgData name="Usuario invitado" userId="S::urn:spo:tenantanon#e8824902-b014-4524-99bd-d1ab5711db13::" providerId="AD" clId="Web-{7DB55E39-0D0B-6B48-85AB-63C26D46838F}" dt="2025-12-19T08:05:10.273" v="0" actId="1076"/>
+          <ac:grpSpMkLst>
             <pc:docMk/>
-            <pc:sldMk cId="1814859966" sldId="313"/>
-            <ac:spMk id="10" creationId="{B4AF8F94-C012-9746-80BC-5687F3F16C0B}"/>
-          </ac:spMkLst>
-        </pc:spChg>
+            <pc:sldMk cId="2861142992" sldId="316"/>
+            <ac:grpSpMk id="8" creationId="{30AD3789-136B-A7C5-612F-DF642BAD70B4}"/>
+          </ac:grpSpMkLst>
+        </pc:grpChg>
+      </pc:sldChg>
+      <pc:sldChg chg="modSp">
+        <pc:chgData name="Usuario invitado" userId="S::urn:spo:tenantanon#e8824902-b014-4524-99bd-d1ab5711db13::" providerId="AD" clId="Web-{7DB55E39-0D0B-6B48-85AB-63C26D46838F}" dt="2025-12-19T08:06:06.968" v="1" actId="1076"/>
+        <pc:sldMkLst>
+          <pc:docMk/>
+          <pc:sldMk cId="959411268" sldId="331"/>
+        </pc:sldMkLst>
+        <pc:grpChg chg="mod">
+          <ac:chgData name="Usuario invitado" userId="S::urn:spo:tenantanon#e8824902-b014-4524-99bd-d1ab5711db13::" providerId="AD" clId="Web-{7DB55E39-0D0B-6B48-85AB-63C26D46838F}" dt="2025-12-19T08:06:06.968" v="1" actId="1076"/>
+          <ac:grpSpMkLst>
+            <pc:docMk/>
+            <pc:sldMk cId="959411268" sldId="331"/>
+            <ac:grpSpMk id="8" creationId="{ADD52E52-4F92-2B9F-9184-98D490AB8A48}"/>
+          </ac:grpSpMkLst>
+        </pc:grpChg>
       </pc:sldChg>
     </pc:docChg>
   </pc:docChgLst>
@@ -538,7 +592,7 @@
           <a:p>
             <a:fld id="{BA89FAE3-5837-4C1B-BC4B-90063F16532C}" type="datetimeFigureOut">
               <a:rPr lang="es-ES" smtClean="0"/>
-              <a:t>01/11/2025</a:t>
+              <a:t>19/12/2025</a:t>
             </a:fld>
             <a:endParaRPr lang="es-ES"/>
           </a:p>
@@ -802,7 +856,7 @@
           <a:p>
             <a:fld id="{8EB2F5B8-9C38-4C2F-A3DB-B7BB22627150}" type="datetimeFigureOut">
               <a:rPr lang="es-ES" smtClean="0"/>
-              <a:t>01/11/2025</a:t>
+              <a:t>18/12/2025</a:t>
             </a:fld>
             <a:endParaRPr lang="es-ES"/>
           </a:p>
@@ -1198,7 +1252,7 @@
           <a:lstStyle/>
           <a:p>
             <a:r>
-              <a:rPr lang="es-ES" dirty="0"/>
+              <a:rPr lang="es-ES"/>
               <a:t>PENDIENTE: Realizar el ejemplo en DRAW.io</a:t>
             </a:r>
           </a:p>
@@ -1285,16 +1339,16 @@
           <a:lstStyle/>
           <a:p>
             <a:r>
-              <a:rPr lang="es-ES" dirty="0"/>
+              <a:rPr lang="es-ES"/>
               <a:t>¿Por qué mejoran la reutilización? </a:t>
             </a:r>
             <a:r>
-              <a:rPr lang="es-ES" dirty="0">
+              <a:rPr lang="es-ES">
                 <a:sym typeface="Wingdings" panose="05000000000000000000" pitchFamily="2" charset="2"/>
               </a:rPr>
               <a:t> </a:t>
             </a:r>
-            <a:endParaRPr lang="es-ES" dirty="0"/>
+            <a:endParaRPr lang="es-ES"/>
           </a:p>
         </p:txBody>
       </p:sp>
@@ -1379,7 +1433,7 @@
           <a:lstStyle/>
           <a:p>
             <a:r>
-              <a:rPr lang="es-ES" dirty="0"/>
+              <a:rPr lang="es-ES"/>
               <a:t>MEJORAR LOS EJEMPLOS AÑADIENDO CÓDIGO C01-INICIAR</a:t>
             </a:r>
           </a:p>
@@ -1466,79 +1520,79 @@
           <a:lstStyle/>
           <a:p>
             <a:r>
-              <a:rPr lang="es-ES" dirty="0"/>
+              <a:rPr lang="es-ES"/>
               <a:t>No</a:t>
             </a:r>
             <a:r>
-              <a:rPr lang="es-ES" baseline="0" dirty="0"/>
+              <a:rPr lang="es-ES" baseline="0"/>
               <a:t> pasar la solución a los alumnos??</a:t>
             </a:r>
           </a:p>
           <a:p>
             <a:r>
-              <a:rPr lang="es-ES" b="1" dirty="0"/>
+              <a:rPr lang="es-ES" b="1"/>
               <a:t>Conversador</a:t>
             </a:r>
             <a:r>
-              <a:rPr lang="es-ES" dirty="0"/>
+              <a:rPr lang="es-ES"/>
               <a:t>: Hace referencia a alguien que participa activamente en la conversación.</a:t>
             </a:r>
           </a:p>
           <a:p>
             <a:r>
-              <a:rPr lang="es-ES" b="1" dirty="0"/>
+              <a:rPr lang="es-ES" b="1"/>
               <a:t>Interlocutor</a:t>
             </a:r>
             <a:r>
-              <a:rPr lang="es-ES" dirty="0"/>
+              <a:rPr lang="es-ES"/>
               <a:t>: Un término que enfatiza la interacción con otro participante.</a:t>
             </a:r>
           </a:p>
           <a:p>
             <a:r>
-              <a:rPr lang="es-ES" b="1" dirty="0"/>
+              <a:rPr lang="es-ES" b="1"/>
               <a:t>Participante</a:t>
             </a:r>
             <a:r>
-              <a:rPr lang="es-ES" dirty="0"/>
+              <a:rPr lang="es-ES"/>
               <a:t>: Fomenta la idea de alguien que forma parte de un intercambio.</a:t>
             </a:r>
           </a:p>
           <a:p>
             <a:r>
-              <a:rPr lang="es-ES" b="1" dirty="0"/>
+              <a:rPr lang="es-ES" b="1"/>
               <a:t>Remitente</a:t>
             </a:r>
             <a:r>
-              <a:rPr lang="es-ES" dirty="0"/>
+              <a:rPr lang="es-ES"/>
               <a:t> y </a:t>
             </a:r>
             <a:r>
-              <a:rPr lang="es-ES" b="1" dirty="0"/>
+              <a:rPr lang="es-ES" b="1"/>
               <a:t>Destinatario</a:t>
             </a:r>
             <a:r>
-              <a:rPr lang="es-ES" dirty="0"/>
+              <a:rPr lang="es-ES"/>
               <a:t>: Nombres que se pueden usar para distinguir el origen y destino de los mensajes.</a:t>
             </a:r>
           </a:p>
           <a:p>
             <a:r>
-              <a:rPr lang="es-ES" b="1" dirty="0"/>
+              <a:rPr lang="es-ES" b="1"/>
               <a:t>Comunicador</a:t>
             </a:r>
             <a:r>
-              <a:rPr lang="es-ES" dirty="0"/>
+              <a:rPr lang="es-ES"/>
               <a:t>: Resalta el acto de transmitir mensajes.</a:t>
             </a:r>
           </a:p>
           <a:p>
             <a:r>
-              <a:rPr lang="es-ES" b="1" dirty="0"/>
+              <a:rPr lang="es-ES" b="1"/>
               <a:t>Miembro</a:t>
             </a:r>
             <a:r>
-              <a:rPr lang="es-ES" dirty="0"/>
+              <a:rPr lang="es-ES"/>
               <a:t>: Útil si el chat es parte de una comunidad o grupo.</a:t>
             </a:r>
           </a:p>
@@ -1711,7 +1765,14 @@
           <a:bodyPr/>
           <a:lstStyle/>
           <a:p>
-            <a:endParaRPr lang="es-ES" dirty="0"/>
+            <a:r>
+              <a:rPr lang="es-ES">
+                <a:ea typeface="Calibri"/>
+                <a:cs typeface="Calibri"/>
+              </a:rPr>
+              <a:t>ELIMINO la alternativa 1 para que la tarea de los diagramas de secuencia tenga una dificultad más progresiva.</a:t>
+            </a:r>
+            <a:endParaRPr lang="es-ES"/>
           </a:p>
         </p:txBody>
       </p:sp>
@@ -1796,7 +1857,7 @@
           <a:lstStyle/>
           <a:p>
             <a:r>
-              <a:rPr lang="es-ES" dirty="0"/>
+              <a:rPr lang="es-ES"/>
               <a:t>Es una tabla. Se tienen que generar 3 tablas, una por cada caso de uso.</a:t>
             </a:r>
           </a:p>
@@ -1883,13 +1944,13 @@
           <a:lstStyle/>
           <a:p>
             <a:r>
-              <a:rPr lang="es-ES" dirty="0"/>
+              <a:rPr lang="es-ES"/>
               <a:t>Dibujando podemos transmitir de un vistazo ideas complejas: especialmente si compartimos un registro y código común.</a:t>
             </a:r>
           </a:p>
           <a:p>
             <a:r>
-              <a:rPr lang="es-ES" dirty="0"/>
+              <a:rPr lang="es-ES"/>
               <a:t>Conexión con el proyecto final: en ese momento no olvidéis añadir los diagramas necesarios, aprovechando su potencial para transmitir ideas y decisiones técnicas de un vistazo</a:t>
             </a:r>
           </a:p>
@@ -1993,11 +2054,11 @@
               <a:defRPr/>
             </a:pPr>
             <a:r>
-              <a:rPr lang="es-ES" dirty="0"/>
+              <a:rPr lang="es-ES"/>
               <a:t>Cea </a:t>
             </a:r>
             <a:r>
-              <a:rPr lang="es-ES" sz="1800" b="0" i="1" u="none" strike="noStrike" dirty="0">
+              <a:rPr lang="es-ES" sz="1800" b="0" i="1" u="none" strike="noStrike">
                 <a:solidFill>
                   <a:srgbClr val="695D46"/>
                 </a:solidFill>
@@ -2006,10 +2067,10 @@
               </a:rPr>
               <a:t>Se han identificado los distintos tipos de diagramas de comportamiento. </a:t>
             </a:r>
-            <a:endParaRPr lang="es-ES" dirty="0"/>
-          </a:p>
-          <a:p>
-            <a:endParaRPr lang="es-ES" dirty="0"/>
+            <a:endParaRPr lang="es-ES"/>
+          </a:p>
+          <a:p>
+            <a:endParaRPr lang="es-ES"/>
           </a:p>
         </p:txBody>
       </p:sp>
@@ -2094,17 +2155,17 @@
           <a:lstStyle/>
           <a:p>
             <a:r>
-              <a:rPr lang="es-ES" dirty="0"/>
+              <a:rPr lang="es-ES"/>
               <a:t>Pedir al alumnado que interprete el diagrama antes de explicarles nada:</a:t>
             </a:r>
           </a:p>
           <a:p>
             <a:r>
-              <a:rPr lang="es-ES" dirty="0"/>
+              <a:rPr lang="es-ES"/>
               <a:t>La información más importante que transmite es que nos indica </a:t>
             </a:r>
             <a:r>
-              <a:rPr lang="es-ES" b="1" dirty="0"/>
+              <a:rPr lang="es-ES" b="1"/>
               <a:t>quién puede hacer cada una de las cosas que se pueden hacer</a:t>
             </a:r>
           </a:p>
@@ -2191,7 +2252,7 @@
           <a:lstStyle/>
           <a:p>
             <a:r>
-              <a:rPr lang="es-ES" dirty="0"/>
+              <a:rPr lang="es-ES"/>
               <a:t>¿</a:t>
             </a:r>
           </a:p>
@@ -2295,15 +2356,15 @@
               <a:defRPr/>
             </a:pPr>
             <a:r>
-              <a:rPr lang="es-ES" dirty="0" err="1"/>
+              <a:rPr lang="es-ES" err="1"/>
               <a:t>Ceb</a:t>
             </a:r>
             <a:r>
-              <a:rPr lang="es-ES" dirty="0"/>
+              <a:rPr lang="es-ES"/>
               <a:t> </a:t>
             </a:r>
             <a:r>
-              <a:rPr lang="es-ES" sz="1800" b="0" i="1" u="none" strike="noStrike" dirty="0">
+              <a:rPr lang="es-ES" sz="1800" b="0" i="1" u="none" strike="noStrike">
                 <a:solidFill>
                   <a:srgbClr val="695D46"/>
                 </a:solidFill>
@@ -2312,10 +2373,10 @@
               </a:rPr>
               <a:t>Se ha reconocido el significado de los diagramas de casos de uso. </a:t>
             </a:r>
-            <a:endParaRPr lang="es-ES" dirty="0"/>
-          </a:p>
-          <a:p>
-            <a:endParaRPr lang="es-ES" dirty="0"/>
+            <a:endParaRPr lang="es-ES"/>
+          </a:p>
+          <a:p>
+            <a:endParaRPr lang="es-ES"/>
           </a:p>
         </p:txBody>
       </p:sp>
@@ -2399,7 +2460,7 @@
           <a:bodyPr/>
           <a:lstStyle/>
           <a:p>
-            <a:endParaRPr lang="es-ES" dirty="0"/>
+            <a:endParaRPr lang="es-ES"/>
           </a:p>
         </p:txBody>
       </p:sp>
@@ -2484,7 +2545,7 @@
           <a:lstStyle/>
           <a:p>
             <a:r>
-              <a:rPr lang="es-ES" dirty="0"/>
+              <a:rPr lang="es-ES"/>
               <a:t>Este ejemplo tienes casos de uso que son físicos (que solo se reflejarían en nuestro análisis real si el actor correspondiente usara el SISTEMA para registrarlos, tomar comanda, o comunicarlos, preparar comida)</a:t>
             </a:r>
           </a:p>
@@ -2571,20 +2632,20 @@
           <a:lstStyle/>
           <a:p>
             <a:r>
-              <a:rPr lang="es-ES" dirty="0"/>
+              <a:rPr lang="es-ES"/>
               <a:t>SIEMPRE</a:t>
             </a:r>
             <a:r>
-              <a:rPr lang="es-ES" baseline="0" dirty="0"/>
+              <a:rPr lang="es-ES" baseline="0"/>
               <a:t> que consultamos notas o se cambian las notas, se imprime un resguardo.</a:t>
             </a:r>
           </a:p>
           <a:p>
             <a:r>
-              <a:rPr lang="es-ES" baseline="0" dirty="0"/>
+              <a:rPr lang="es-ES" baseline="0"/>
               <a:t>IMPRIMIR se puede reutilizar en otros casos de uso.</a:t>
             </a:r>
-            <a:endParaRPr lang="es-ES" dirty="0"/>
+            <a:endParaRPr lang="es-ES"/>
           </a:p>
         </p:txBody>
       </p:sp>
@@ -3277,7 +3338,7 @@
               <a:rPr lang="es-ES"/>
               <a:t>Haga clic para modificar el estilo de título del patrón</a:t>
             </a:r>
-            <a:endParaRPr lang="en-US" dirty="0"/>
+            <a:endParaRPr lang="en-US"/>
           </a:p>
         </p:txBody>
       </p:sp>
@@ -3397,7 +3458,7 @@
               <a:rPr lang="es-ES"/>
               <a:t>Haga clic para modificar el estilo de subtítulo del patrón</a:t>
             </a:r>
-            <a:endParaRPr lang="en-US" dirty="0"/>
+            <a:endParaRPr lang="en-US"/>
           </a:p>
         </p:txBody>
       </p:sp>
@@ -3580,7 +3641,6 @@
               <a:rPr lang="es-ES"/>
               <a:t>Quinto nivel</a:t>
             </a:r>
-            <a:endParaRPr lang="es-ES" dirty="0"/>
           </a:p>
         </p:txBody>
       </p:sp>
@@ -3623,7 +3683,7 @@
               <a:rPr lang="es-ES"/>
               <a:t>Haga clic para modificar el estilo de título del patrón</a:t>
             </a:r>
-            <a:endParaRPr lang="en-US" dirty="0"/>
+            <a:endParaRPr lang="en-US"/>
           </a:p>
         </p:txBody>
       </p:sp>
@@ -3770,7 +3830,6 @@
               <a:rPr lang="es-ES"/>
               <a:t>Quinto nivel</a:t>
             </a:r>
-            <a:endParaRPr lang="es-ES" dirty="0"/>
           </a:p>
         </p:txBody>
       </p:sp>
@@ -3813,7 +3872,7 @@
               <a:rPr lang="es-ES"/>
               <a:t>Haga clic para modificar el estilo de título del patrón</a:t>
             </a:r>
-            <a:endParaRPr lang="en-US" dirty="0"/>
+            <a:endParaRPr lang="en-US"/>
           </a:p>
         </p:txBody>
       </p:sp>
@@ -4066,7 +4125,6 @@
               <a:rPr lang="es-ES"/>
               <a:t>Quinto nivel</a:t>
             </a:r>
-            <a:endParaRPr lang="es-ES" dirty="0"/>
           </a:p>
         </p:txBody>
       </p:sp>
@@ -4109,7 +4167,7 @@
               <a:rPr lang="es-ES"/>
               <a:t>Haga clic para modificar el estilo de título del patrón</a:t>
             </a:r>
-            <a:endParaRPr lang="en-US" dirty="0"/>
+            <a:endParaRPr lang="en-US"/>
           </a:p>
         </p:txBody>
       </p:sp>
@@ -4307,7 +4365,6 @@
               <a:rPr lang="es-ES"/>
               <a:t>Quinto nivel</a:t>
             </a:r>
-            <a:endParaRPr lang="es-ES" dirty="0"/>
           </a:p>
         </p:txBody>
       </p:sp>
@@ -4345,10 +4402,10 @@
           </a:lstStyle>
           <a:p>
             <a:r>
-              <a:rPr lang="es-ES" dirty="0"/>
+              <a:rPr lang="es-ES"/>
               <a:t>TAREA X</a:t>
             </a:r>
-            <a:endParaRPr lang="en-US" dirty="0"/>
+            <a:endParaRPr lang="en-US"/>
           </a:p>
         </p:txBody>
       </p:sp>
@@ -4447,7 +4504,7 @@
               <a:rPr lang="es-ES"/>
               <a:t>Haga clic para modificar el estilo de título del patrón</a:t>
             </a:r>
-            <a:endParaRPr lang="en-US" dirty="0"/>
+            <a:endParaRPr lang="en-US"/>
           </a:p>
         </p:txBody>
       </p:sp>
@@ -4596,7 +4653,7 @@
           <a:p>
             <a:fld id="{4573F839-80E0-456A-B4D0-BAFED41946AC}" type="datetime1">
               <a:rPr lang="en-US" smtClean="0"/>
-              <a:t>11/1/2025</a:t>
+              <a:t>12/18/2025</a:t>
             </a:fld>
             <a:endParaRPr lang="en-US"/>
           </a:p>
@@ -4774,7 +4831,7 @@
           <a:p>
             <a:fld id="{51593C50-AD2B-485A-B3A1-D50376802F8F}" type="datetime1">
               <a:rPr lang="en-US" smtClean="0"/>
-              <a:t>11/1/2025</a:t>
+              <a:t>12/18/2025</a:t>
             </a:fld>
             <a:endParaRPr lang="en-US"/>
           </a:p>
@@ -5487,7 +5544,7 @@
               <a:rPr lang="es-ES"/>
               <a:t>Haga clic para modificar el estilo de título del patrón</a:t>
             </a:r>
-            <a:endParaRPr lang="en-US" dirty="0"/>
+            <a:endParaRPr lang="en-US"/>
           </a:p>
         </p:txBody>
       </p:sp>
@@ -5549,7 +5606,7 @@
               <a:rPr lang="es-ES"/>
               <a:t>Quinto nivel</a:t>
             </a:r>
-            <a:endParaRPr lang="en-US" dirty="0"/>
+            <a:endParaRPr lang="en-US"/>
           </a:p>
         </p:txBody>
       </p:sp>
@@ -5701,10 +5758,10 @@
           </a:lstStyle>
           <a:p>
             <a:r>
-              <a:rPr lang="es-ES" sz="800" dirty="0"/>
+              <a:rPr lang="es-ES" sz="800"/>
               <a:t>UT03 DIAGRAMAS DE COMPORTAMIENTO</a:t>
             </a:r>
-            <a:endParaRPr lang="en-US" sz="800" dirty="0"/>
+            <a:endParaRPr lang="en-US" sz="800"/>
           </a:p>
         </p:txBody>
       </p:sp>
@@ -6246,7 +6303,7 @@
           <a:p>
             <a:pPr algn="l"/>
             <a:r>
-              <a:rPr lang="es-ES" dirty="0"/>
+              <a:rPr lang="es-ES"/>
               <a:t>UT3 DIAGRAMAS DE COMPORTAMIENTO</a:t>
             </a:r>
           </a:p>
@@ -6566,7 +6623,7 @@
           <a:bodyPr/>
           <a:lstStyle/>
           <a:p>
-            <a:endParaRPr lang="es-ES" dirty="0"/>
+            <a:endParaRPr lang="es-ES"/>
           </a:p>
         </p:txBody>
       </p:sp>
@@ -6596,7 +6653,7 @@
               <a:buNone/>
             </a:pPr>
             <a:r>
-              <a:rPr lang="es-ES" dirty="0"/>
+              <a:rPr lang="es-ES"/>
               <a:t>2. Diagramas de casos de uso</a:t>
             </a:r>
           </a:p>
@@ -6624,14 +6681,14 @@
           <a:lstStyle/>
           <a:p>
             <a:r>
-              <a:rPr lang="es-ES" dirty="0"/>
+              <a:rPr lang="es-ES"/>
               <a:t>2.2</a:t>
             </a:r>
             <a:r>
-              <a:rPr lang="es-ES" baseline="0" dirty="0"/>
+              <a:rPr lang="es-ES" baseline="0"/>
               <a:t> EJEMPLOS</a:t>
             </a:r>
-            <a:endParaRPr lang="es-ES" dirty="0"/>
+            <a:endParaRPr lang="es-ES"/>
           </a:p>
         </p:txBody>
       </p:sp>
@@ -6784,7 +6841,7 @@
           <a:bodyPr/>
           <a:lstStyle/>
           <a:p>
-            <a:endParaRPr lang="es-ES" dirty="0"/>
+            <a:endParaRPr lang="es-ES"/>
           </a:p>
         </p:txBody>
       </p:sp>
@@ -6814,7 +6871,7 @@
               <a:buNone/>
             </a:pPr>
             <a:r>
-              <a:rPr lang="es-ES" dirty="0"/>
+              <a:rPr lang="es-ES"/>
               <a:t>2. Diagramas de casos de uso</a:t>
             </a:r>
           </a:p>
@@ -6842,7 +6899,7 @@
           <a:lstStyle/>
           <a:p>
             <a:r>
-              <a:rPr lang="es-ES" dirty="0"/>
+              <a:rPr lang="es-ES"/>
               <a:t>2.2 EJEMPLOS</a:t>
             </a:r>
           </a:p>
@@ -6988,7 +7045,7 @@
               <a:buNone/>
             </a:pPr>
             <a:r>
-              <a:rPr lang="es-ES" dirty="0"/>
+              <a:rPr lang="es-ES"/>
               <a:t>2. Diagramas de casos de uso</a:t>
             </a:r>
           </a:p>
@@ -7016,7 +7073,7 @@
           <a:lstStyle/>
           <a:p>
             <a:r>
-              <a:rPr lang="es-ES" dirty="0"/>
+              <a:rPr lang="es-ES"/>
               <a:t>2.2 EJEMPLOS</a:t>
             </a:r>
           </a:p>
@@ -7141,7 +7198,7 @@
           <a:bodyPr/>
           <a:lstStyle/>
           <a:p>
-            <a:endParaRPr lang="es-ES" dirty="0"/>
+            <a:endParaRPr lang="es-ES"/>
           </a:p>
         </p:txBody>
       </p:sp>
@@ -7171,7 +7228,7 @@
               <a:buNone/>
             </a:pPr>
             <a:r>
-              <a:rPr lang="es-ES" dirty="0"/>
+              <a:rPr lang="es-ES"/>
               <a:t>2. Diagramas de casos de uso</a:t>
             </a:r>
           </a:p>
@@ -7199,7 +7256,7 @@
           <a:lstStyle/>
           <a:p>
             <a:r>
-              <a:rPr lang="es-ES" dirty="0">
+              <a:rPr lang="es-ES">
                 <a:solidFill>
                   <a:srgbClr val="FF0000"/>
                 </a:solidFill>
@@ -7207,7 +7264,7 @@
               <a:t>2.3</a:t>
             </a:r>
             <a:r>
-              <a:rPr lang="es-ES" baseline="0" dirty="0">
+              <a:rPr lang="es-ES" baseline="0">
                 <a:solidFill>
                   <a:srgbClr val="FF0000"/>
                 </a:solidFill>
@@ -7215,14 +7272,14 @@
               <a:t> </a:t>
             </a:r>
             <a:r>
-              <a:rPr lang="es-ES" b="1" baseline="0" dirty="0">
+              <a:rPr lang="es-ES" b="1" baseline="0">
                 <a:solidFill>
                   <a:srgbClr val="FF0000"/>
                 </a:solidFill>
               </a:rPr>
               <a:t>ASOCIACIONES</a:t>
             </a:r>
-            <a:endParaRPr lang="es-ES" b="1" dirty="0">
+            <a:endParaRPr lang="es-ES" b="1">
               <a:solidFill>
                 <a:srgbClr val="FF0000"/>
               </a:solidFill>
@@ -7263,7 +7320,7 @@
               </a:lnSpc>
             </a:pPr>
             <a:r>
-              <a:rPr dirty="0">
+              <a:rPr>
                 <a:solidFill>
                   <a:schemeClr val="tx2"/>
                 </a:solidFill>
@@ -7274,7 +7331,7 @@
               <a:t>▪</a:t>
             </a:r>
             <a:r>
-              <a:rPr spc="1429" dirty="0">
+              <a:rPr spc="1429">
                 <a:solidFill>
                   <a:schemeClr val="tx2"/>
                 </a:solidFill>
@@ -7285,7 +7342,7 @@
               <a:t> </a:t>
             </a:r>
             <a:r>
-              <a:rPr dirty="0">
+              <a:rPr>
                 <a:solidFill>
                   <a:schemeClr val="tx2"/>
                 </a:solidFill>
@@ -7296,7 +7353,7 @@
               <a:t>Las</a:t>
             </a:r>
             <a:r>
-              <a:rPr spc="17" dirty="0">
+              <a:rPr spc="17">
                 <a:solidFill>
                   <a:schemeClr val="tx2"/>
                 </a:solidFill>
@@ -7307,7 +7364,7 @@
               <a:t> </a:t>
             </a:r>
             <a:r>
-              <a:rPr dirty="0" err="1">
+              <a:rPr err="1">
                 <a:solidFill>
                   <a:schemeClr val="tx2"/>
                 </a:solidFill>
@@ -7318,7 +7375,7 @@
               <a:t>asociaciones</a:t>
             </a:r>
             <a:r>
-              <a:rPr dirty="0">
+              <a:rPr>
                 <a:solidFill>
                   <a:schemeClr val="tx2"/>
                 </a:solidFill>
@@ -7329,7 +7386,7 @@
               <a:t> </a:t>
             </a:r>
             <a:r>
-              <a:rPr dirty="0" err="1">
+              <a:rPr err="1">
                 <a:solidFill>
                   <a:schemeClr val="tx2"/>
                 </a:solidFill>
@@ -7340,7 +7397,7 @@
               <a:t>conectan</a:t>
             </a:r>
             <a:r>
-              <a:rPr spc="39" dirty="0">
+              <a:rPr spc="39">
                 <a:solidFill>
                   <a:schemeClr val="tx2"/>
                 </a:solidFill>
@@ -7351,7 +7408,7 @@
               <a:t> </a:t>
             </a:r>
             <a:r>
-              <a:rPr dirty="0" err="1">
+              <a:rPr err="1">
                 <a:solidFill>
                   <a:schemeClr val="tx2"/>
                 </a:solidFill>
@@ -7362,7 +7419,7 @@
               <a:t>el</a:t>
             </a:r>
             <a:r>
-              <a:rPr spc="18" dirty="0">
+              <a:rPr spc="18">
                 <a:solidFill>
                   <a:schemeClr val="tx2"/>
                 </a:solidFill>
@@ -7373,7 +7430,7 @@
               <a:t> </a:t>
             </a:r>
             <a:r>
-              <a:rPr b="1" dirty="0">
+              <a:rPr b="1">
                 <a:solidFill>
                   <a:schemeClr val="tx2"/>
                 </a:solidFill>
@@ -7384,7 +7441,7 @@
               <a:t>actor</a:t>
             </a:r>
             <a:r>
-              <a:rPr b="1" spc="-11" dirty="0">
+              <a:rPr b="1" spc="-11">
                 <a:solidFill>
                   <a:schemeClr val="tx2"/>
                 </a:solidFill>
@@ -7395,7 +7452,7 @@
               <a:t> </a:t>
             </a:r>
             <a:r>
-              <a:rPr dirty="0">
+              <a:rPr>
                 <a:solidFill>
                   <a:schemeClr val="tx2"/>
                 </a:solidFill>
@@ -7406,7 +7463,7 @@
               <a:t>con</a:t>
             </a:r>
             <a:r>
-              <a:rPr spc="11" dirty="0">
+              <a:rPr spc="11">
                 <a:solidFill>
                   <a:schemeClr val="tx2"/>
                 </a:solidFill>
@@ -7417,7 +7474,7 @@
               <a:t> </a:t>
             </a:r>
             <a:r>
-              <a:rPr dirty="0" err="1">
+              <a:rPr err="1">
                 <a:solidFill>
                   <a:schemeClr val="tx2"/>
                 </a:solidFill>
@@ -7428,7 +7485,7 @@
               <a:t>los</a:t>
             </a:r>
             <a:r>
-              <a:rPr spc="-16" dirty="0">
+              <a:rPr spc="-16">
                 <a:solidFill>
                   <a:schemeClr val="tx2"/>
                 </a:solidFill>
@@ -7439,7 +7496,7 @@
               <a:t> </a:t>
             </a:r>
             <a:r>
-              <a:rPr b="1" dirty="0" err="1">
+              <a:rPr b="1" err="1">
                 <a:solidFill>
                   <a:schemeClr val="tx2"/>
                 </a:solidFill>
@@ -7450,7 +7507,7 @@
               <a:t>casos</a:t>
             </a:r>
             <a:r>
-              <a:rPr b="1" spc="-23" dirty="0">
+              <a:rPr b="1" spc="-23">
                 <a:solidFill>
                   <a:schemeClr val="tx2"/>
                 </a:solidFill>
@@ -7461,7 +7518,7 @@
               <a:t> </a:t>
             </a:r>
             <a:r>
-              <a:rPr b="1" dirty="0">
+              <a:rPr b="1">
                 <a:solidFill>
                   <a:schemeClr val="tx2"/>
                 </a:solidFill>
@@ -7472,7 +7529,7 @@
               <a:t>de </a:t>
             </a:r>
             <a:r>
-              <a:rPr b="1" dirty="0" err="1">
+              <a:rPr b="1" err="1">
                 <a:solidFill>
                   <a:schemeClr val="tx2"/>
                 </a:solidFill>
@@ -7482,7 +7539,7 @@
               </a:rPr>
               <a:t>uso</a:t>
             </a:r>
-            <a:endParaRPr b="1" dirty="0">
+            <a:endParaRPr b="1">
               <a:solidFill>
                 <a:schemeClr val="tx2"/>
               </a:solidFill>
@@ -7526,7 +7583,7 @@
               </a:lnSpc>
             </a:pPr>
             <a:r>
-              <a:rPr dirty="0">
+              <a:rPr>
                 <a:solidFill>
                   <a:schemeClr val="tx2"/>
                 </a:solidFill>
@@ -7537,7 +7594,7 @@
               <a:t>▪</a:t>
             </a:r>
             <a:r>
-              <a:rPr spc="1429" dirty="0">
+              <a:rPr spc="1429">
                 <a:solidFill>
                   <a:schemeClr val="tx2"/>
                 </a:solidFill>
@@ -7548,7 +7605,7 @@
               <a:t> </a:t>
             </a:r>
             <a:r>
-              <a:rPr spc="-16" dirty="0">
+              <a:rPr spc="-16">
                 <a:solidFill>
                   <a:schemeClr val="tx2"/>
                 </a:solidFill>
@@ -7559,7 +7616,7 @@
               <a:t>Una</a:t>
             </a:r>
             <a:r>
-              <a:rPr spc="38" dirty="0">
+              <a:rPr spc="38">
                 <a:solidFill>
                   <a:schemeClr val="tx2"/>
                 </a:solidFill>
@@ -7570,7 +7627,7 @@
               <a:t> </a:t>
             </a:r>
             <a:r>
-              <a:rPr dirty="0" err="1">
+              <a:rPr err="1">
                 <a:solidFill>
                   <a:schemeClr val="tx2"/>
                 </a:solidFill>
@@ -7581,7 +7638,7 @@
               <a:t>asociación</a:t>
             </a:r>
             <a:r>
-              <a:rPr spc="-44" dirty="0">
+              <a:rPr spc="-44">
                 <a:solidFill>
                   <a:schemeClr val="tx2"/>
                 </a:solidFill>
@@ -7592,7 +7649,7 @@
               <a:t> </a:t>
             </a:r>
             <a:r>
-              <a:rPr dirty="0" err="1">
+              <a:rPr err="1">
                 <a:solidFill>
                   <a:schemeClr val="tx2"/>
                 </a:solidFill>
@@ -7603,7 +7660,7 @@
               <a:t>implica</a:t>
             </a:r>
             <a:r>
-              <a:rPr spc="-40" dirty="0">
+              <a:rPr spc="-40">
                 <a:solidFill>
                   <a:schemeClr val="tx2"/>
                 </a:solidFill>
@@ -7614,7 +7671,7 @@
               <a:t> </a:t>
             </a:r>
             <a:r>
-              <a:rPr dirty="0">
+              <a:rPr>
                 <a:solidFill>
                   <a:schemeClr val="tx2"/>
                 </a:solidFill>
@@ -7625,7 +7682,7 @@
               <a:t>la </a:t>
             </a:r>
             <a:r>
-              <a:rPr b="1" dirty="0" err="1">
+              <a:rPr b="1" err="1">
                 <a:solidFill>
                   <a:schemeClr val="tx2"/>
                 </a:solidFill>
@@ -7636,7 +7693,7 @@
               <a:t>participación</a:t>
             </a:r>
             <a:r>
-              <a:rPr b="1" dirty="0">
+              <a:rPr b="1">
                 <a:solidFill>
                   <a:schemeClr val="tx2"/>
                 </a:solidFill>
@@ -7647,7 +7704,7 @@
               <a:t> </a:t>
             </a:r>
             <a:r>
-              <a:rPr dirty="0">
+              <a:rPr>
                 <a:solidFill>
                   <a:schemeClr val="tx2"/>
                 </a:solidFill>
@@ -7658,7 +7715,7 @@
               <a:t>de un</a:t>
             </a:r>
             <a:r>
-              <a:rPr spc="10" dirty="0">
+              <a:rPr spc="10">
                 <a:solidFill>
                   <a:schemeClr val="tx2"/>
                 </a:solidFill>
@@ -7669,7 +7726,7 @@
               <a:t> </a:t>
             </a:r>
             <a:r>
-              <a:rPr b="1" dirty="0">
+              <a:rPr b="1">
                 <a:solidFill>
                   <a:schemeClr val="tx2"/>
                 </a:solidFill>
@@ -7680,7 +7737,7 @@
               <a:t>actor</a:t>
             </a:r>
             <a:r>
-              <a:rPr b="1" spc="-10" dirty="0">
+              <a:rPr b="1" spc="-10">
                 <a:solidFill>
                   <a:schemeClr val="tx2"/>
                 </a:solidFill>
@@ -7691,7 +7748,7 @@
               <a:t> </a:t>
             </a:r>
             <a:r>
-              <a:rPr dirty="0" err="1">
+              <a:rPr err="1">
                 <a:solidFill>
                   <a:schemeClr val="tx2"/>
                 </a:solidFill>
@@ -7702,7 +7759,7 @@
               <a:t>en</a:t>
             </a:r>
             <a:r>
-              <a:rPr spc="28" dirty="0">
+              <a:rPr spc="28">
                 <a:solidFill>
                   <a:schemeClr val="tx2"/>
                 </a:solidFill>
@@ -7713,7 +7770,7 @@
               <a:t> </a:t>
             </a:r>
             <a:r>
-              <a:rPr dirty="0" err="1">
+              <a:rPr err="1">
                 <a:solidFill>
                   <a:schemeClr val="tx2"/>
                 </a:solidFill>
@@ -7724,7 +7781,7 @@
               <a:t>el</a:t>
             </a:r>
             <a:r>
-              <a:rPr spc="16" dirty="0">
+              <a:rPr spc="16">
                 <a:solidFill>
                   <a:schemeClr val="tx2"/>
                 </a:solidFill>
@@ -7735,7 +7792,7 @@
               <a:t> </a:t>
             </a:r>
             <a:r>
-              <a:rPr dirty="0" err="1">
+              <a:rPr err="1">
                 <a:solidFill>
                   <a:schemeClr val="tx2"/>
                 </a:solidFill>
@@ -7745,7 +7802,7 @@
               </a:rPr>
               <a:t>sistema</a:t>
             </a:r>
-            <a:endParaRPr dirty="0">
+            <a:endParaRPr>
               <a:solidFill>
                 <a:schemeClr val="tx2"/>
               </a:solidFill>
@@ -7784,7 +7841,7 @@
           <a:lstStyle/>
           <a:p>
             <a:r>
-              <a:rPr dirty="0">
+              <a:rPr>
                 <a:solidFill>
                   <a:schemeClr val="tx2"/>
                 </a:solidFill>
@@ -7795,7 +7852,7 @@
               <a:t>▪</a:t>
             </a:r>
             <a:r>
-              <a:rPr spc="1429" dirty="0">
+              <a:rPr spc="1429">
                 <a:solidFill>
                   <a:schemeClr val="tx2"/>
                 </a:solidFill>
@@ -7806,7 +7863,7 @@
               <a:t> </a:t>
             </a:r>
             <a:r>
-              <a:rPr dirty="0">
+              <a:rPr>
                 <a:solidFill>
                   <a:schemeClr val="tx2"/>
                 </a:solidFill>
@@ -7817,7 +7874,7 @@
               <a:t>Las</a:t>
             </a:r>
             <a:r>
-              <a:rPr spc="17" dirty="0">
+              <a:rPr spc="17">
                 <a:solidFill>
                   <a:schemeClr val="tx2"/>
                 </a:solidFill>
@@ -7828,7 +7885,7 @@
               <a:t> </a:t>
             </a:r>
             <a:r>
-              <a:rPr dirty="0" err="1">
+              <a:rPr err="1">
                 <a:solidFill>
                   <a:schemeClr val="tx2"/>
                 </a:solidFill>
@@ -7839,7 +7896,7 @@
               <a:t>asociaciones</a:t>
             </a:r>
             <a:r>
-              <a:rPr dirty="0">
+              <a:rPr>
                 <a:solidFill>
                   <a:schemeClr val="tx2"/>
                 </a:solidFill>
@@ -7850,7 +7907,7 @@
               <a:t> son</a:t>
             </a:r>
             <a:r>
-              <a:rPr spc="23" dirty="0">
+              <a:rPr spc="23">
                 <a:solidFill>
                   <a:schemeClr val="tx2"/>
                 </a:solidFill>
@@ -7861,7 +7918,7 @@
               <a:t> </a:t>
             </a:r>
             <a:r>
-              <a:rPr b="1" dirty="0" err="1">
+              <a:rPr b="1" err="1">
                 <a:solidFill>
                   <a:schemeClr val="tx2"/>
                 </a:solidFill>
@@ -7872,7 +7929,7 @@
               <a:t>obligatorias</a:t>
             </a:r>
             <a:r>
-              <a:rPr b="1" spc="-12" dirty="0">
+              <a:rPr b="1" spc="-12">
                 <a:solidFill>
                   <a:schemeClr val="tx2"/>
                 </a:solidFill>
@@ -7883,7 +7940,7 @@
               <a:t> </a:t>
             </a:r>
             <a:r>
-              <a:rPr dirty="0" err="1">
+              <a:rPr err="1">
                 <a:solidFill>
                   <a:schemeClr val="tx2"/>
                 </a:solidFill>
@@ -7894,7 +7951,7 @@
               <a:t>porque</a:t>
             </a:r>
             <a:r>
-              <a:rPr spc="25" dirty="0">
+              <a:rPr spc="25">
                 <a:solidFill>
                   <a:schemeClr val="tx2"/>
                 </a:solidFill>
@@ -7905,7 +7962,7 @@
               <a:t> </a:t>
             </a:r>
             <a:r>
-              <a:rPr dirty="0" err="1">
+              <a:rPr err="1">
                 <a:solidFill>
                   <a:schemeClr val="tx2"/>
                 </a:solidFill>
@@ -7916,7 +7973,7 @@
               <a:t>representan</a:t>
             </a:r>
             <a:r>
-              <a:rPr spc="52" dirty="0">
+              <a:rPr spc="52">
                 <a:solidFill>
                   <a:schemeClr val="tx2"/>
                 </a:solidFill>
@@ -7927,7 +7984,7 @@
               <a:t> </a:t>
             </a:r>
             <a:r>
-              <a:rPr spc="10" dirty="0">
+              <a:rPr spc="10">
                 <a:solidFill>
                   <a:schemeClr val="tx2"/>
                 </a:solidFill>
@@ -7938,7 +7995,7 @@
               <a:t>la</a:t>
             </a:r>
             <a:r>
-              <a:rPr spc="-16" dirty="0">
+              <a:rPr spc="-16">
                 <a:solidFill>
                   <a:schemeClr val="tx2"/>
                 </a:solidFill>
@@ -7949,7 +8006,7 @@
               <a:t> </a:t>
             </a:r>
             <a:r>
-              <a:rPr b="1" dirty="0" err="1">
+              <a:rPr b="1" err="1">
                 <a:solidFill>
                   <a:schemeClr val="tx2"/>
                 </a:solidFill>
@@ -7960,7 +8017,7 @@
               <a:t>interacción</a:t>
             </a:r>
             <a:r>
-              <a:rPr b="1" spc="-16" dirty="0">
+              <a:rPr b="1" spc="-16">
                 <a:solidFill>
                   <a:schemeClr val="tx2"/>
                 </a:solidFill>
@@ -7971,7 +8028,7 @@
               <a:t> </a:t>
             </a:r>
             <a:r>
-              <a:rPr dirty="0">
+              <a:rPr>
                 <a:solidFill>
                   <a:schemeClr val="tx2"/>
                 </a:solidFill>
@@ -7982,7 +8039,7 @@
               <a:t>del actor </a:t>
             </a:r>
             <a:r>
-              <a:rPr dirty="0" err="1">
+              <a:rPr err="1">
                 <a:solidFill>
                   <a:schemeClr val="tx2"/>
                 </a:solidFill>
@@ -7993,7 +8050,7 @@
               <a:t>en</a:t>
             </a:r>
             <a:r>
-              <a:rPr spc="27" dirty="0">
+              <a:rPr spc="27">
                 <a:solidFill>
                   <a:schemeClr val="tx2"/>
                 </a:solidFill>
@@ -8004,7 +8061,7 @@
               <a:t> </a:t>
             </a:r>
             <a:r>
-              <a:rPr dirty="0" err="1">
+              <a:rPr err="1">
                 <a:solidFill>
                   <a:schemeClr val="tx2"/>
                 </a:solidFill>
@@ -8015,7 +8072,7 @@
               <a:t>el</a:t>
             </a:r>
             <a:r>
-              <a:rPr dirty="0">
+              <a:rPr>
                 <a:solidFill>
                   <a:schemeClr val="tx2"/>
                 </a:solidFill>
@@ -8026,7 +8083,7 @@
               <a:t> </a:t>
             </a:r>
             <a:r>
-              <a:rPr dirty="0" err="1">
+              <a:rPr err="1">
                 <a:solidFill>
                   <a:schemeClr val="tx2"/>
                 </a:solidFill>
@@ -8037,7 +8094,7 @@
               <a:t>sistema</a:t>
             </a:r>
             <a:r>
-              <a:rPr lang="es-ES" dirty="0">
+              <a:rPr lang="es-ES">
                 <a:solidFill>
                   <a:schemeClr val="tx2"/>
                 </a:solidFill>
@@ -8048,7 +8105,7 @@
               <a:t>, </a:t>
             </a:r>
             <a:r>
-              <a:rPr lang="es-ES" sz="3200" b="1" dirty="0">
+              <a:rPr lang="es-ES" sz="3200" b="1">
                 <a:solidFill>
                   <a:srgbClr val="FF0000"/>
                 </a:solidFill>
@@ -8059,7 +8116,7 @@
               <a:t>NO</a:t>
             </a:r>
             <a:r>
-              <a:rPr lang="es-ES" dirty="0">
+              <a:rPr lang="es-ES">
                 <a:solidFill>
                   <a:schemeClr val="tx2"/>
                 </a:solidFill>
@@ -8069,7 +8126,7 @@
               </a:rPr>
               <a:t> PUEDE EXISTIR CASO DE USO SIN ACTOR</a:t>
             </a:r>
-            <a:endParaRPr dirty="0">
+            <a:endParaRPr>
               <a:solidFill>
                 <a:schemeClr val="tx2"/>
               </a:solidFill>
@@ -8215,7 +8272,7 @@
               <a:defRPr/>
             </a:pPr>
             <a:r>
-              <a:rPr lang="es-ES" sz="1800" b="1" kern="1200" dirty="0">
+              <a:rPr lang="es-ES" sz="1800" b="1" kern="1200">
                 <a:solidFill>
                   <a:srgbClr val="FF0000"/>
                 </a:solidFill>
@@ -8227,7 +8284,7 @@
               <a:t>1. </a:t>
             </a:r>
             <a:r>
-              <a:rPr lang="es-ES" sz="1800" b="1" i="1" kern="1200" dirty="0">
+              <a:rPr lang="es-ES" sz="1800" b="1" i="1" kern="1200">
                 <a:solidFill>
                   <a:srgbClr val="FF0000"/>
                 </a:solidFill>
@@ -8239,7 +8296,7 @@
               <a:t>Inclusión</a:t>
             </a:r>
             <a:r>
-              <a:rPr lang="es-ES" sz="1800" b="1" kern="1200" dirty="0">
+              <a:rPr lang="es-ES" sz="1800" b="1" kern="1200">
                 <a:solidFill>
                   <a:srgbClr val="FF0000"/>
                 </a:solidFill>
@@ -8251,7 +8308,7 @@
               <a:t> (</a:t>
             </a:r>
             <a:r>
-              <a:rPr lang="es-ES" sz="1800" b="1" kern="1200" dirty="0" err="1">
+              <a:rPr lang="es-ES" sz="1800" b="1" kern="1200" err="1">
                 <a:solidFill>
                   <a:srgbClr val="FF0000"/>
                 </a:solidFill>
@@ -8263,7 +8320,7 @@
               <a:t>include</a:t>
             </a:r>
             <a:r>
-              <a:rPr lang="es-ES" sz="1800" b="1" kern="1200" dirty="0">
+              <a:rPr lang="es-ES" sz="1800" b="1" kern="1200">
                 <a:solidFill>
                   <a:srgbClr val="FF0000"/>
                 </a:solidFill>
@@ -8275,7 +8332,7 @@
               <a:t>)</a:t>
             </a:r>
             <a:r>
-              <a:rPr lang="es-ES" sz="1800" kern="1200" dirty="0">
+              <a:rPr lang="es-ES" sz="1800" kern="1200">
                 <a:solidFill>
                   <a:srgbClr val="FF0000"/>
                 </a:solidFill>
@@ -8287,7 +8344,7 @@
               <a:t>: </a:t>
             </a:r>
             <a:r>
-              <a:rPr lang="es-ES" sz="1800" kern="1200" dirty="0">
+              <a:rPr lang="es-ES" sz="1800" kern="1200">
                 <a:solidFill>
                   <a:schemeClr val="tx1">
                     <a:lumMod val="75000"/>
@@ -8301,12 +8358,12 @@
               </a:rPr>
               <a:t>se incluye la funcionalidad de un caso de uso en otro</a:t>
             </a:r>
-            <a:endParaRPr lang="es-ES" sz="1800" dirty="0">
+            <a:endParaRPr lang="es-ES" sz="1800">
               <a:effectLst/>
             </a:endParaRPr>
           </a:p>
           <a:p>
-            <a:endParaRPr lang="es-ES" dirty="0"/>
+            <a:endParaRPr lang="es-ES"/>
           </a:p>
         </p:txBody>
       </p:sp>
@@ -8336,7 +8393,7 @@
               <a:buNone/>
             </a:pPr>
             <a:r>
-              <a:rPr lang="es-ES" dirty="0"/>
+              <a:rPr lang="es-ES"/>
               <a:t>2. Diagramas de casos de uso</a:t>
             </a:r>
           </a:p>
@@ -8364,7 +8421,7 @@
           <a:lstStyle/>
           <a:p>
             <a:r>
-              <a:rPr lang="es-ES" dirty="0">
+              <a:rPr lang="es-ES">
                 <a:solidFill>
                   <a:srgbClr val="FF0000"/>
                 </a:solidFill>
@@ -8375,7 +8432,7 @@
               <a:t>2.3 </a:t>
             </a:r>
             <a:r>
-              <a:rPr lang="es-ES" b="1" dirty="0">
+              <a:rPr lang="es-ES" b="1">
                 <a:solidFill>
                   <a:srgbClr val="FF0000"/>
                 </a:solidFill>
@@ -8386,7 +8443,7 @@
               <a:t>Relaciones </a:t>
             </a:r>
             <a:r>
-              <a:rPr lang="es-ES" b="1" dirty="0">
+              <a:rPr lang="es-ES" b="1">
                 <a:solidFill>
                   <a:schemeClr val="tx2"/>
                 </a:solidFill>
@@ -8548,7 +8605,7 @@
           <a:p>
             <a:pPr marL="0" lvl="1" indent="0"/>
             <a:r>
-              <a:rPr lang="es-ES" sz="1800" b="1" dirty="0">
+              <a:rPr lang="es-ES" sz="1800" b="1">
                 <a:solidFill>
                   <a:srgbClr val="FF0000"/>
                 </a:solidFill>
@@ -8556,7 +8613,7 @@
               <a:t>Inclusión (</a:t>
             </a:r>
             <a:r>
-              <a:rPr lang="es-ES" sz="1800" b="1" dirty="0" err="1">
+              <a:rPr lang="es-ES" sz="1800" b="1" err="1">
                 <a:solidFill>
                   <a:srgbClr val="FF0000"/>
                 </a:solidFill>
@@ -8564,7 +8621,7 @@
               <a:t>include</a:t>
             </a:r>
             <a:r>
-              <a:rPr lang="es-ES" sz="1800" b="1" dirty="0">
+              <a:rPr lang="es-ES" sz="1800" b="1">
                 <a:solidFill>
                   <a:srgbClr val="FF0000"/>
                 </a:solidFill>
@@ -8572,7 +8629,7 @@
               <a:t>): </a:t>
             </a:r>
             <a:r>
-              <a:rPr lang="es-ES" sz="1800" dirty="0">
+              <a:rPr lang="es-ES" sz="1800">
                 <a:solidFill>
                   <a:schemeClr val="tx1">
                     <a:lumMod val="75000"/>
@@ -8586,7 +8643,7 @@
           <a:p>
             <a:pPr marL="400050" lvl="2" indent="0"/>
             <a:r>
-              <a:rPr lang="es-ES" sz="1600" dirty="0">
+              <a:rPr lang="es-ES" sz="1600">
                 <a:solidFill>
                   <a:schemeClr val="tx1">
                     <a:lumMod val="75000"/>
@@ -8600,7 +8657,7 @@
           <a:p>
             <a:pPr marL="400050" lvl="2" indent="0"/>
             <a:r>
-              <a:rPr lang="es-ES" sz="1600" dirty="0">
+              <a:rPr lang="es-ES" sz="1600">
                 <a:solidFill>
                   <a:schemeClr val="tx1">
                     <a:lumMod val="75000"/>
@@ -8611,7 +8668,7 @@
               <a:t>El caso de uso incluido se ejecuta </a:t>
             </a:r>
             <a:r>
-              <a:rPr lang="es-ES" sz="1600" dirty="0">
+              <a:rPr lang="es-ES" sz="1600">
                 <a:solidFill>
                   <a:srgbClr val="FF0000"/>
                 </a:solidFill>
@@ -8619,7 +8676,7 @@
               <a:t>siempre y de manera obligatoria </a:t>
             </a:r>
             <a:r>
-              <a:rPr lang="es-ES" sz="1600" dirty="0">
+              <a:rPr lang="es-ES" sz="1600">
                 <a:solidFill>
                   <a:schemeClr val="tx1">
                     <a:lumMod val="75000"/>
@@ -8633,7 +8690,7 @@
           <a:p>
             <a:pPr marL="400050" lvl="2" indent="0"/>
             <a:r>
-              <a:rPr lang="es-ES" sz="1600" dirty="0">
+              <a:rPr lang="es-ES" sz="1600">
                 <a:solidFill>
                   <a:schemeClr val="tx1">
                     <a:lumMod val="75000"/>
@@ -8647,7 +8704,7 @@
           <a:p>
             <a:pPr marL="857250" lvl="3" indent="0"/>
             <a:r>
-              <a:rPr lang="es-ES" sz="1400" dirty="0">
+              <a:rPr lang="es-ES" sz="1400">
                 <a:solidFill>
                   <a:schemeClr val="tx1">
                     <a:lumMod val="75000"/>
@@ -8661,7 +8718,7 @@
           <a:p>
             <a:pPr marL="857250" lvl="3" indent="0"/>
             <a:r>
-              <a:rPr lang="es-ES" sz="1400" dirty="0">
+              <a:rPr lang="es-ES" sz="1400">
                 <a:solidFill>
                   <a:schemeClr val="tx1">
                     <a:lumMod val="75000"/>
@@ -8675,7 +8732,7 @@
           <a:p>
             <a:pPr marL="857250" lvl="3" indent="0"/>
             <a:r>
-              <a:rPr lang="es-ES" sz="1400" dirty="0">
+              <a:rPr lang="es-ES" sz="1400">
                 <a:solidFill>
                   <a:schemeClr val="tx1">
                     <a:lumMod val="75000"/>
@@ -8686,7 +8743,7 @@
               <a:t>Se puede añadir la palabra </a:t>
             </a:r>
             <a:r>
-              <a:rPr lang="es-ES" sz="1400" dirty="0" err="1">
+              <a:rPr lang="es-ES" sz="1400" err="1">
                 <a:solidFill>
                   <a:schemeClr val="tx1">
                     <a:lumMod val="75000"/>
@@ -8697,7 +8754,7 @@
               <a:t>include</a:t>
             </a:r>
             <a:r>
-              <a:rPr lang="es-ES" sz="1400" dirty="0">
+              <a:rPr lang="es-ES" sz="1400">
                 <a:solidFill>
                   <a:schemeClr val="tx1">
                     <a:lumMod val="75000"/>
@@ -8711,7 +8768,7 @@
           <a:p>
             <a:pPr marL="400050" lvl="2" indent="0"/>
             <a:r>
-              <a:rPr lang="es-ES" sz="1600" dirty="0">
+              <a:rPr lang="es-ES" sz="1600">
                 <a:solidFill>
                   <a:schemeClr val="tx1">
                     <a:lumMod val="75000"/>
@@ -8750,7 +8807,7 @@
               <a:buNone/>
             </a:pPr>
             <a:r>
-              <a:rPr lang="es-ES" dirty="0"/>
+              <a:rPr lang="es-ES"/>
               <a:t>2. Diagramas de casos de uso</a:t>
             </a:r>
           </a:p>
@@ -8778,7 +8835,7 @@
           <a:lstStyle/>
           <a:p>
             <a:r>
-              <a:rPr lang="es-ES" b="1" dirty="0">
+              <a:rPr lang="es-ES" b="1">
                 <a:solidFill>
                   <a:srgbClr val="FF0000"/>
                 </a:solidFill>
@@ -8906,7 +8963,7 @@
           <a:lstStyle/>
           <a:p>
             <a:r>
-              <a:rPr lang="es-ES" b="1" dirty="0">
+              <a:rPr lang="es-ES" b="1">
                 <a:solidFill>
                   <a:srgbClr val="FF0000"/>
                 </a:solidFill>
@@ -8914,7 +8971,7 @@
               <a:t>2. Extensión (</a:t>
             </a:r>
             <a:r>
-              <a:rPr lang="es-ES" b="1" dirty="0" err="1">
+              <a:rPr lang="es-ES" b="1" err="1">
                 <a:solidFill>
                   <a:srgbClr val="FF0000"/>
                 </a:solidFill>
@@ -8922,7 +8979,7 @@
               <a:t>extends</a:t>
             </a:r>
             <a:r>
-              <a:rPr lang="es-ES" b="1" dirty="0">
+              <a:rPr lang="es-ES" b="1">
                 <a:solidFill>
                   <a:srgbClr val="FF0000"/>
                 </a:solidFill>
@@ -8930,10 +8987,10 @@
               <a:t>): </a:t>
             </a:r>
             <a:r>
-              <a:rPr lang="es-ES" b="1" dirty="0"/>
+              <a:rPr lang="es-ES" b="1"/>
               <a:t>ampliación opcional de un caso de uso</a:t>
             </a:r>
-            <a:endParaRPr lang="es-ES" b="1" dirty="0">
+            <a:endParaRPr lang="es-ES" b="1">
               <a:solidFill>
                 <a:srgbClr val="FF0000"/>
               </a:solidFill>
@@ -8967,7 +9024,7 @@
               <a:buNone/>
             </a:pPr>
             <a:r>
-              <a:rPr lang="es-ES" dirty="0"/>
+              <a:rPr lang="es-ES"/>
               <a:t>2. Diagramas de casos de uso</a:t>
             </a:r>
           </a:p>
@@ -8995,7 +9052,7 @@
           <a:lstStyle/>
           <a:p>
             <a:r>
-              <a:rPr lang="es-ES" dirty="0">
+              <a:rPr lang="es-ES">
                 <a:solidFill>
                   <a:srgbClr val="FF0000"/>
                 </a:solidFill>
@@ -9006,7 +9063,7 @@
               <a:t>2.3 </a:t>
             </a:r>
             <a:r>
-              <a:rPr lang="es-ES" b="1" dirty="0">
+              <a:rPr lang="es-ES" b="1">
                 <a:solidFill>
                   <a:srgbClr val="FF0000"/>
                 </a:solidFill>
@@ -9017,7 +9074,7 @@
               <a:t>Relaciones</a:t>
             </a:r>
             <a:r>
-              <a:rPr lang="es-ES" dirty="0">
+              <a:rPr lang="es-ES">
                 <a:solidFill>
                   <a:srgbClr val="FF0000"/>
                 </a:solidFill>
@@ -9028,7 +9085,7 @@
               <a:t> </a:t>
             </a:r>
             <a:r>
-              <a:rPr lang="es-ES" dirty="0">
+              <a:rPr lang="es-ES">
                 <a:solidFill>
                   <a:schemeClr val="tx2"/>
                 </a:solidFill>
@@ -9038,7 +9095,7 @@
               </a:rPr>
               <a:t>(solo si aportan valor – información)</a:t>
             </a:r>
-            <a:endParaRPr lang="es-ES" dirty="0"/>
+            <a:endParaRPr lang="es-ES"/>
           </a:p>
         </p:txBody>
       </p:sp>
@@ -9190,7 +9247,7 @@
           <a:lstStyle/>
           <a:p>
             <a:r>
-              <a:rPr lang="es-ES" b="1" i="1" kern="1200" dirty="0">
+              <a:rPr lang="es-ES" b="1" i="1" kern="1200">
                 <a:solidFill>
                   <a:srgbClr val="FF0000"/>
                 </a:solidFill>
@@ -9202,7 +9259,7 @@
               <a:t>Extensión</a:t>
             </a:r>
             <a:r>
-              <a:rPr lang="es-ES" b="1" kern="1200" dirty="0">
+              <a:rPr lang="es-ES" b="1" kern="1200">
                 <a:solidFill>
                   <a:srgbClr val="FF0000"/>
                 </a:solidFill>
@@ -9214,7 +9271,7 @@
               <a:t> (</a:t>
             </a:r>
             <a:r>
-              <a:rPr lang="es-ES" b="1" kern="1200" dirty="0" err="1">
+              <a:rPr lang="es-ES" b="1" kern="1200" err="1">
                 <a:solidFill>
                   <a:srgbClr val="FF0000"/>
                 </a:solidFill>
@@ -9226,7 +9283,7 @@
               <a:t>extends</a:t>
             </a:r>
             <a:r>
-              <a:rPr lang="es-ES" b="1" kern="1200" dirty="0">
+              <a:rPr lang="es-ES" b="1" kern="1200">
                 <a:solidFill>
                   <a:srgbClr val="FF0000"/>
                 </a:solidFill>
@@ -9238,7 +9295,7 @@
               <a:t>)</a:t>
             </a:r>
             <a:r>
-              <a:rPr lang="es-ES" kern="1200" dirty="0">
+              <a:rPr lang="es-ES" kern="1200">
                 <a:solidFill>
                   <a:srgbClr val="FF0000"/>
                 </a:solidFill>
@@ -9250,7 +9307,7 @@
               <a:t>: </a:t>
             </a:r>
             <a:r>
-              <a:rPr lang="es-ES" kern="1200" dirty="0">
+              <a:rPr lang="es-ES" kern="1200">
                 <a:solidFill>
                   <a:schemeClr val="tx2">
                     <a:lumMod val="50000"/>
@@ -9267,7 +9324,7 @@
           <a:p>
             <a:pPr lvl="1"/>
             <a:r>
-              <a:rPr lang="es-ES" dirty="0">
+              <a:rPr lang="es-ES">
                 <a:solidFill>
                   <a:schemeClr val="tx1">
                     <a:lumMod val="75000"/>
@@ -9278,7 +9335,7 @@
               <a:t>La relación de extensión se utiliza cuando un caso de uso (llamado caso de uso extendido) </a:t>
             </a:r>
             <a:r>
-              <a:rPr lang="es-ES" dirty="0">
+              <a:rPr lang="es-ES">
                 <a:solidFill>
                   <a:srgbClr val="FF0000"/>
                 </a:solidFill>
@@ -9286,7 +9343,7 @@
               <a:t>puede</a:t>
             </a:r>
             <a:r>
-              <a:rPr lang="es-ES" dirty="0">
+              <a:rPr lang="es-ES">
                 <a:solidFill>
                   <a:schemeClr val="tx1">
                     <a:lumMod val="75000"/>
@@ -9300,7 +9357,7 @@
           <a:p>
             <a:pPr lvl="1"/>
             <a:r>
-              <a:rPr lang="es-ES" dirty="0">
+              <a:rPr lang="es-ES">
                 <a:solidFill>
                   <a:schemeClr val="tx1">
                     <a:lumMod val="75000"/>
@@ -9314,7 +9371,7 @@
           <a:p>
             <a:pPr lvl="2"/>
             <a:r>
-              <a:rPr lang="es-ES" dirty="0">
+              <a:rPr lang="es-ES">
                 <a:solidFill>
                   <a:schemeClr val="tx1">
                     <a:lumMod val="75000"/>
@@ -9328,7 +9385,7 @@
           <a:p>
             <a:pPr marL="857250" lvl="3" indent="0"/>
             <a:r>
-              <a:rPr lang="es-ES" sz="1400" dirty="0">
+              <a:rPr lang="es-ES" sz="1400">
                 <a:solidFill>
                   <a:schemeClr val="tx1">
                     <a:lumMod val="75000"/>
@@ -9342,7 +9399,7 @@
           <a:p>
             <a:pPr marL="857250" lvl="3" indent="0"/>
             <a:r>
-              <a:rPr lang="es-ES" sz="1400" dirty="0">
+              <a:rPr lang="es-ES" sz="1400">
                 <a:solidFill>
                   <a:schemeClr val="tx1">
                     <a:lumMod val="75000"/>
@@ -9353,7 +9410,7 @@
               <a:t>Se puede añadir la palabra </a:t>
             </a:r>
             <a:r>
-              <a:rPr lang="es-ES" sz="1400" dirty="0" err="1">
+              <a:rPr lang="es-ES" sz="1400" err="1">
                 <a:solidFill>
                   <a:schemeClr val="tx1">
                     <a:lumMod val="75000"/>
@@ -9364,7 +9421,7 @@
               <a:t>extends</a:t>
             </a:r>
             <a:r>
-              <a:rPr lang="es-ES" sz="1400" dirty="0">
+              <a:rPr lang="es-ES" sz="1400">
                 <a:solidFill>
                   <a:schemeClr val="tx1">
                     <a:lumMod val="75000"/>
@@ -9378,7 +9435,7 @@
           <a:p>
             <a:pPr lvl="1"/>
             <a:r>
-              <a:rPr lang="es-ES" dirty="0">
+              <a:rPr lang="es-ES">
                 <a:solidFill>
                   <a:schemeClr val="tx1">
                     <a:lumMod val="75000"/>
@@ -9392,7 +9449,7 @@
           <a:p>
             <a:pPr lvl="1"/>
             <a:r>
-              <a:rPr lang="es-ES" dirty="0">
+              <a:rPr lang="es-ES">
                 <a:solidFill>
                   <a:schemeClr val="tx1">
                     <a:lumMod val="75000"/>
@@ -9403,7 +9460,7 @@
               <a:t>La relación de extensión es útil para modelar escenarios </a:t>
             </a:r>
             <a:r>
-              <a:rPr lang="es-ES" dirty="0">
+              <a:rPr lang="es-ES">
                 <a:solidFill>
                   <a:srgbClr val="FF0000"/>
                 </a:solidFill>
@@ -9411,7 +9468,7 @@
               <a:t>opcionales</a:t>
             </a:r>
             <a:r>
-              <a:rPr lang="es-ES" dirty="0">
+              <a:rPr lang="es-ES">
                 <a:solidFill>
                   <a:schemeClr val="tx1">
                     <a:lumMod val="75000"/>
@@ -9422,7 +9479,7 @@
               <a:t> o </a:t>
             </a:r>
             <a:r>
-              <a:rPr lang="es-ES" dirty="0">
+              <a:rPr lang="es-ES">
                 <a:solidFill>
                   <a:srgbClr val="FF0000"/>
                 </a:solidFill>
@@ -9430,7 +9487,7 @@
               <a:t>variantes</a:t>
             </a:r>
             <a:r>
-              <a:rPr lang="es-ES" dirty="0">
+              <a:rPr lang="es-ES">
                 <a:solidFill>
                   <a:schemeClr val="tx1">
                     <a:lumMod val="75000"/>
@@ -9445,7 +9502,7 @@
             <a:pPr marL="457200" lvl="1" indent="0">
               <a:buNone/>
             </a:pPr>
-            <a:endParaRPr lang="es-ES" dirty="0"/>
+            <a:endParaRPr lang="es-ES"/>
           </a:p>
         </p:txBody>
       </p:sp>
@@ -9475,7 +9532,7 @@
               <a:buNone/>
             </a:pPr>
             <a:r>
-              <a:rPr lang="es-ES" dirty="0"/>
+              <a:rPr lang="es-ES"/>
               <a:t>2. Diagramas de casos de uso</a:t>
             </a:r>
           </a:p>
@@ -9497,27 +9554,32 @@
             <p:ph idx="1"/>
           </p:nvPr>
         </p:nvSpPr>
-        <p:spPr/>
+        <p:spPr>
+          <a:xfrm>
+            <a:off x="12630" y="408430"/>
+            <a:ext cx="8571346" cy="337025"/>
+          </a:xfrm>
+        </p:spPr>
         <p:txBody>
           <a:bodyPr/>
           <a:lstStyle/>
           <a:p>
             <a:r>
-              <a:rPr lang="es-ES" b="1" dirty="0">
+              <a:rPr lang="es-ES" b="1">
                 <a:solidFill>
                   <a:srgbClr val="FF0000"/>
                 </a:solidFill>
               </a:rPr>
               <a:t>2.3 Relaciones</a:t>
             </a:r>
-            <a:endParaRPr lang="es-ES" b="1" i="1" dirty="0">
+            <a:endParaRPr lang="es-ES" b="1" i="1">
               <a:solidFill>
                 <a:srgbClr val="FF0000"/>
               </a:solidFill>
             </a:endParaRPr>
           </a:p>
           <a:p>
-            <a:endParaRPr lang="es-ES" dirty="0"/>
+            <a:endParaRPr lang="es-ES"/>
           </a:p>
         </p:txBody>
       </p:sp>
@@ -9610,11 +9672,11 @@
           <a:p>
             <a:pPr lvl="0" algn="just"/>
             <a:r>
-              <a:rPr lang="es-ES" dirty="0"/>
+              <a:rPr lang="es-ES"/>
               <a:t>La relación de </a:t>
             </a:r>
             <a:r>
-              <a:rPr lang="es-ES" b="1" dirty="0">
+              <a:rPr lang="es-ES" b="1">
                 <a:solidFill>
                   <a:srgbClr val="FF0000"/>
                 </a:solidFill>
@@ -9622,11 +9684,11 @@
               <a:t>inclusión</a:t>
             </a:r>
             <a:r>
-              <a:rPr lang="es-ES" dirty="0"/>
+              <a:rPr lang="es-ES"/>
               <a:t> se utiliza para representar el añadido de funcionalidades de un caso de uso en otro, mientras que la relación de </a:t>
             </a:r>
             <a:r>
-              <a:rPr lang="es-ES" b="1" dirty="0">
+              <a:rPr lang="es-ES" b="1">
                 <a:solidFill>
                   <a:srgbClr val="FF0000"/>
                 </a:solidFill>
@@ -9634,26 +9696,26 @@
               <a:t>extensión</a:t>
             </a:r>
             <a:r>
-              <a:rPr lang="es-ES" dirty="0"/>
+              <a:rPr lang="es-ES"/>
               <a:t> se utiliza para modelar la variación o modificación (opcionales) de un caso de uso sin alterar su flujo principal.</a:t>
             </a:r>
           </a:p>
           <a:p>
             <a:pPr lvl="0" algn="just"/>
             <a:r>
-              <a:rPr lang="es-ES" dirty="0"/>
+              <a:rPr lang="es-ES"/>
               <a:t>Ambas relaciones ayudan a mejorar la </a:t>
             </a:r>
             <a:r>
-              <a:rPr lang="es-ES" b="1" dirty="0"/>
+              <a:rPr lang="es-ES" b="1"/>
               <a:t>modularidad</a:t>
             </a:r>
             <a:r>
-              <a:rPr lang="es-ES" dirty="0"/>
+              <a:rPr lang="es-ES"/>
               <a:t> y la </a:t>
             </a:r>
             <a:r>
-              <a:rPr lang="es-ES" b="1" dirty="0">
+              <a:rPr lang="es-ES" b="1">
                 <a:solidFill>
                   <a:srgbClr val="FF0000"/>
                 </a:solidFill>
@@ -9661,7 +9723,7 @@
               <a:t>reutilización</a:t>
             </a:r>
             <a:r>
-              <a:rPr lang="es-ES" dirty="0"/>
+              <a:rPr lang="es-ES"/>
               <a:t> de funcionalidades en el diseño de sistemas.</a:t>
             </a:r>
           </a:p>
@@ -9669,7 +9731,7 @@
             <a:pPr marL="457200" lvl="1" indent="0" algn="just">
               <a:buNone/>
             </a:pPr>
-            <a:endParaRPr lang="es-ES" dirty="0"/>
+            <a:endParaRPr lang="es-ES"/>
           </a:p>
         </p:txBody>
       </p:sp>
@@ -9699,7 +9761,7 @@
               <a:buNone/>
             </a:pPr>
             <a:r>
-              <a:rPr lang="es-ES" dirty="0"/>
+              <a:rPr lang="es-ES"/>
               <a:t>2. Diagramas de casos de uso</a:t>
             </a:r>
           </a:p>
@@ -9727,21 +9789,21 @@
           <a:lstStyle/>
           <a:p>
             <a:r>
-              <a:rPr lang="es-ES" b="1" dirty="0">
+              <a:rPr lang="es-ES" b="1">
                 <a:solidFill>
                   <a:srgbClr val="FF0000"/>
                 </a:solidFill>
               </a:rPr>
               <a:t>2.3 Relaciones</a:t>
             </a:r>
-            <a:endParaRPr lang="es-ES" b="1" i="1" dirty="0">
+            <a:endParaRPr lang="es-ES" b="1" i="1">
               <a:solidFill>
                 <a:srgbClr val="FF0000"/>
               </a:solidFill>
             </a:endParaRPr>
           </a:p>
           <a:p>
-            <a:endParaRPr lang="es-ES" dirty="0"/>
+            <a:endParaRPr lang="es-ES"/>
           </a:p>
         </p:txBody>
       </p:sp>
@@ -9834,7 +9896,7 @@
           <a:lstStyle/>
           <a:p>
             <a:r>
-              <a:rPr lang="es-ES" dirty="0"/>
+              <a:rPr lang="es-ES"/>
               <a:t>Base</a:t>
             </a:r>
           </a:p>
@@ -9869,7 +9931,7 @@
           <a:lstStyle/>
           <a:p>
             <a:r>
-              <a:rPr lang="es-ES" dirty="0"/>
+              <a:rPr lang="es-ES"/>
               <a:t>Incluido</a:t>
             </a:r>
           </a:p>
@@ -9904,7 +9966,7 @@
           <a:lstStyle/>
           <a:p>
             <a:r>
-              <a:rPr lang="es-ES" dirty="0"/>
+              <a:rPr lang="es-ES"/>
               <a:t>De extensión</a:t>
             </a:r>
           </a:p>
@@ -9939,7 +10001,7 @@
           <a:lstStyle/>
           <a:p>
             <a:r>
-              <a:rPr lang="es-ES" dirty="0"/>
+              <a:rPr lang="es-ES"/>
               <a:t>Extendido</a:t>
             </a:r>
           </a:p>
@@ -10032,7 +10094,7 @@
               <a:buNone/>
             </a:pPr>
             <a:r>
-              <a:rPr lang="es-ES" b="1" dirty="0">
+              <a:rPr lang="es-ES" b="1">
                 <a:solidFill>
                   <a:srgbClr val="FF0000"/>
                 </a:solidFill>
@@ -10042,7 +10104,7 @@
               <a:t>3.</a:t>
             </a:r>
             <a:r>
-              <a:rPr lang="es-ES" b="1" spc="925" dirty="0">
+              <a:rPr lang="es-ES" b="1" spc="925">
                 <a:solidFill>
                   <a:srgbClr val="FF0000"/>
                 </a:solidFill>
@@ -10052,7 +10114,7 @@
               <a:t> </a:t>
             </a:r>
             <a:r>
-              <a:rPr lang="es-ES" b="1" i="1" dirty="0">
+              <a:rPr lang="es-ES" b="1" i="1">
                 <a:solidFill>
                   <a:srgbClr val="FF0000"/>
                 </a:solidFill>
@@ -10062,7 +10124,7 @@
               <a:t>Generalización</a:t>
             </a:r>
             <a:r>
-              <a:rPr lang="es-ES" dirty="0">
+              <a:rPr lang="es-ES">
                 <a:solidFill>
                   <a:schemeClr val="tx2"/>
                 </a:solidFill>
@@ -10072,7 +10134,7 @@
               <a:t>:</a:t>
             </a:r>
             <a:r>
-              <a:rPr lang="es-ES" spc="48" dirty="0">
+              <a:rPr lang="es-ES" spc="48">
                 <a:solidFill>
                   <a:schemeClr val="tx2"/>
                 </a:solidFill>
@@ -10082,7 +10144,7 @@
               <a:t> </a:t>
             </a:r>
             <a:r>
-              <a:rPr lang="es-ES" dirty="0">
+              <a:rPr lang="es-ES">
                 <a:solidFill>
                   <a:schemeClr val="tx2"/>
                 </a:solidFill>
@@ -10092,7 +10154,7 @@
               <a:t>permite identificar</a:t>
             </a:r>
             <a:r>
-              <a:rPr lang="es-ES" spc="28" dirty="0">
+              <a:rPr lang="es-ES" spc="28">
                 <a:solidFill>
                   <a:schemeClr val="tx2"/>
                 </a:solidFill>
@@ -10102,7 +10164,7 @@
               <a:t> </a:t>
             </a:r>
             <a:r>
-              <a:rPr lang="es-ES" dirty="0">
+              <a:rPr lang="es-ES">
                 <a:solidFill>
                   <a:schemeClr val="tx2"/>
                 </a:solidFill>
@@ -10112,7 +10174,7 @@
               <a:t>CASOS DE USO</a:t>
             </a:r>
             <a:r>
-              <a:rPr lang="es-ES" spc="26" dirty="0">
+              <a:rPr lang="es-ES" spc="26">
                 <a:solidFill>
                   <a:schemeClr val="tx2"/>
                 </a:solidFill>
@@ -10122,7 +10184,7 @@
               <a:t> </a:t>
             </a:r>
             <a:r>
-              <a:rPr lang="es-ES" dirty="0">
+              <a:rPr lang="es-ES">
                 <a:solidFill>
                   <a:schemeClr val="tx2"/>
                 </a:solidFill>
@@ -10132,7 +10194,7 @@
               <a:t>comunes</a:t>
             </a:r>
             <a:r>
-              <a:rPr lang="es-ES" spc="18" dirty="0">
+              <a:rPr lang="es-ES" spc="18">
                 <a:solidFill>
                   <a:schemeClr val="tx2"/>
                 </a:solidFill>
@@ -10142,7 +10204,7 @@
               <a:t> </a:t>
             </a:r>
             <a:r>
-              <a:rPr lang="es-ES" dirty="0">
+              <a:rPr lang="es-ES">
                 <a:solidFill>
                   <a:schemeClr val="tx2"/>
                 </a:solidFill>
@@ -10152,7 +10214,7 @@
               <a:t>entre</a:t>
             </a:r>
             <a:r>
-              <a:rPr lang="es-ES" spc="21" dirty="0">
+              <a:rPr lang="es-ES" spc="21">
                 <a:solidFill>
                   <a:schemeClr val="tx2"/>
                 </a:solidFill>
@@ -10162,7 +10224,7 @@
               <a:t> </a:t>
             </a:r>
             <a:r>
-              <a:rPr lang="es-ES" dirty="0">
+              <a:rPr lang="es-ES">
                 <a:solidFill>
                   <a:schemeClr val="tx2"/>
                 </a:solidFill>
@@ -10179,7 +10241,7 @@
               </a:lnSpc>
             </a:pPr>
             <a:r>
-              <a:rPr lang="es-ES" dirty="0">
+              <a:rPr lang="es-ES">
                 <a:solidFill>
                   <a:schemeClr val="tx2"/>
                 </a:solidFill>
@@ -10196,7 +10258,7 @@
               </a:lnSpc>
             </a:pPr>
             <a:r>
-              <a:rPr lang="es-ES" dirty="0">
+              <a:rPr lang="es-ES">
                 <a:solidFill>
                   <a:schemeClr val="tx2"/>
                 </a:solidFill>
@@ -10213,7 +10275,7 @@
               </a:lnSpc>
             </a:pPr>
             <a:r>
-              <a:rPr lang="es-ES" dirty="0">
+              <a:rPr lang="es-ES">
                 <a:solidFill>
                   <a:schemeClr val="tx2"/>
                 </a:solidFill>
@@ -10223,7 +10285,7 @@
               <a:t>Un cliente </a:t>
             </a:r>
             <a:r>
-              <a:rPr lang="es-ES" b="1" i="1" dirty="0" err="1">
+              <a:rPr lang="es-ES" b="1" i="1" err="1">
                 <a:solidFill>
                   <a:schemeClr val="tx2"/>
                 </a:solidFill>
@@ -10233,7 +10295,7 @@
               <a:t>Logeado</a:t>
             </a:r>
             <a:r>
-              <a:rPr lang="es-ES" dirty="0">
+              <a:rPr lang="es-ES">
                 <a:solidFill>
                   <a:schemeClr val="tx2"/>
                 </a:solidFill>
@@ -10250,7 +10312,7 @@
               </a:lnSpc>
             </a:pPr>
             <a:r>
-              <a:rPr lang="es-ES" dirty="0">
+              <a:rPr lang="es-ES">
                 <a:solidFill>
                   <a:schemeClr val="tx2"/>
                 </a:solidFill>
@@ -10261,7 +10323,7 @@
             </a:r>
           </a:p>
           <a:p>
-            <a:endParaRPr lang="es-ES" b="1" dirty="0">
+            <a:endParaRPr lang="es-ES" b="1">
               <a:solidFill>
                 <a:schemeClr val="tx2"/>
               </a:solidFill>
@@ -10271,7 +10333,7 @@
             </a:endParaRPr>
           </a:p>
           <a:p>
-            <a:endParaRPr lang="es-ES" dirty="0"/>
+            <a:endParaRPr lang="es-ES"/>
           </a:p>
         </p:txBody>
       </p:sp>
@@ -10301,7 +10363,7 @@
               <a:buNone/>
             </a:pPr>
             <a:r>
-              <a:rPr lang="es-ES" dirty="0"/>
+              <a:rPr lang="es-ES"/>
               <a:t>2. Diagramas de casos de uso</a:t>
             </a:r>
           </a:p>
@@ -10329,7 +10391,7 @@
           <a:lstStyle/>
           <a:p>
             <a:r>
-              <a:rPr lang="es-ES" b="1" dirty="0">
+              <a:rPr lang="es-ES" b="1">
                 <a:solidFill>
                   <a:srgbClr val="FF0000"/>
                 </a:solidFill>
@@ -10338,7 +10400,7 @@
               </a:rPr>
               <a:t>2.3 Relaciones</a:t>
             </a:r>
-            <a:endParaRPr lang="es-ES" dirty="0">
+            <a:endParaRPr lang="es-ES">
               <a:solidFill>
                 <a:srgbClr val="FF0000"/>
               </a:solidFill>
@@ -10533,7 +10595,7 @@
               <a:buAutoNum type="arabicPeriod"/>
             </a:pPr>
             <a:r>
-              <a:rPr lang="es-ES" dirty="0"/>
+              <a:rPr lang="es-ES"/>
               <a:t>Desarrollo de software, documentos y diagramas</a:t>
             </a:r>
           </a:p>
@@ -10543,7 +10605,7 @@
               <a:buAutoNum type="arabicPeriod"/>
             </a:pPr>
             <a:r>
-              <a:rPr lang="es-ES" dirty="0"/>
+              <a:rPr lang="es-ES"/>
               <a:t>Diagramas de casos de uso</a:t>
             </a:r>
           </a:p>
@@ -10553,7 +10615,7 @@
               <a:buAutoNum type="arabicPeriod"/>
             </a:pPr>
             <a:r>
-              <a:rPr lang="es-ES" dirty="0"/>
+              <a:rPr lang="es-ES"/>
               <a:t>Documentación de casos de uso</a:t>
             </a:r>
           </a:p>
@@ -10563,7 +10625,7 @@
               <a:buAutoNum type="arabicPeriod"/>
             </a:pPr>
             <a:r>
-              <a:rPr lang="es-ES" dirty="0"/>
+              <a:rPr lang="es-ES"/>
               <a:t>Práctica residencia</a:t>
             </a:r>
           </a:p>
@@ -10573,7 +10635,7 @@
               <a:buAutoNum type="arabicPeriod"/>
             </a:pPr>
             <a:r>
-              <a:rPr lang="es-ES" dirty="0"/>
+              <a:rPr lang="es-ES"/>
               <a:t>Recursos</a:t>
             </a:r>
           </a:p>
@@ -10582,28 +10644,28 @@
               <a:buFont typeface="+mj-lt"/>
               <a:buAutoNum type="arabicPeriod"/>
             </a:pPr>
-            <a:endParaRPr lang="es-ES" dirty="0"/>
+            <a:endParaRPr lang="es-ES"/>
           </a:p>
           <a:p>
             <a:pPr marL="400050">
               <a:buFont typeface="+mj-lt"/>
               <a:buAutoNum type="arabicPeriod"/>
             </a:pPr>
-            <a:endParaRPr lang="es-ES" dirty="0"/>
+            <a:endParaRPr lang="es-ES"/>
           </a:p>
           <a:p>
             <a:pPr marL="400050">
               <a:buFont typeface="+mj-lt"/>
               <a:buAutoNum type="arabicPeriod"/>
             </a:pPr>
-            <a:endParaRPr lang="es-ES" dirty="0"/>
+            <a:endParaRPr lang="es-ES"/>
           </a:p>
           <a:p>
             <a:pPr marL="57150" indent="0" algn="ctr">
               <a:buNone/>
             </a:pPr>
             <a:r>
-              <a:rPr lang="es-ES" sz="3200" dirty="0">
+              <a:rPr lang="es-ES" sz="3200">
                 <a:solidFill>
                   <a:schemeClr val="accent4"/>
                 </a:solidFill>
@@ -10616,21 +10678,21 @@
               <a:buFont typeface="+mj-lt"/>
               <a:buAutoNum type="arabicPeriod"/>
             </a:pPr>
-            <a:endParaRPr lang="es-ES" dirty="0"/>
+            <a:endParaRPr lang="es-ES"/>
           </a:p>
           <a:p>
             <a:pPr>
               <a:buFont typeface="+mj-lt"/>
               <a:buAutoNum type="arabicPeriod"/>
             </a:pPr>
-            <a:endParaRPr lang="es-ES" dirty="0"/>
+            <a:endParaRPr lang="es-ES"/>
           </a:p>
           <a:p>
             <a:pPr>
               <a:buFont typeface="+mj-lt"/>
               <a:buAutoNum type="arabicPeriod"/>
             </a:pPr>
-            <a:endParaRPr lang="es-ES" dirty="0"/>
+            <a:endParaRPr lang="es-ES"/>
           </a:p>
         </p:txBody>
       </p:sp>
@@ -10656,7 +10718,7 @@
           <a:lstStyle/>
           <a:p>
             <a:r>
-              <a:rPr lang="es-ES" dirty="0"/>
+              <a:rPr lang="es-ES"/>
               <a:t>CONTENIDO</a:t>
             </a:r>
           </a:p>
@@ -10773,42 +10835,42 @@
           <a:lstStyle/>
           <a:p>
             <a:r>
-              <a:rPr lang="es-ES" dirty="0"/>
+              <a:rPr lang="es-ES"/>
               <a:t>NO se</a:t>
             </a:r>
             <a:r>
-              <a:rPr lang="es-ES" baseline="0" dirty="0"/>
+              <a:rPr lang="es-ES" baseline="0"/>
               <a:t> deben utilizar inclusiones para detallar los pasos de un caso de uso</a:t>
             </a:r>
           </a:p>
           <a:p>
             <a:r>
-              <a:rPr lang="es-ES" dirty="0"/>
+              <a:rPr lang="es-ES"/>
               <a:t>NO se debe llamar USUARIO a un actor</a:t>
             </a:r>
           </a:p>
           <a:p>
             <a:r>
-              <a:rPr lang="es-ES" dirty="0"/>
+              <a:rPr lang="es-ES"/>
               <a:t>NO olvidar el recuadro y el nombre del sistema</a:t>
             </a:r>
           </a:p>
           <a:p>
             <a:r>
-              <a:rPr lang="es-ES" dirty="0"/>
+              <a:rPr lang="es-ES"/>
               <a:t>NO poner punta de flecha en asociaciones</a:t>
             </a:r>
           </a:p>
           <a:p>
             <a:r>
-              <a:rPr lang="es-ES" dirty="0"/>
+              <a:rPr lang="es-ES"/>
               <a:t>Relaciones con segmento discontinuo</a:t>
             </a:r>
           </a:p>
           <a:p>
             <a:pPr lvl="1"/>
             <a:r>
-              <a:rPr lang="es-ES" dirty="0"/>
+              <a:rPr lang="es-ES"/>
               <a:t>La punta de flecha de la herencia</a:t>
             </a:r>
           </a:p>
@@ -10817,7 +10879,7 @@
               <a:buNone/>
             </a:pPr>
             <a:r>
-              <a:rPr lang="es-ES" dirty="0"/>
+              <a:rPr lang="es-ES"/>
               <a:t>    debe estar vacía</a:t>
             </a:r>
           </a:p>
@@ -10849,7 +10911,7 @@
               <a:buNone/>
             </a:pPr>
             <a:r>
-              <a:rPr lang="es-ES" dirty="0"/>
+              <a:rPr lang="es-ES"/>
               <a:t>2. Diagramas de casos de uso</a:t>
             </a:r>
           </a:p>
@@ -10884,7 +10946,7 @@
           <a:lstStyle/>
           <a:p>
             <a:r>
-              <a:rPr lang="es-ES" sz="20000" dirty="0">
+              <a:rPr lang="es-ES" sz="20000">
                 <a:solidFill>
                   <a:srgbClr val="FF0000"/>
                 </a:solidFill>
@@ -10986,7 +11048,7 @@
               <a:buAutoNum type="arabicPeriod"/>
             </a:pPr>
             <a:r>
-              <a:rPr lang="es-ES" sz="1600" kern="1200" dirty="0">
+              <a:rPr lang="es-ES" sz="1600" kern="1200">
                 <a:solidFill>
                   <a:schemeClr val="tx2">
                     <a:lumMod val="75000"/>
@@ -11000,7 +11062,7 @@
               <a:t>Identificar los </a:t>
             </a:r>
             <a:r>
-              <a:rPr lang="es-ES" sz="1600" b="1" kern="1200" dirty="0">
+              <a:rPr lang="es-ES" sz="1600" b="1" kern="1200">
                 <a:solidFill>
                   <a:srgbClr val="FF0000"/>
                 </a:solidFill>
@@ -11012,7 +11074,7 @@
               <a:t>límites</a:t>
             </a:r>
             <a:r>
-              <a:rPr lang="es-ES" sz="1600" kern="1200" dirty="0">
+              <a:rPr lang="es-ES" sz="1600" kern="1200">
                 <a:solidFill>
                   <a:schemeClr val="tx2">
                     <a:lumMod val="75000"/>
@@ -11022,7 +11084,7 @@
               </a:rPr>
               <a:t> del sistema: nombre del sistema</a:t>
             </a:r>
-            <a:endParaRPr lang="es-ES" dirty="0">
+            <a:endParaRPr lang="es-ES">
               <a:solidFill>
                 <a:schemeClr val="tx2">
                   <a:lumMod val="75000"/>
@@ -11037,7 +11099,7 @@
               <a:buAutoNum type="arabicPeriod"/>
             </a:pPr>
             <a:r>
-              <a:rPr lang="es-ES" sz="1600" kern="1200" dirty="0">
+              <a:rPr lang="es-ES" sz="1600" kern="1200">
                 <a:solidFill>
                   <a:schemeClr val="tx2">
                     <a:lumMod val="75000"/>
@@ -11051,7 +11113,7 @@
               <a:t>Identificar los </a:t>
             </a:r>
             <a:r>
-              <a:rPr lang="es-ES" sz="1600" b="1" kern="1200" dirty="0">
+              <a:rPr lang="es-ES" sz="1600" b="1" kern="1200">
                 <a:solidFill>
                   <a:srgbClr val="FF0000"/>
                 </a:solidFill>
@@ -11063,7 +11125,7 @@
               <a:t>actores</a:t>
             </a:r>
             <a:r>
-              <a:rPr lang="es-ES" sz="1600" kern="1200" dirty="0">
+              <a:rPr lang="es-ES" sz="1600" kern="1200">
                 <a:solidFill>
                   <a:schemeClr val="tx2">
                     <a:lumMod val="75000"/>
@@ -11073,7 +11135,7 @@
               </a:rPr>
               <a:t> principales</a:t>
             </a:r>
-            <a:endParaRPr lang="es-ES" dirty="0">
+            <a:endParaRPr lang="es-ES">
               <a:solidFill>
                 <a:schemeClr val="tx2">
                   <a:lumMod val="75000"/>
@@ -11088,7 +11150,7 @@
               <a:buAutoNum type="arabicPeriod"/>
             </a:pPr>
             <a:r>
-              <a:rPr lang="es-ES" sz="1600" kern="1200" dirty="0">
+              <a:rPr lang="es-ES" sz="1600" kern="1200">
                 <a:solidFill>
                   <a:schemeClr val="tx2">
                     <a:lumMod val="75000"/>
@@ -11102,7 +11164,7 @@
               <a:t>Definir los </a:t>
             </a:r>
             <a:r>
-              <a:rPr lang="es-ES" sz="1600" b="1" kern="1200" dirty="0">
+              <a:rPr lang="es-ES" sz="1600" b="1" kern="1200">
                 <a:solidFill>
                   <a:srgbClr val="FF0000"/>
                 </a:solidFill>
@@ -11114,7 +11176,7 @@
               <a:t>casos</a:t>
             </a:r>
             <a:r>
-              <a:rPr lang="es-ES" sz="1600" kern="1200" dirty="0">
+              <a:rPr lang="es-ES" sz="1600" kern="1200">
                 <a:solidFill>
                   <a:srgbClr val="FF0000"/>
                 </a:solidFill>
@@ -11126,7 +11188,7 @@
               <a:t> </a:t>
             </a:r>
             <a:r>
-              <a:rPr lang="es-ES" sz="1600" b="1" kern="1200" dirty="0">
+              <a:rPr lang="es-ES" sz="1600" b="1" kern="1200">
                 <a:solidFill>
                   <a:srgbClr val="FF0000"/>
                 </a:solidFill>
@@ -11138,7 +11200,7 @@
               <a:t>de</a:t>
             </a:r>
             <a:r>
-              <a:rPr lang="es-ES" sz="1600" kern="1200" dirty="0">
+              <a:rPr lang="es-ES" sz="1600" kern="1200">
                 <a:solidFill>
                   <a:srgbClr val="FF0000"/>
                 </a:solidFill>
@@ -11150,7 +11212,7 @@
               <a:t> </a:t>
             </a:r>
             <a:r>
-              <a:rPr lang="es-ES" sz="1600" b="1" kern="1200" dirty="0">
+              <a:rPr lang="es-ES" sz="1600" b="1" kern="1200">
                 <a:solidFill>
                   <a:srgbClr val="FF0000"/>
                 </a:solidFill>
@@ -11162,7 +11224,7 @@
               <a:t>uso</a:t>
             </a:r>
             <a:r>
-              <a:rPr lang="es-ES" sz="1600" kern="1200" dirty="0">
+              <a:rPr lang="es-ES" sz="1600" kern="1200">
                 <a:solidFill>
                   <a:schemeClr val="tx2">
                     <a:lumMod val="75000"/>
@@ -11172,7 +11234,7 @@
               </a:rPr>
               <a:t> que satisfacen los objetivos</a:t>
             </a:r>
-            <a:endParaRPr lang="es-ES" dirty="0">
+            <a:endParaRPr lang="es-ES">
               <a:solidFill>
                 <a:schemeClr val="tx2">
                   <a:lumMod val="75000"/>
@@ -11187,7 +11249,7 @@
               <a:buAutoNum type="arabicPeriod"/>
             </a:pPr>
             <a:r>
-              <a:rPr lang="es-ES" sz="1600" b="1" kern="1200" dirty="0">
+              <a:rPr lang="es-ES" sz="1600" b="1" kern="1200">
                 <a:solidFill>
                   <a:schemeClr val="tx2">
                     <a:lumMod val="75000"/>
@@ -11201,7 +11263,7 @@
               <a:t>Asociar</a:t>
             </a:r>
             <a:r>
-              <a:rPr lang="es-ES" sz="1600" kern="1200" dirty="0">
+              <a:rPr lang="es-ES" sz="1600" kern="1200">
                 <a:solidFill>
                   <a:schemeClr val="tx2">
                     <a:lumMod val="75000"/>
@@ -11211,7 +11273,7 @@
               </a:rPr>
               <a:t> actores y casos de uso</a:t>
             </a:r>
-            <a:endParaRPr lang="es-ES" dirty="0">
+            <a:endParaRPr lang="es-ES">
               <a:solidFill>
                 <a:schemeClr val="tx2">
                   <a:lumMod val="75000"/>
@@ -11226,7 +11288,7 @@
               <a:buAutoNum type="arabicPeriod"/>
             </a:pPr>
             <a:r>
-              <a:rPr lang="es-ES" sz="1600" kern="1200" dirty="0">
+              <a:rPr lang="es-ES" sz="1600" kern="1200">
                 <a:solidFill>
                   <a:srgbClr val="FF0000"/>
                 </a:solidFill>
@@ -11235,7 +11297,7 @@
               <a:t>Opcionalmente</a:t>
             </a:r>
             <a:r>
-              <a:rPr lang="es-ES" sz="1600" kern="1200" dirty="0">
+              <a:rPr lang="es-ES" sz="1600" kern="1200">
                 <a:solidFill>
                   <a:schemeClr val="tx2">
                     <a:lumMod val="75000"/>
@@ -11246,7 +11308,7 @@
               <a:t> </a:t>
             </a:r>
             <a:r>
-              <a:rPr lang="es-ES" sz="1600" kern="1200" dirty="0">
+              <a:rPr lang="es-ES" sz="1600" kern="1200">
                 <a:solidFill>
                   <a:schemeClr val="tx2">
                     <a:lumMod val="75000"/>
@@ -11258,7 +11320,7 @@
               <a:t></a:t>
             </a:r>
             <a:r>
-              <a:rPr lang="es-ES" sz="1600" kern="1200" dirty="0">
+              <a:rPr lang="es-ES" sz="1600" kern="1200">
                 <a:solidFill>
                   <a:schemeClr val="tx2">
                     <a:lumMod val="75000"/>
@@ -11274,7 +11336,7 @@
               <a:buFont typeface="+mj-lt"/>
               <a:buAutoNum type="arabicPeriod"/>
             </a:pPr>
-            <a:endParaRPr lang="es-ES" dirty="0">
+            <a:endParaRPr lang="es-ES">
               <a:solidFill>
                 <a:schemeClr val="tx2">
                   <a:lumMod val="75000"/>
@@ -11288,7 +11350,7 @@
               <a:buNone/>
             </a:pPr>
             <a:r>
-              <a:rPr lang="es-ES" dirty="0">
+              <a:rPr lang="es-ES">
                 <a:solidFill>
                   <a:srgbClr val="0070C0"/>
                 </a:solidFill>
@@ -11299,7 +11361,7 @@
               <a:t> </a:t>
             </a:r>
             <a:r>
-              <a:rPr lang="es-ES" sz="1600" dirty="0">
+              <a:rPr lang="es-ES" sz="1600">
                 <a:solidFill>
                   <a:srgbClr val="0070C0"/>
                 </a:solidFill>
@@ -11310,7 +11372,7 @@
               <a:t>HERRAMIENTA: Web </a:t>
             </a:r>
             <a:r>
-              <a:rPr lang="es-ES" sz="1600" dirty="0">
+              <a:rPr lang="es-ES" sz="1600">
                 <a:solidFill>
                   <a:srgbClr val="0070C0"/>
                 </a:solidFill>
@@ -11321,7 +11383,7 @@
               </a:rPr>
               <a:t>Draw.io </a:t>
             </a:r>
-            <a:endParaRPr lang="es-ES" sz="1600" dirty="0">
+            <a:endParaRPr lang="es-ES" sz="1600">
               <a:solidFill>
                 <a:srgbClr val="0070C0"/>
               </a:solidFill>
@@ -11335,7 +11397,7 @@
             <a:pPr marL="0" indent="0">
               <a:buNone/>
             </a:pPr>
-            <a:endParaRPr lang="es-ES" sz="1600" dirty="0">
+            <a:endParaRPr lang="es-ES" sz="1600">
               <a:solidFill>
                 <a:srgbClr val="0070C0"/>
               </a:solidFill>
@@ -11348,7 +11410,7 @@
             <a:pPr marL="0" indent="0">
               <a:buNone/>
             </a:pPr>
-            <a:endParaRPr lang="es-ES" sz="1600" dirty="0">
+            <a:endParaRPr lang="es-ES" sz="1600">
               <a:solidFill>
                 <a:srgbClr val="0070C0"/>
               </a:solidFill>
@@ -11363,7 +11425,7 @@
               <a:buChar char="§"/>
             </a:pPr>
             <a:r>
-              <a:rPr lang="es-ES" dirty="0">
+              <a:rPr lang="es-ES">
                 <a:solidFill>
                   <a:srgbClr val="FF0000"/>
                 </a:solidFill>
@@ -11398,17 +11460,17 @@
           <a:lstStyle/>
           <a:p>
             <a:r>
-              <a:rPr lang="es-ES" dirty="0"/>
+              <a:rPr lang="es-ES"/>
               <a:t>2. ED6b0301#</a:t>
             </a:r>
             <a:br>
-              <a:rPr lang="es-ES" dirty="0"/>
+              <a:rPr lang="es-ES"/>
             </a:br>
             <a:br>
-              <a:rPr lang="es-ES" dirty="0"/>
+              <a:rPr lang="es-ES"/>
             </a:br>
             <a:r>
-              <a:rPr lang="es-ES" dirty="0"/>
+              <a:rPr lang="es-ES"/>
               <a:t>Diagramas de casos de uso: practica el uso de la herramienta</a:t>
             </a:r>
           </a:p>
@@ -11443,7 +11505,7 @@
               </a:spcBef>
             </a:pPr>
             <a:r>
-              <a:rPr lang="es-ES" sz="2000" dirty="0"/>
+              <a:rPr lang="es-ES" sz="2000"/>
               <a:t>2.4 Pasos para elaborar diagramas de casos de uso</a:t>
             </a:r>
           </a:p>
@@ -11532,56 +11594,56 @@
           <a:lstStyle/>
           <a:p>
             <a:r>
-              <a:rPr lang="es-ES" dirty="0"/>
+              <a:rPr lang="es-ES"/>
               <a:t>Se desea desarrollar un sistema de encuentros virtuales (parecido a un chat).</a:t>
             </a:r>
           </a:p>
           <a:p>
             <a:pPr lvl="1"/>
             <a:r>
-              <a:rPr lang="es-ES" dirty="0"/>
+              <a:rPr lang="es-ES"/>
               <a:t>Cuando se conecta al servidor, un usuario puede entrar o salir de un encuentro.</a:t>
             </a:r>
           </a:p>
           <a:p>
             <a:pPr lvl="1"/>
             <a:r>
-              <a:rPr lang="es-ES" dirty="0"/>
+              <a:rPr lang="es-ES"/>
               <a:t>Cada encuentro tiene un mánager.</a:t>
             </a:r>
           </a:p>
           <a:p>
             <a:pPr lvl="1"/>
             <a:r>
-              <a:rPr lang="es-ES" dirty="0"/>
+              <a:rPr lang="es-ES"/>
               <a:t>El mánager es un usuario que ha planificado el encuentro (el nombre del encuentro, la agenda del encuentro y el moderador del encuentro).</a:t>
             </a:r>
           </a:p>
           <a:p>
             <a:pPr lvl="1"/>
             <a:r>
-              <a:rPr lang="es-ES" dirty="0"/>
+              <a:rPr lang="es-ES"/>
               <a:t>Cada encuentro puede tener también un moderador que es un usuario designado por el mánager.</a:t>
             </a:r>
           </a:p>
           <a:p>
             <a:pPr lvl="1"/>
             <a:r>
-              <a:rPr lang="es-ES" dirty="0"/>
+              <a:rPr lang="es-ES"/>
               <a:t>La misión del moderador es asignar los turnos de palabra para que los usuarios hablen.</a:t>
             </a:r>
           </a:p>
           <a:p>
             <a:pPr lvl="1"/>
             <a:r>
-              <a:rPr lang="es-ES" dirty="0"/>
+              <a:rPr lang="es-ES"/>
               <a:t>El moderador también podrá dar por concluido el encuentro en cualquier momento.</a:t>
             </a:r>
           </a:p>
           <a:p>
             <a:pPr lvl="1"/>
             <a:r>
-              <a:rPr lang="es-ES" dirty="0"/>
+              <a:rPr lang="es-ES"/>
               <a:t>En cualquier momento un usuario puede consultar el estado del sistema, por ejemplo, los encuentros planeados y su información.</a:t>
             </a:r>
           </a:p>
@@ -11613,7 +11675,7 @@
               <a:buNone/>
             </a:pPr>
             <a:r>
-              <a:rPr lang="es-ES" dirty="0"/>
+              <a:rPr lang="es-ES"/>
               <a:t>2. Diagramas de casos de uso</a:t>
             </a:r>
           </a:p>
@@ -11660,7 +11722,7 @@
               <a:defRPr/>
             </a:pPr>
             <a:r>
-              <a:rPr lang="es-ES" sz="1800" kern="1200" dirty="0">
+              <a:rPr lang="es-ES" sz="1800" kern="1200">
                 <a:solidFill>
                   <a:schemeClr val="accent2">
                     <a:lumMod val="50000"/>
@@ -11673,7 +11735,7 @@
               </a:rPr>
               <a:t>2.5 Actividad ejemplo 1 (la hacemos juntos)</a:t>
             </a:r>
-            <a:endParaRPr lang="es-ES" dirty="0">
+            <a:endParaRPr lang="es-ES">
               <a:effectLst/>
             </a:endParaRPr>
           </a:p>
@@ -11712,7 +11774,7 @@
               </a:lnSpc>
             </a:pPr>
             <a:r>
-              <a:rPr lang="es-ES" sz="800" dirty="0">
+              <a:rPr lang="es-ES" sz="800">
                 <a:solidFill>
                   <a:schemeClr val="tx2"/>
                 </a:solidFill>
@@ -11723,7 +11785,7 @@
               <a:t>Identificar los </a:t>
             </a:r>
             <a:r>
-              <a:rPr lang="es-ES" sz="800" b="1" dirty="0">
+              <a:rPr lang="es-ES" sz="800" b="1">
                 <a:solidFill>
                   <a:schemeClr val="tx2"/>
                 </a:solidFill>
@@ -11734,7 +11796,7 @@
               <a:t>límites</a:t>
             </a:r>
             <a:r>
-              <a:rPr lang="es-ES" sz="800" dirty="0">
+              <a:rPr lang="es-ES" sz="800">
                 <a:solidFill>
                   <a:schemeClr val="tx2"/>
                 </a:solidFill>
@@ -11752,7 +11814,7 @@
               </a:lnSpc>
             </a:pPr>
             <a:r>
-              <a:rPr lang="es-ES" sz="800" dirty="0">
+              <a:rPr lang="es-ES" sz="800">
                 <a:solidFill>
                   <a:schemeClr val="tx2"/>
                 </a:solidFill>
@@ -11763,7 +11825,7 @@
               <a:t>Identificar los </a:t>
             </a:r>
             <a:r>
-              <a:rPr lang="es-ES" sz="800" b="1" dirty="0">
+              <a:rPr lang="es-ES" sz="800" b="1">
                 <a:solidFill>
                   <a:schemeClr val="tx2"/>
                 </a:solidFill>
@@ -11774,7 +11836,7 @@
               <a:t>actores</a:t>
             </a:r>
             <a:r>
-              <a:rPr lang="es-ES" sz="800" dirty="0">
+              <a:rPr lang="es-ES" sz="800">
                 <a:solidFill>
                   <a:schemeClr val="tx2"/>
                 </a:solidFill>
@@ -11792,7 +11854,7 @@
               </a:lnSpc>
             </a:pPr>
             <a:r>
-              <a:rPr lang="es-ES" sz="800" dirty="0">
+              <a:rPr lang="es-ES" sz="800">
                 <a:solidFill>
                   <a:schemeClr val="tx2"/>
                 </a:solidFill>
@@ -11803,7 +11865,7 @@
               <a:t>Definir los </a:t>
             </a:r>
             <a:r>
-              <a:rPr lang="es-ES" sz="800" b="1" dirty="0">
+              <a:rPr lang="es-ES" sz="800" b="1">
                 <a:solidFill>
                   <a:schemeClr val="tx2"/>
                 </a:solidFill>
@@ -11814,7 +11876,7 @@
               <a:t>casos</a:t>
             </a:r>
             <a:r>
-              <a:rPr lang="es-ES" sz="800" dirty="0">
+              <a:rPr lang="es-ES" sz="800">
                 <a:solidFill>
                   <a:schemeClr val="tx2"/>
                 </a:solidFill>
@@ -11825,7 +11887,7 @@
               <a:t> </a:t>
             </a:r>
             <a:r>
-              <a:rPr lang="es-ES" sz="800" b="1" dirty="0">
+              <a:rPr lang="es-ES" sz="800" b="1">
                 <a:solidFill>
                   <a:schemeClr val="tx2"/>
                 </a:solidFill>
@@ -11836,7 +11898,7 @@
               <a:t>de</a:t>
             </a:r>
             <a:r>
-              <a:rPr lang="es-ES" sz="800" dirty="0">
+              <a:rPr lang="es-ES" sz="800">
                 <a:solidFill>
                   <a:schemeClr val="tx2"/>
                 </a:solidFill>
@@ -11847,7 +11909,7 @@
               <a:t> </a:t>
             </a:r>
             <a:r>
-              <a:rPr lang="es-ES" sz="800" b="1" dirty="0">
+              <a:rPr lang="es-ES" sz="800" b="1">
                 <a:solidFill>
                   <a:schemeClr val="tx2"/>
                 </a:solidFill>
@@ -11865,7 +11927,7 @@
               </a:lnSpc>
             </a:pPr>
             <a:r>
-              <a:rPr lang="es-ES" sz="800" b="1" dirty="0">
+              <a:rPr lang="es-ES" sz="800" b="1">
                 <a:solidFill>
                   <a:schemeClr val="tx2"/>
                 </a:solidFill>
@@ -11876,7 +11938,7 @@
               <a:t>Asociar</a:t>
             </a:r>
             <a:r>
-              <a:rPr lang="es-ES" sz="800" dirty="0">
+              <a:rPr lang="es-ES" sz="800">
                 <a:solidFill>
                   <a:schemeClr val="tx2"/>
                 </a:solidFill>
@@ -11894,7 +11956,7 @@
               </a:lnSpc>
             </a:pPr>
             <a:r>
-              <a:rPr lang="es-ES" sz="800" dirty="0">
+              <a:rPr lang="es-ES" sz="800">
                 <a:solidFill>
                   <a:schemeClr val="tx2"/>
                 </a:solidFill>
@@ -11912,7 +11974,7 @@
               </a:lnSpc>
             </a:pPr>
             <a:r>
-              <a:rPr lang="es-ES" sz="800" dirty="0">
+              <a:rPr lang="es-ES" sz="800">
                 <a:solidFill>
                   <a:schemeClr val="tx2"/>
                 </a:solidFill>
@@ -11922,7 +11984,7 @@
               </a:rPr>
               <a:t>generalización</a:t>
             </a:r>
-            <a:endParaRPr sz="800" dirty="0">
+            <a:endParaRPr sz="800">
               <a:solidFill>
                 <a:schemeClr val="tx2"/>
               </a:solidFill>
@@ -12018,7 +12080,7 @@
               <a:buNone/>
             </a:pPr>
             <a:r>
-              <a:rPr lang="es-ES" dirty="0"/>
+              <a:rPr lang="es-ES"/>
               <a:t>2. Diagramas de casos de uso</a:t>
             </a:r>
           </a:p>
@@ -12046,14 +12108,14 @@
           <a:lstStyle/>
           <a:p>
             <a:r>
-              <a:rPr lang="es-ES" dirty="0"/>
+              <a:rPr lang="es-ES"/>
               <a:t>2.5 Actividad</a:t>
             </a:r>
             <a:r>
-              <a:rPr lang="es-ES" baseline="0" dirty="0"/>
+              <a:rPr lang="es-ES" baseline="0"/>
               <a:t> ejemplo 1</a:t>
             </a:r>
-            <a:endParaRPr lang="es-ES" dirty="0"/>
+            <a:endParaRPr lang="es-ES"/>
           </a:p>
         </p:txBody>
       </p:sp>
@@ -12283,7 +12345,7 @@
           <a:lstStyle/>
           <a:p>
             <a:r>
-              <a:rPr lang="es-ES" dirty="0"/>
+              <a:rPr lang="es-ES"/>
               <a:t>Interlocutor</a:t>
             </a:r>
           </a:p>
@@ -12320,7 +12382,7 @@
           <a:lstStyle/>
           <a:p>
             <a:r>
-              <a:rPr lang="es-ES" sz="1000" dirty="0"/>
+              <a:rPr lang="es-ES" sz="1000"/>
               <a:t>Mejorar el nombre del rol</a:t>
             </a:r>
           </a:p>
@@ -12410,7 +12472,7 @@
           <a:p>
             <a:pPr rtl="0" eaLnBrk="1" latinLnBrk="0" hangingPunct="1"/>
             <a:r>
-              <a:rPr lang="es-ES" sz="1800" kern="1200" dirty="0">
+              <a:rPr lang="es-ES" sz="1800" kern="1200">
                 <a:solidFill>
                   <a:schemeClr val="tx1">
                     <a:lumMod val="75000"/>
@@ -12425,7 +12487,7 @@
               <a:t>Veamos el caso de una </a:t>
             </a:r>
             <a:r>
-              <a:rPr lang="es-ES" sz="1800" b="1" kern="1200" dirty="0">
+              <a:rPr lang="es-ES" sz="1800" b="1" kern="1200">
                 <a:solidFill>
                   <a:schemeClr val="tx1">
                     <a:lumMod val="75000"/>
@@ -12440,7 +12502,7 @@
               <a:t>Máquina de reciclaje</a:t>
             </a:r>
             <a:r>
-              <a:rPr lang="es-ES" sz="1800" kern="1200" dirty="0">
+              <a:rPr lang="es-ES" sz="1800" kern="1200">
                 <a:solidFill>
                   <a:schemeClr val="tx1">
                     <a:lumMod val="75000"/>
@@ -12454,14 +12516,14 @@
               </a:rPr>
               <a:t>: sistema que controla una máquina de recogida para reciclaje de botellas o tarros.</a:t>
             </a:r>
-            <a:endParaRPr lang="es-ES" dirty="0">
+            <a:endParaRPr lang="es-ES">
               <a:effectLst/>
             </a:endParaRPr>
           </a:p>
           <a:p>
             <a:pPr rtl="0" eaLnBrk="1" latinLnBrk="0" hangingPunct="1"/>
             <a:r>
-              <a:rPr lang="es-ES" sz="1800" kern="1200" dirty="0">
+              <a:rPr lang="es-ES" sz="1800" kern="1200">
                 <a:solidFill>
                   <a:schemeClr val="tx1">
                     <a:lumMod val="75000"/>
@@ -12475,14 +12537,14 @@
               </a:rPr>
               <a:t>El sistema debe controlar y/o aceptar:</a:t>
             </a:r>
-            <a:endParaRPr lang="es-ES" dirty="0">
+            <a:endParaRPr lang="es-ES">
               <a:effectLst/>
             </a:endParaRPr>
           </a:p>
           <a:p>
             <a:pPr lvl="1" rtl="0" eaLnBrk="1" latinLnBrk="0" hangingPunct="1"/>
             <a:r>
-              <a:rPr lang="es-ES" sz="1600" kern="1200" dirty="0">
+              <a:rPr lang="es-ES" sz="1600" kern="1200">
                 <a:solidFill>
                   <a:schemeClr val="tx1">
                     <a:lumMod val="75000"/>
@@ -12496,14 +12558,14 @@
               </a:rPr>
               <a:t>• Registrar los ítems ingresados.</a:t>
             </a:r>
-            <a:endParaRPr lang="es-ES" dirty="0">
+            <a:endParaRPr lang="es-ES">
               <a:effectLst/>
             </a:endParaRPr>
           </a:p>
           <a:p>
             <a:pPr lvl="1" rtl="0" eaLnBrk="1" latinLnBrk="0" hangingPunct="1"/>
             <a:r>
-              <a:rPr lang="es-ES" sz="1600" kern="1200" dirty="0">
+              <a:rPr lang="es-ES" sz="1600" kern="1200">
                 <a:solidFill>
                   <a:schemeClr val="tx1">
                     <a:lumMod val="75000"/>
@@ -12517,14 +12579,14 @@
               </a:rPr>
               <a:t>• Imprimir un recibo describiendo los ítems depositados por los usuarios.</a:t>
             </a:r>
-            <a:endParaRPr lang="es-ES" dirty="0">
+            <a:endParaRPr lang="es-ES">
               <a:effectLst/>
             </a:endParaRPr>
           </a:p>
           <a:p>
             <a:pPr lvl="1"/>
             <a:r>
-              <a:rPr lang="es-ES" sz="1600" kern="1200" dirty="0">
+              <a:rPr lang="es-ES" sz="1600" kern="1200">
                 <a:solidFill>
                   <a:schemeClr val="tx1">
                     <a:lumMod val="75000"/>
@@ -12539,7 +12601,7 @@
               <a:t>• El operador desea </a:t>
             </a:r>
             <a:r>
-              <a:rPr lang="es-ES" dirty="0">
+              <a:rPr lang="es-ES">
                 <a:solidFill>
                   <a:schemeClr val="tx1">
                     <a:lumMod val="75000"/>
@@ -12550,7 +12612,7 @@
               <a:t>obtener al</a:t>
             </a:r>
             <a:r>
-              <a:rPr lang="es-ES" sz="1600" kern="1200" dirty="0">
+              <a:rPr lang="es-ES" sz="1600" kern="1200">
                 <a:solidFill>
                   <a:schemeClr val="tx1">
                     <a:lumMod val="75000"/>
@@ -12564,7 +12626,7 @@
               </a:rPr>
               <a:t> final de cada día, un resumen de todo lo depositado en el día. Para ello imprimirá un resumen.</a:t>
             </a:r>
-            <a:endParaRPr lang="es-ES" dirty="0">
+            <a:endParaRPr lang="es-ES">
               <a:solidFill>
                 <a:schemeClr val="tx1">
                   <a:lumMod val="75000"/>
@@ -12577,7 +12639,7 @@
           <a:p>
             <a:pPr lvl="1" rtl="0" eaLnBrk="1" latinLnBrk="0" hangingPunct="1"/>
             <a:r>
-              <a:rPr lang="es-ES" sz="1600" kern="1200" dirty="0">
+              <a:rPr lang="es-ES" sz="1600" kern="1200">
                 <a:solidFill>
                   <a:schemeClr val="tx1">
                     <a:lumMod val="75000"/>
@@ -12591,14 +12653,14 @@
               </a:rPr>
               <a:t>• El operador debe poder cambiar la información asociada a ítems.</a:t>
             </a:r>
-            <a:endParaRPr lang="es-ES" dirty="0">
+            <a:endParaRPr lang="es-ES">
               <a:effectLst/>
             </a:endParaRPr>
           </a:p>
           <a:p>
             <a:pPr lvl="1" rtl="0" eaLnBrk="1" latinLnBrk="0" hangingPunct="1"/>
             <a:r>
-              <a:rPr lang="es-ES" sz="1600" kern="1200" dirty="0">
+              <a:rPr lang="es-ES" sz="1600" kern="1200">
                 <a:solidFill>
                   <a:schemeClr val="tx1">
                     <a:lumMod val="75000"/>
@@ -12612,14 +12674,14 @@
               </a:rPr>
               <a:t>• En el sistema se activará una alarma cuando:</a:t>
             </a:r>
-            <a:endParaRPr lang="es-ES" dirty="0">
+            <a:endParaRPr lang="es-ES">
               <a:effectLst/>
             </a:endParaRPr>
           </a:p>
           <a:p>
             <a:pPr lvl="2" rtl="0" eaLnBrk="1" latinLnBrk="0" hangingPunct="1"/>
             <a:r>
-              <a:rPr lang="es-ES" sz="1400" kern="1200" dirty="0">
+              <a:rPr lang="es-ES" sz="1400" kern="1200">
                 <a:solidFill>
                   <a:schemeClr val="tx1">
                     <a:lumMod val="75000"/>
@@ -12634,7 +12696,7 @@
               <a:t>a. Un </a:t>
             </a:r>
             <a:r>
-              <a:rPr lang="es-ES" sz="1400" kern="1200" dirty="0" err="1">
+              <a:rPr lang="es-ES" sz="1400" kern="1200" err="1">
                 <a:solidFill>
                   <a:schemeClr val="tx1">
                     <a:lumMod val="75000"/>
@@ -12649,7 +12711,7 @@
               <a:t>Item</a:t>
             </a:r>
             <a:r>
-              <a:rPr lang="es-ES" sz="1400" kern="1200" dirty="0">
+              <a:rPr lang="es-ES" sz="1400" kern="1200">
                 <a:solidFill>
                   <a:schemeClr val="tx1">
                     <a:lumMod val="75000"/>
@@ -12663,14 +12725,14 @@
               </a:rPr>
               <a:t> se atasca.</a:t>
             </a:r>
-            <a:endParaRPr lang="es-ES" dirty="0">
+            <a:endParaRPr lang="es-ES">
               <a:effectLst/>
             </a:endParaRPr>
           </a:p>
           <a:p>
             <a:pPr lvl="2" rtl="0" eaLnBrk="1" latinLnBrk="0" hangingPunct="1"/>
             <a:r>
-              <a:rPr lang="es-ES" sz="1400" kern="1200" dirty="0">
+              <a:rPr lang="es-ES" sz="1400" kern="1200">
                 <a:solidFill>
                   <a:schemeClr val="tx1">
                     <a:lumMod val="75000"/>
@@ -12684,12 +12746,12 @@
               </a:rPr>
               <a:t>b. No hay más papel en la impresora.</a:t>
             </a:r>
-            <a:endParaRPr lang="es-ES" dirty="0">
+            <a:endParaRPr lang="es-ES">
               <a:effectLst/>
             </a:endParaRPr>
           </a:p>
           <a:p>
-            <a:endParaRPr lang="es-ES" dirty="0"/>
+            <a:endParaRPr lang="es-ES"/>
           </a:p>
         </p:txBody>
       </p:sp>
@@ -12719,7 +12781,7 @@
               <a:buNone/>
             </a:pPr>
             <a:r>
-              <a:rPr lang="es-ES" dirty="0"/>
+              <a:rPr lang="es-ES"/>
               <a:t>2. Diagramas de casos de uso</a:t>
             </a:r>
           </a:p>
@@ -12747,7 +12809,7 @@
           <a:lstStyle/>
           <a:p>
             <a:r>
-              <a:rPr lang="es-ES" dirty="0"/>
+              <a:rPr lang="es-ES"/>
               <a:t>2.6 Actividad ejemplo 2</a:t>
             </a:r>
           </a:p>
@@ -12834,14 +12896,14 @@
           <a:lstStyle/>
           <a:p>
             <a:r>
-              <a:rPr lang="es-ES" dirty="0"/>
+              <a:rPr lang="es-ES"/>
               <a:t>2.6 Actividad</a:t>
             </a:r>
             <a:r>
-              <a:rPr lang="es-ES" baseline="0" dirty="0"/>
+              <a:rPr lang="es-ES" baseline="0"/>
               <a:t> ejemplo 2</a:t>
             </a:r>
-            <a:endParaRPr lang="es-ES" dirty="0"/>
+            <a:endParaRPr lang="es-ES"/>
           </a:p>
         </p:txBody>
       </p:sp>
@@ -12867,16 +12929,8 @@
           <a:lstStyle/>
           <a:p>
             <a:r>
-              <a:rPr lang="es-ES" dirty="0"/>
-              <a:t>2. Diagramas de casos de </a:t>
-            </a:r>
-            <a:r>
               <a:rPr lang="es-ES"/>
-              <a:t>uso ED6b0301# </a:t>
-            </a:r>
-            <a:r>
-              <a:rPr lang="es-ES" dirty="0"/>
-              <a:t>: todos los ejemplos</a:t>
+              <a:t>2. Diagramas de casos de uso ED6b0301# : todos los ejemplos</a:t>
             </a:r>
           </a:p>
         </p:txBody>
@@ -12942,7 +12996,7 @@
           <a:lstStyle/>
           <a:p>
             <a:r>
-              <a:rPr lang="es-ES" sz="1000" dirty="0"/>
+              <a:rPr lang="es-ES" sz="1000"/>
               <a:t>Ciudadano</a:t>
             </a:r>
           </a:p>
@@ -13031,7 +13085,7 @@
             <a:pPr marL="0" indent="0">
               <a:buNone/>
             </a:pPr>
-            <a:endParaRPr lang="es-ES" dirty="0">
+            <a:endParaRPr lang="es-ES">
               <a:solidFill>
                 <a:schemeClr val="tx2"/>
               </a:solidFill>
@@ -13061,7 +13115,7 @@
           <a:lstStyle/>
           <a:p>
             <a:r>
-              <a:rPr lang="es-ES" dirty="0"/>
+              <a:rPr lang="es-ES"/>
               <a:t>3.   Documentación de casos de uso</a:t>
             </a:r>
           </a:p>
@@ -13089,14 +13143,14 @@
           <a:lstStyle/>
           <a:p>
             <a:r>
-              <a:rPr lang="es-ES" dirty="0">
+              <a:rPr lang="es-ES">
                 <a:solidFill>
                   <a:schemeClr val="tx2"/>
                 </a:solidFill>
               </a:rPr>
               <a:t>Tengo que describir detalladamente cada uno de los casos de uso</a:t>
             </a:r>
-            <a:endParaRPr lang="es-ES" dirty="0"/>
+            <a:endParaRPr lang="es-ES"/>
           </a:p>
         </p:txBody>
       </p:sp>
@@ -13116,13 +13170,15 @@
         </p:nvPicPr>
         <p:blipFill rotWithShape="1">
           <a:blip r:embed="rId2"/>
-          <a:srcRect b="7978"/>
-          <a:stretch/>
+          <a:srcRect l="1394" t="2573" r="-348" b="-1136"/>
+          <a:stretch>
+            <a:fillRect/>
+          </a:stretch>
         </p:blipFill>
         <p:spPr>
           <a:xfrm>
-            <a:off x="3273038" y="1878442"/>
-            <a:ext cx="3144457" cy="2540294"/>
+            <a:off x="3874062" y="1714500"/>
+            <a:ext cx="2875029" cy="2633029"/>
           </a:xfrm>
           <a:prstGeom prst="rect">
             <a:avLst/>
@@ -13145,6 +13201,7 @@
         </p:nvPicPr>
         <p:blipFill>
           <a:blip r:embed="rId3"/>
+          <a:srcRect r="-6400" b="-6303"/>
           <a:stretch>
             <a:fillRect/>
           </a:stretch>
@@ -13152,7 +13209,7 @@
         <p:spPr>
           <a:xfrm>
             <a:off x="334962" y="1185495"/>
-            <a:ext cx="3027659" cy="1923711"/>
+            <a:ext cx="3277973" cy="2085342"/>
           </a:xfrm>
           <a:prstGeom prst="rect">
             <a:avLst/>
@@ -13308,7 +13365,7 @@
           <a:p>
             <a:pPr lvl="0"/>
             <a:r>
-              <a:rPr lang="es-ES" b="1" kern="1200" dirty="0">
+              <a:rPr lang="es-ES" b="1" kern="1200">
                 <a:solidFill>
                   <a:schemeClr val="tx1">
                     <a:lumMod val="65000"/>
@@ -13320,7 +13377,7 @@
               <a:t>Nombre</a:t>
             </a:r>
             <a:r>
-              <a:rPr lang="es-ES" kern="1200" dirty="0">
+              <a:rPr lang="es-ES" kern="1200">
                 <a:solidFill>
                   <a:schemeClr val="tx1">
                     <a:lumMod val="65000"/>
@@ -13332,7 +13389,7 @@
               <a:t> del caso: </a:t>
             </a:r>
             <a:r>
-              <a:rPr lang="es-ES" kern="1200" dirty="0">
+              <a:rPr lang="es-ES" kern="1200">
                 <a:solidFill>
                   <a:srgbClr val="FF0000"/>
                 </a:solidFill>
@@ -13341,7 +13398,7 @@
               <a:t>verbo</a:t>
             </a:r>
             <a:r>
-              <a:rPr lang="es-ES" kern="1200" dirty="0">
+              <a:rPr lang="es-ES" kern="1200">
                 <a:solidFill>
                   <a:schemeClr val="tx1">
                     <a:lumMod val="65000"/>
@@ -13352,7 +13409,7 @@
               </a:rPr>
               <a:t> con la acción</a:t>
             </a:r>
-            <a:endParaRPr lang="es-ES" dirty="0">
+            <a:endParaRPr lang="es-ES">
               <a:solidFill>
                 <a:schemeClr val="tx1">
                   <a:lumMod val="65000"/>
@@ -13365,7 +13422,7 @@
           <a:p>
             <a:pPr lvl="0"/>
             <a:r>
-              <a:rPr lang="es-ES" b="1" kern="1200" dirty="0">
+              <a:rPr lang="es-ES" b="1" kern="1200">
                 <a:solidFill>
                   <a:schemeClr val="tx1">
                     <a:lumMod val="65000"/>
@@ -13377,7 +13434,7 @@
               <a:t>ID</a:t>
             </a:r>
             <a:r>
-              <a:rPr lang="es-ES" kern="1200" dirty="0">
+              <a:rPr lang="es-ES" kern="1200">
                 <a:solidFill>
                   <a:schemeClr val="tx1">
                     <a:lumMod val="65000"/>
@@ -13388,7 +13445,7 @@
               </a:rPr>
               <a:t> identificador</a:t>
             </a:r>
-            <a:endParaRPr lang="es-ES" dirty="0">
+            <a:endParaRPr lang="es-ES">
               <a:solidFill>
                 <a:schemeClr val="tx1">
                   <a:lumMod val="65000"/>
@@ -13401,7 +13458,7 @@
           <a:p>
             <a:pPr lvl="0"/>
             <a:r>
-              <a:rPr lang="es-ES" kern="1200" dirty="0">
+              <a:rPr lang="es-ES" kern="1200">
                 <a:solidFill>
                   <a:schemeClr val="tx1">
                     <a:lumMod val="65000"/>
@@ -13413,7 +13470,7 @@
               <a:t>Breve </a:t>
             </a:r>
             <a:r>
-              <a:rPr lang="es-ES" b="1" kern="1200" dirty="0">
+              <a:rPr lang="es-ES" b="1" kern="1200">
                 <a:solidFill>
                   <a:schemeClr val="tx1">
                     <a:lumMod val="65000"/>
@@ -13424,7 +13481,7 @@
               </a:rPr>
               <a:t>descripción</a:t>
             </a:r>
-            <a:endParaRPr lang="es-ES" b="1" dirty="0">
+            <a:endParaRPr lang="es-ES" b="1">
               <a:solidFill>
                 <a:schemeClr val="tx1">
                   <a:lumMod val="65000"/>
@@ -13437,7 +13494,7 @@
           <a:p>
             <a:pPr lvl="0"/>
             <a:r>
-              <a:rPr lang="es-ES" b="1" kern="1200" dirty="0">
+              <a:rPr lang="es-ES" b="1" kern="1200">
                 <a:solidFill>
                   <a:schemeClr val="tx1">
                     <a:lumMod val="65000"/>
@@ -13449,7 +13506,7 @@
               <a:t>Actores</a:t>
             </a:r>
             <a:r>
-              <a:rPr lang="es-ES" kern="1200" dirty="0">
+              <a:rPr lang="es-ES" kern="1200">
                 <a:solidFill>
                   <a:schemeClr val="tx1">
                     <a:lumMod val="65000"/>
@@ -13460,7 +13517,7 @@
               </a:rPr>
               <a:t> implicados</a:t>
             </a:r>
-            <a:endParaRPr lang="es-ES" dirty="0">
+            <a:endParaRPr lang="es-ES">
               <a:solidFill>
                 <a:schemeClr val="tx1">
                   <a:lumMod val="65000"/>
@@ -13473,7 +13530,7 @@
           <a:p>
             <a:pPr lvl="0"/>
             <a:r>
-              <a:rPr lang="es-ES" b="1" kern="1200" dirty="0">
+              <a:rPr lang="es-ES" b="1" kern="1200">
                 <a:solidFill>
                   <a:schemeClr val="tx1">
                     <a:lumMod val="65000"/>
@@ -13485,7 +13542,7 @@
               <a:t>Precondiciones</a:t>
             </a:r>
             <a:r>
-              <a:rPr lang="es-ES" kern="1200" dirty="0">
+              <a:rPr lang="es-ES" kern="1200">
                 <a:solidFill>
                   <a:schemeClr val="tx1">
                     <a:lumMod val="65000"/>
@@ -13496,7 +13553,7 @@
               </a:rPr>
               <a:t>: condiciones que deben cumplirse antes de que el caso de uso pueda empezar</a:t>
             </a:r>
-            <a:endParaRPr lang="es-ES" dirty="0">
+            <a:endParaRPr lang="es-ES">
               <a:solidFill>
                 <a:schemeClr val="tx1">
                   <a:lumMod val="65000"/>
@@ -13509,7 +13566,7 @@
           <a:p>
             <a:pPr lvl="0"/>
             <a:r>
-              <a:rPr lang="es-ES" kern="1200" dirty="0">
+              <a:rPr lang="es-ES" kern="1200">
                 <a:solidFill>
                   <a:schemeClr val="tx1">
                     <a:lumMod val="65000"/>
@@ -13521,7 +13578,7 @@
               <a:t>Curso </a:t>
             </a:r>
             <a:r>
-              <a:rPr lang="es-ES" b="1" kern="1200" dirty="0">
+              <a:rPr lang="es-ES" b="1" kern="1200">
                 <a:solidFill>
                   <a:schemeClr val="tx1">
                     <a:lumMod val="65000"/>
@@ -13533,7 +13590,7 @@
               <a:t>normal</a:t>
             </a:r>
             <a:r>
-              <a:rPr lang="es-ES" kern="1200" dirty="0">
+              <a:rPr lang="es-ES" kern="1200">
                 <a:solidFill>
                   <a:schemeClr val="tx1">
                     <a:lumMod val="65000"/>
@@ -13544,7 +13601,7 @@
               </a:rPr>
               <a:t>: Pasos en el caso que llevan a la finalización con éxito de este. Los pasos se describen ordenados cronológicamente</a:t>
             </a:r>
-            <a:endParaRPr lang="es-ES" dirty="0">
+            <a:endParaRPr lang="es-ES">
               <a:solidFill>
                 <a:schemeClr val="tx1">
                   <a:lumMod val="65000"/>
@@ -13557,7 +13614,7 @@
           <a:p>
             <a:pPr lvl="0"/>
             <a:r>
-              <a:rPr lang="es-ES" b="1" kern="1200" dirty="0">
+              <a:rPr lang="es-ES" b="1" kern="1200">
                 <a:solidFill>
                   <a:schemeClr val="tx1">
                     <a:lumMod val="65000"/>
@@ -13569,7 +13626,7 @@
               <a:t>Postcondiciones</a:t>
             </a:r>
             <a:r>
-              <a:rPr lang="es-ES" kern="1200" dirty="0">
+              <a:rPr lang="es-ES" kern="1200">
                 <a:solidFill>
                   <a:schemeClr val="tx1">
                     <a:lumMod val="65000"/>
@@ -13580,7 +13637,7 @@
               </a:rPr>
               <a:t>: condiciones que deben cumplirse después de finalizado el caso de uso</a:t>
             </a:r>
-            <a:endParaRPr lang="es-ES" dirty="0">
+            <a:endParaRPr lang="es-ES">
               <a:solidFill>
                 <a:schemeClr val="tx1">
                   <a:lumMod val="65000"/>
@@ -13593,7 +13650,7 @@
           <a:p>
             <a:pPr lvl="0"/>
             <a:r>
-              <a:rPr lang="es-ES" b="1" kern="1200" dirty="0">
+              <a:rPr lang="es-ES" b="1" kern="1200">
                 <a:solidFill>
                   <a:schemeClr val="tx1">
                     <a:lumMod val="65000"/>
@@ -13605,7 +13662,7 @@
               <a:t>Alternativas</a:t>
             </a:r>
             <a:r>
-              <a:rPr lang="es-ES" kern="1200" dirty="0">
+              <a:rPr lang="es-ES" kern="1200">
                 <a:solidFill>
                   <a:schemeClr val="tx1">
                     <a:lumMod val="65000"/>
@@ -13616,7 +13673,7 @@
               </a:rPr>
               <a:t>: Desviaciones del curso normal del caso, por ejemplo, las provocadas por errores o excepciones</a:t>
             </a:r>
-            <a:endParaRPr lang="es-ES" dirty="0">
+            <a:endParaRPr lang="es-ES">
               <a:solidFill>
                 <a:schemeClr val="tx1">
                   <a:lumMod val="65000"/>
@@ -13627,7 +13684,7 @@
             </a:endParaRPr>
           </a:p>
           <a:p>
-            <a:endParaRPr lang="es-ES" dirty="0"/>
+            <a:endParaRPr lang="es-ES"/>
           </a:p>
         </p:txBody>
       </p:sp>
@@ -13657,7 +13714,7 @@
               <a:buAutoNum type="arabicPeriod" startAt="3"/>
             </a:pPr>
             <a:r>
-              <a:rPr lang="es-ES" dirty="0"/>
+              <a:rPr lang="es-ES"/>
               <a:t>Documentación de casos de uso</a:t>
             </a:r>
           </a:p>
@@ -13704,7 +13761,7 @@
               <a:defRPr/>
             </a:pPr>
             <a:r>
-              <a:rPr lang="es-ES" sz="1800" b="1" kern="1200" dirty="0">
+              <a:rPr lang="es-ES" sz="1800" b="1" kern="1200">
                 <a:solidFill>
                   <a:schemeClr val="accent2">
                     <a:lumMod val="50000"/>
@@ -13717,7 +13774,7 @@
               </a:rPr>
               <a:t>3.1 Para ello utilizo tablas</a:t>
             </a:r>
-            <a:endParaRPr lang="es-ES" sz="1800" dirty="0">
+            <a:endParaRPr lang="es-ES" sz="1800">
               <a:effectLst/>
             </a:endParaRPr>
           </a:p>
@@ -13833,7 +13890,7 @@
           <a:bodyPr/>
           <a:lstStyle/>
           <a:p>
-            <a:endParaRPr lang="es-ES" dirty="0"/>
+            <a:endParaRPr lang="es-ES"/>
           </a:p>
         </p:txBody>
       </p:sp>
@@ -13863,7 +13920,7 @@
               <a:buAutoNum type="arabicPeriod" startAt="3"/>
             </a:pPr>
             <a:r>
-              <a:rPr lang="es-ES" dirty="0"/>
+              <a:rPr lang="es-ES"/>
               <a:t>Documentación de casos de uso</a:t>
             </a:r>
           </a:p>
@@ -13910,7 +13967,7 @@
               <a:defRPr/>
             </a:pPr>
             <a:r>
-              <a:rPr lang="es-ES" sz="1800" b="1" kern="1200" dirty="0">
+              <a:rPr lang="es-ES" sz="1800" b="1" kern="1200">
                 <a:solidFill>
                   <a:schemeClr val="accent2">
                     <a:lumMod val="50000"/>
@@ -13923,12 +13980,12 @@
               </a:rPr>
               <a:t>3.1 Mediante tablas</a:t>
             </a:r>
-            <a:endParaRPr lang="es-ES" dirty="0">
+            <a:endParaRPr lang="es-ES">
               <a:effectLst/>
             </a:endParaRPr>
           </a:p>
           <a:p>
-            <a:endParaRPr lang="es-ES" dirty="0"/>
+            <a:endParaRPr lang="es-ES"/>
           </a:p>
         </p:txBody>
       </p:sp>
@@ -13947,14 +14004,14 @@
           <p:nvPr>
             <p:extLst>
               <p:ext uri="{D42A27DB-BD31-4B8C-83A1-F6EECF244321}">
-                <p14:modId xmlns:p14="http://schemas.microsoft.com/office/powerpoint/2010/main" val="4122504060"/>
+                <p14:modId xmlns:p14="http://schemas.microsoft.com/office/powerpoint/2010/main" val="2420402981"/>
               </p:ext>
             </p:extLst>
           </p:nvPr>
         </p:nvGraphicFramePr>
         <p:xfrm>
-          <a:off x="611560" y="1988840"/>
-          <a:ext cx="8064896" cy="4181012"/>
+          <a:off x="255720" y="1859444"/>
+          <a:ext cx="8064896" cy="4288445"/>
         </p:xfrm>
         <a:graphic>
           <a:graphicData uri="http://schemas.openxmlformats.org/drawingml/2006/table">
@@ -13996,17 +14053,17 @@
                             <a:srgbClr val="FFFFFF"/>
                           </a:solidFill>
                           <a:effectLst/>
-                          <a:latin typeface="Calibri" panose="020F0502020204030204" pitchFamily="34" charset="0"/>
-                          <a:ea typeface="Calibri" panose="020F0502020204030204" pitchFamily="34" charset="0"/>
-                          <a:cs typeface="Times New Roman" panose="02020603050405020304" pitchFamily="18" charset="0"/>
+                          <a:latin typeface="Calibri"/>
+                          <a:ea typeface="Calibri"/>
+                          <a:cs typeface="Times New Roman"/>
                         </a:rPr>
                         <a:t>SISTEMA DE GESTIÓN DE UNA BIBILIOTECA</a:t>
                       </a:r>
                       <a:endParaRPr lang="es-ES" sz="1600" kern="100">
                         <a:effectLst/>
-                        <a:latin typeface="Calibri" panose="020F0502020204030204" pitchFamily="34" charset="0"/>
-                        <a:ea typeface="Calibri" panose="020F0502020204030204" pitchFamily="34" charset="0"/>
-                        <a:cs typeface="Times New Roman" panose="02020603050405020304" pitchFamily="18" charset="0"/>
+                        <a:latin typeface="Calibri"/>
+                        <a:ea typeface="Calibri"/>
+                        <a:cs typeface="Times New Roman"/>
                       </a:endParaRPr>
                     </a:p>
                   </a:txBody>
@@ -14088,9 +14145,9 @@
                             <a:srgbClr val="000000"/>
                           </a:solidFill>
                           <a:effectLst/>
-                          <a:latin typeface="Calibri" panose="020F0502020204030204" pitchFamily="34" charset="0"/>
-                          <a:ea typeface="Calibri" panose="020F0502020204030204" pitchFamily="34" charset="0"/>
-                          <a:cs typeface="Times New Roman" panose="02020603050405020304" pitchFamily="18" charset="0"/>
+                          <a:latin typeface="Calibri"/>
+                          <a:ea typeface="Calibri"/>
+                          <a:cs typeface="Times New Roman"/>
                         </a:rPr>
                         <a:t>ID:</a:t>
                       </a:r>
@@ -14100,17 +14157,17 @@
                             <a:srgbClr val="000000"/>
                           </a:solidFill>
                           <a:effectLst/>
-                          <a:latin typeface="Calibri" panose="020F0502020204030204" pitchFamily="34" charset="0"/>
-                          <a:ea typeface="Calibri" panose="020F0502020204030204" pitchFamily="34" charset="0"/>
-                          <a:cs typeface="Times New Roman" panose="02020603050405020304" pitchFamily="18" charset="0"/>
+                          <a:latin typeface="Calibri"/>
+                          <a:ea typeface="Calibri"/>
+                          <a:cs typeface="Times New Roman"/>
                         </a:rPr>
                         <a:t> CU01 - RESERVAR LIBRO</a:t>
                       </a:r>
                       <a:endParaRPr lang="es-ES" sz="1600" kern="100">
                         <a:effectLst/>
-                        <a:latin typeface="Calibri" panose="020F0502020204030204" pitchFamily="34" charset="0"/>
-                        <a:ea typeface="Calibri" panose="020F0502020204030204" pitchFamily="34" charset="0"/>
-                        <a:cs typeface="Times New Roman" panose="02020603050405020304" pitchFamily="18" charset="0"/>
+                        <a:latin typeface="Calibri"/>
+                        <a:ea typeface="Calibri"/>
+                        <a:cs typeface="Times New Roman"/>
                       </a:endParaRPr>
                     </a:p>
                   </a:txBody>
@@ -14189,17 +14246,17 @@
                       <a:r>
                         <a:rPr lang="es-ES" sz="1600" b="1" kern="100">
                           <a:effectLst/>
-                          <a:latin typeface="Calibri" panose="020F0502020204030204" pitchFamily="34" charset="0"/>
-                          <a:ea typeface="Calibri" panose="020F0502020204030204" pitchFamily="34" charset="0"/>
-                          <a:cs typeface="Times New Roman" panose="02020603050405020304" pitchFamily="18" charset="0"/>
+                          <a:latin typeface="Calibri"/>
+                          <a:ea typeface="Calibri"/>
+                          <a:cs typeface="Times New Roman"/>
                         </a:rPr>
                         <a:t>DESCRIPCIÓN: </a:t>
                       </a:r>
                       <a:endParaRPr lang="es-ES" sz="1600" kern="100">
                         <a:effectLst/>
-                        <a:latin typeface="Calibri" panose="020F0502020204030204" pitchFamily="34" charset="0"/>
-                        <a:ea typeface="Calibri" panose="020F0502020204030204" pitchFamily="34" charset="0"/>
-                        <a:cs typeface="Times New Roman" panose="02020603050405020304" pitchFamily="18" charset="0"/>
+                        <a:latin typeface="Calibri"/>
+                        <a:ea typeface="Calibri"/>
+                        <a:cs typeface="Times New Roman"/>
                       </a:endParaRPr>
                     </a:p>
                   </a:txBody>
@@ -14261,9 +14318,9 @@
                       <a:r>
                         <a:rPr lang="es-ES" sz="1600" kern="100">
                           <a:effectLst/>
-                          <a:latin typeface="Calibri" panose="020F0502020204030204" pitchFamily="34" charset="0"/>
-                          <a:ea typeface="Calibri" panose="020F0502020204030204" pitchFamily="34" charset="0"/>
-                          <a:cs typeface="Times New Roman" panose="02020603050405020304" pitchFamily="18" charset="0"/>
+                          <a:latin typeface="Calibri"/>
+                          <a:ea typeface="Calibri"/>
+                          <a:cs typeface="Times New Roman"/>
                         </a:rPr>
                         <a:t>Un socio desea reservar un libro utilizando su código.</a:t>
                       </a:r>
@@ -14337,17 +14394,17 @@
                             <a:srgbClr val="000000"/>
                           </a:solidFill>
                           <a:effectLst/>
-                          <a:latin typeface="Calibri" panose="020F0502020204030204" pitchFamily="34" charset="0"/>
-                          <a:ea typeface="Calibri" panose="020F0502020204030204" pitchFamily="34" charset="0"/>
-                          <a:cs typeface="Times New Roman" panose="02020603050405020304" pitchFamily="18" charset="0"/>
+                          <a:latin typeface="Calibri"/>
+                          <a:ea typeface="Calibri"/>
+                          <a:cs typeface="Times New Roman"/>
                         </a:rPr>
                         <a:t>ACTOR: </a:t>
                       </a:r>
                       <a:endParaRPr lang="es-ES" sz="1600" kern="100">
                         <a:effectLst/>
-                        <a:latin typeface="Calibri" panose="020F0502020204030204" pitchFamily="34" charset="0"/>
-                        <a:ea typeface="Calibri" panose="020F0502020204030204" pitchFamily="34" charset="0"/>
-                        <a:cs typeface="Times New Roman" panose="02020603050405020304" pitchFamily="18" charset="0"/>
+                        <a:latin typeface="Calibri"/>
+                        <a:ea typeface="Calibri"/>
+                        <a:cs typeface="Times New Roman"/>
                       </a:endParaRPr>
                     </a:p>
                   </a:txBody>
@@ -14412,17 +14469,17 @@
                             <a:srgbClr val="000000"/>
                           </a:solidFill>
                           <a:effectLst/>
-                          <a:latin typeface="Calibri" panose="020F0502020204030204" pitchFamily="34" charset="0"/>
-                          <a:ea typeface="Calibri" panose="020F0502020204030204" pitchFamily="34" charset="0"/>
-                          <a:cs typeface="Times New Roman" panose="02020603050405020304" pitchFamily="18" charset="0"/>
+                          <a:latin typeface="Calibri"/>
+                          <a:ea typeface="Calibri"/>
+                          <a:cs typeface="Times New Roman"/>
                         </a:rPr>
                         <a:t>Socio de la biblioteca</a:t>
                       </a:r>
                       <a:endParaRPr lang="es-ES" sz="1600" kern="100">
                         <a:effectLst/>
-                        <a:latin typeface="Calibri" panose="020F0502020204030204" pitchFamily="34" charset="0"/>
-                        <a:ea typeface="Calibri" panose="020F0502020204030204" pitchFamily="34" charset="0"/>
-                        <a:cs typeface="Times New Roman" panose="02020603050405020304" pitchFamily="18" charset="0"/>
+                        <a:latin typeface="Calibri"/>
+                        <a:ea typeface="Calibri"/>
+                        <a:cs typeface="Times New Roman"/>
                       </a:endParaRPr>
                     </a:p>
                   </a:txBody>
@@ -14491,17 +14548,17 @@
                       <a:r>
                         <a:rPr lang="es-ES" sz="1600" b="1" kern="100">
                           <a:effectLst/>
-                          <a:latin typeface="Calibri" panose="020F0502020204030204" pitchFamily="34" charset="0"/>
-                          <a:ea typeface="Calibri" panose="020F0502020204030204" pitchFamily="34" charset="0"/>
-                          <a:cs typeface="Times New Roman" panose="02020603050405020304" pitchFamily="18" charset="0"/>
+                          <a:latin typeface="Calibri"/>
+                          <a:ea typeface="Calibri"/>
+                          <a:cs typeface="Times New Roman"/>
                         </a:rPr>
                         <a:t>PRECONDICIONES:</a:t>
                       </a:r>
                       <a:endParaRPr lang="es-ES" sz="1600" kern="100">
                         <a:effectLst/>
-                        <a:latin typeface="Calibri" panose="020F0502020204030204" pitchFamily="34" charset="0"/>
-                        <a:ea typeface="Calibri" panose="020F0502020204030204" pitchFamily="34" charset="0"/>
-                        <a:cs typeface="Times New Roman" panose="02020603050405020304" pitchFamily="18" charset="0"/>
+                        <a:latin typeface="Calibri"/>
+                        <a:ea typeface="Calibri"/>
+                        <a:cs typeface="Times New Roman"/>
                       </a:endParaRPr>
                     </a:p>
                   </a:txBody>
@@ -14563,12 +14620,13 @@
                       <a:r>
                         <a:rPr lang="es-ES" sz="1600" kern="100">
                           <a:effectLst/>
-                          <a:latin typeface="Calibri" panose="020F0502020204030204" pitchFamily="34" charset="0"/>
-                          <a:ea typeface="Calibri" panose="020F0502020204030204" pitchFamily="34" charset="0"/>
-                          <a:cs typeface="Times New Roman" panose="02020603050405020304" pitchFamily="18" charset="0"/>
+                          <a:latin typeface="Calibri"/>
+                          <a:ea typeface="Calibri"/>
+                          <a:cs typeface="Times New Roman"/>
                         </a:rPr>
                         <a:t>El socio no tiene multas.</a:t>
                       </a:r>
+                      <a:endParaRPr lang="es-ES"/>
                     </a:p>
                     <a:p>
                       <a:pPr>
@@ -14582,9 +14640,9 @@
                       <a:r>
                         <a:rPr lang="es-ES" sz="1600" kern="100">
                           <a:effectLst/>
-                          <a:latin typeface="Calibri" panose="020F0502020204030204" pitchFamily="34" charset="0"/>
-                          <a:ea typeface="Calibri" panose="020F0502020204030204" pitchFamily="34" charset="0"/>
-                          <a:cs typeface="Times New Roman" panose="02020603050405020304" pitchFamily="18" charset="0"/>
+                          <a:latin typeface="Calibri"/>
+                          <a:ea typeface="Calibri"/>
+                          <a:cs typeface="Times New Roman"/>
                         </a:rPr>
                         <a:t>El libro no está en la biblioteca (otro socio lo está leyendo).</a:t>
                       </a:r>
@@ -14658,17 +14716,17 @@
                             <a:srgbClr val="000000"/>
                           </a:solidFill>
                           <a:effectLst/>
-                          <a:latin typeface="Calibri" panose="020F0502020204030204" pitchFamily="34" charset="0"/>
-                          <a:ea typeface="Calibri" panose="020F0502020204030204" pitchFamily="34" charset="0"/>
-                          <a:cs typeface="Times New Roman" panose="02020603050405020304" pitchFamily="18" charset="0"/>
+                          <a:latin typeface="Calibri"/>
+                          <a:ea typeface="Calibri"/>
+                          <a:cs typeface="Times New Roman"/>
                         </a:rPr>
                         <a:t>CURSO NORMAL:</a:t>
                       </a:r>
                       <a:endParaRPr lang="es-ES" sz="1600" kern="100">
                         <a:effectLst/>
-                        <a:latin typeface="Calibri" panose="020F0502020204030204" pitchFamily="34" charset="0"/>
-                        <a:ea typeface="Calibri" panose="020F0502020204030204" pitchFamily="34" charset="0"/>
-                        <a:cs typeface="Times New Roman" panose="02020603050405020304" pitchFamily="18" charset="0"/>
+                        <a:latin typeface="Calibri"/>
+                        <a:ea typeface="Calibri"/>
+                        <a:cs typeface="Times New Roman"/>
                       </a:endParaRPr>
                     </a:p>
                   </a:txBody>
@@ -14727,7 +14785,7 @@
                         <a:buAutoNum type="arabicPeriod"/>
                       </a:pPr>
                       <a:r>
-                        <a:rPr lang="es-ES" sz="1600" kern="100" dirty="0">
+                        <a:rPr lang="es-ES" sz="1600" kern="100">
                           <a:solidFill>
                             <a:srgbClr val="000000"/>
                           </a:solidFill>
@@ -14738,7 +14796,7 @@
                         </a:rPr>
                         <a:t>El socio proporciona el código.</a:t>
                       </a:r>
-                      <a:endParaRPr lang="es-ES" sz="1600" kern="100" dirty="0">
+                      <a:endParaRPr lang="es-ES" sz="1600" kern="100">
                         <a:effectLst/>
                         <a:latin typeface="Calibri" panose="020F0502020204030204" pitchFamily="34" charset="0"/>
                         <a:ea typeface="Calibri" panose="020F0502020204030204" pitchFamily="34" charset="0"/>
@@ -14754,22 +14812,22 @@
                         <a:buAutoNum type="arabicPeriod"/>
                       </a:pPr>
                       <a:r>
-                        <a:rPr lang="es-ES" sz="1600" kern="100" dirty="0">
+                        <a:rPr lang="es-ES" sz="1600" kern="100">
                           <a:solidFill>
                             <a:srgbClr val="000000"/>
                           </a:solidFill>
                           <a:effectLst/>
-                          <a:latin typeface="Calibri" panose="020F0502020204030204" pitchFamily="34" charset="0"/>
-                          <a:ea typeface="Calibri" panose="020F0502020204030204" pitchFamily="34" charset="0"/>
-                          <a:cs typeface="Times New Roman" panose="02020603050405020304" pitchFamily="18" charset="0"/>
+                          <a:latin typeface="Calibri"/>
+                          <a:ea typeface="Calibri"/>
+                          <a:cs typeface="Times New Roman"/>
                         </a:rPr>
                         <a:t>El sistema comprueba que el código existe.</a:t>
                       </a:r>
-                      <a:endParaRPr lang="es-ES" sz="1600" kern="100" dirty="0">
+                      <a:endParaRPr lang="es-ES" sz="1600" kern="100">
                         <a:effectLst/>
-                        <a:latin typeface="Calibri" panose="020F0502020204030204" pitchFamily="34" charset="0"/>
-                        <a:ea typeface="Calibri" panose="020F0502020204030204" pitchFamily="34" charset="0"/>
-                        <a:cs typeface="Times New Roman" panose="02020603050405020304" pitchFamily="18" charset="0"/>
+                        <a:latin typeface="Calibri"/>
+                        <a:ea typeface="Calibri"/>
+                        <a:cs typeface="Times New Roman"/>
                       </a:endParaRPr>
                     </a:p>
                     <a:p>
@@ -14784,7 +14842,7 @@
                         <a:buAutoNum type="arabicPeriod"/>
                       </a:pPr>
                       <a:r>
-                        <a:rPr lang="es-ES" sz="1600" kern="100" dirty="0">
+                        <a:rPr lang="es-ES" sz="1600" kern="100">
                           <a:solidFill>
                             <a:srgbClr val="000000"/>
                           </a:solidFill>
@@ -14795,7 +14853,7 @@
                         </a:rPr>
                         <a:t>El sistema reserva el libro.</a:t>
                       </a:r>
-                      <a:endParaRPr lang="es-ES" sz="1600" kern="100" dirty="0">
+                      <a:endParaRPr lang="es-ES" sz="1600" kern="100">
                         <a:effectLst/>
                         <a:latin typeface="Calibri" panose="020F0502020204030204" pitchFamily="34" charset="0"/>
                         <a:ea typeface="Calibri" panose="020F0502020204030204" pitchFamily="34" charset="0"/>
@@ -14868,17 +14926,17 @@
                       <a:r>
                         <a:rPr lang="es-ES" sz="1600" b="1" kern="100">
                           <a:effectLst/>
-                          <a:latin typeface="Calibri" panose="020F0502020204030204" pitchFamily="34" charset="0"/>
-                          <a:ea typeface="Calibri" panose="020F0502020204030204" pitchFamily="34" charset="0"/>
-                          <a:cs typeface="Times New Roman" panose="02020603050405020304" pitchFamily="18" charset="0"/>
+                          <a:latin typeface="Calibri"/>
+                          <a:ea typeface="Calibri"/>
+                          <a:cs typeface="Times New Roman"/>
                         </a:rPr>
                         <a:t>POSTCONDICIÓNES:</a:t>
                       </a:r>
                       <a:endParaRPr lang="es-ES" sz="1600" kern="100">
                         <a:effectLst/>
-                        <a:latin typeface="Calibri" panose="020F0502020204030204" pitchFamily="34" charset="0"/>
-                        <a:ea typeface="Calibri" panose="020F0502020204030204" pitchFamily="34" charset="0"/>
-                        <a:cs typeface="Times New Roman" panose="02020603050405020304" pitchFamily="18" charset="0"/>
+                        <a:latin typeface="Calibri"/>
+                        <a:ea typeface="Calibri"/>
+                        <a:cs typeface="Times New Roman"/>
                       </a:endParaRPr>
                     </a:p>
                   </a:txBody>
@@ -14940,26 +14998,26 @@
                       <a:r>
                         <a:rPr lang="es-ES" sz="1600" kern="100">
                           <a:effectLst/>
-                          <a:latin typeface="Calibri" panose="020F0502020204030204" pitchFamily="34" charset="0"/>
-                          <a:ea typeface="Calibri" panose="020F0502020204030204" pitchFamily="34" charset="0"/>
-                          <a:cs typeface="Times New Roman" panose="02020603050405020304" pitchFamily="18" charset="0"/>
+                          <a:latin typeface="Calibri"/>
+                          <a:ea typeface="Calibri"/>
+                          <a:cs typeface="Times New Roman"/>
                         </a:rPr>
                         <a:t> El libro no</a:t>
                       </a:r>
                       <a:r>
                         <a:rPr lang="es-ES" sz="1600" kern="100" baseline="0">
                           <a:effectLst/>
-                          <a:latin typeface="Calibri" panose="020F0502020204030204" pitchFamily="34" charset="0"/>
-                          <a:ea typeface="Calibri" panose="020F0502020204030204" pitchFamily="34" charset="0"/>
-                          <a:cs typeface="Times New Roman" panose="02020603050405020304" pitchFamily="18" charset="0"/>
+                          <a:latin typeface="Calibri"/>
+                          <a:ea typeface="Calibri"/>
+                          <a:cs typeface="Times New Roman"/>
                         </a:rPr>
                         <a:t> podrá ser reservado por otro socio.</a:t>
                       </a:r>
                       <a:endParaRPr lang="es-ES" sz="1600" kern="100">
                         <a:effectLst/>
-                        <a:latin typeface="Calibri" panose="020F0502020204030204" pitchFamily="34" charset="0"/>
-                        <a:ea typeface="Calibri" panose="020F0502020204030204" pitchFamily="34" charset="0"/>
-                        <a:cs typeface="Times New Roman" panose="02020603050405020304" pitchFamily="18" charset="0"/>
+                        <a:latin typeface="Calibri"/>
+                        <a:ea typeface="Calibri"/>
+                        <a:cs typeface="Times New Roman"/>
                       </a:endParaRPr>
                     </a:p>
                   </a:txBody>
@@ -15026,47 +15084,17 @@
                         </a:spcAft>
                       </a:pPr>
                       <a:r>
-                        <a:rPr lang="es-ES" sz="1600" b="1" kern="100">
+                        <a:rPr lang="es-ES" sz="1600" b="1" i="0" kern="100">
                           <a:solidFill>
-                            <a:srgbClr val="000000"/>
+                            <a:schemeClr val="tx1"/>
                           </a:solidFill>
                           <a:effectLst/>
-                          <a:latin typeface="Calibri" panose="020F0502020204030204" pitchFamily="34" charset="0"/>
-                          <a:ea typeface="Calibri" panose="020F0502020204030204" pitchFamily="34" charset="0"/>
-                          <a:cs typeface="Times New Roman" panose="02020603050405020304" pitchFamily="18" charset="0"/>
+                          <a:latin typeface="Calibri"/>
+                          <a:ea typeface="Calibri"/>
+                          <a:cs typeface="Times New Roman"/>
                         </a:rPr>
-                        <a:t>ALTERNATIVA 1: </a:t>
+                        <a:t>ALTERNATIVA 1: código incorrecto       </a:t>
                       </a:r>
-                      <a:r>
-                        <a:rPr lang="es-ES" sz="1600" i="1" kern="100">
-                          <a:solidFill>
-                            <a:srgbClr val="000000"/>
-                          </a:solidFill>
-                          <a:effectLst/>
-                          <a:latin typeface="Calibri" panose="020F0502020204030204" pitchFamily="34" charset="0"/>
-                          <a:ea typeface="Calibri" panose="020F0502020204030204" pitchFamily="34" charset="0"/>
-                          <a:cs typeface="Times New Roman" panose="02020603050405020304" pitchFamily="18" charset="0"/>
-                        </a:rPr>
-                        <a:t>código incorrecto</a:t>
-                      </a:r>
-                      <a:r>
-                        <a:rPr lang="es-ES" sz="1600" b="1" kern="100">
-                          <a:solidFill>
-                            <a:srgbClr val="000000"/>
-                          </a:solidFill>
-                          <a:effectLst/>
-                          <a:latin typeface="Calibri" panose="020F0502020204030204" pitchFamily="34" charset="0"/>
-                          <a:ea typeface="Calibri" panose="020F0502020204030204" pitchFamily="34" charset="0"/>
-                          <a:cs typeface="Times New Roman" panose="02020603050405020304" pitchFamily="18" charset="0"/>
-                        </a:rPr>
-                        <a:t>       </a:t>
-                      </a:r>
-                      <a:endParaRPr lang="es-ES" sz="1600" kern="100">
-                        <a:effectLst/>
-                        <a:latin typeface="Calibri" panose="020F0502020204030204" pitchFamily="34" charset="0"/>
-                        <a:ea typeface="Calibri" panose="020F0502020204030204" pitchFamily="34" charset="0"/>
-                        <a:cs typeface="Times New Roman" panose="02020603050405020304" pitchFamily="18" charset="0"/>
-                      </a:endParaRPr>
                     </a:p>
                   </a:txBody>
                   <a:tcPr marL="68580" marR="68580" marT="0" marB="0">
@@ -15125,23 +15153,17 @@
                         </a:spcAft>
                       </a:pPr>
                       <a:r>
-                        <a:rPr lang="es-ES" sz="1600" kern="100" dirty="0">
+                        <a:rPr lang="es-ES" sz="1600" b="0" i="0" kern="100">
                           <a:solidFill>
-                            <a:srgbClr val="000000"/>
+                            <a:schemeClr val="tx1"/>
                           </a:solidFill>
                           <a:effectLst/>
-                          <a:latin typeface="Calibri" panose="020F0502020204030204" pitchFamily="34" charset="0"/>
-                          <a:ea typeface="Calibri" panose="020F0502020204030204" pitchFamily="34" charset="0"/>
-                          <a:cs typeface="Times New Roman" panose="02020603050405020304" pitchFamily="18" charset="0"/>
+                          <a:latin typeface="Calibri"/>
+                          <a:ea typeface="Calibri"/>
+                          <a:cs typeface="Times New Roman"/>
                         </a:rPr>
                         <a:t>3b.  El sistema indica que el código es incorrecto.</a:t>
                       </a:r>
-                      <a:endParaRPr lang="es-ES" sz="1600" kern="100" dirty="0">
-                        <a:effectLst/>
-                        <a:latin typeface="Calibri" panose="020F0502020204030204" pitchFamily="34" charset="0"/>
-                        <a:ea typeface="Calibri" panose="020F0502020204030204" pitchFamily="34" charset="0"/>
-                        <a:cs typeface="Times New Roman" panose="02020603050405020304" pitchFamily="18" charset="0"/>
-                      </a:endParaRPr>
                     </a:p>
                     <a:p>
                       <a:pPr>
@@ -15153,23 +15175,17 @@
                         </a:spcAft>
                       </a:pPr>
                       <a:r>
-                        <a:rPr lang="es-ES" sz="1600" kern="100" dirty="0">
+                        <a:rPr lang="es-ES" sz="1600" b="0" i="0" kern="100">
                           <a:solidFill>
-                            <a:srgbClr val="000000"/>
+                            <a:schemeClr val="tx1"/>
                           </a:solidFill>
                           <a:effectLst/>
-                          <a:latin typeface="Calibri" panose="020F0502020204030204" pitchFamily="34" charset="0"/>
-                          <a:ea typeface="Calibri" panose="020F0502020204030204" pitchFamily="34" charset="0"/>
-                          <a:cs typeface="Times New Roman" panose="02020603050405020304" pitchFamily="18" charset="0"/>
+                          <a:latin typeface="Calibri"/>
+                          <a:ea typeface="Calibri"/>
+                          <a:cs typeface="Times New Roman"/>
                         </a:rPr>
-                        <a:t>Retorno a 1.</a:t>
+                        <a:t>Retorno a 1. (NO TENER EN CUENTA PARA LA TAREA DE LOS DIAGRAMAS DE SECUENCIA)</a:t>
                       </a:r>
-                      <a:endParaRPr lang="es-ES" sz="1600" kern="100" dirty="0">
-                        <a:effectLst/>
-                        <a:latin typeface="Calibri" panose="020F0502020204030204" pitchFamily="34" charset="0"/>
-                        <a:ea typeface="Calibri" panose="020F0502020204030204" pitchFamily="34" charset="0"/>
-                        <a:cs typeface="Times New Roman" panose="02020603050405020304" pitchFamily="18" charset="0"/>
-                      </a:endParaRPr>
                     </a:p>
                   </a:txBody>
                   <a:tcPr marL="68580" marR="68580" marT="0" marB="0">
@@ -15277,9 +15293,9 @@
         </p:nvGrpSpPr>
         <p:grpSpPr>
           <a:xfrm>
-            <a:off x="7042419" y="1132470"/>
+            <a:off x="6945372" y="1859672"/>
             <a:ext cx="2031690" cy="1641330"/>
-            <a:chOff x="7042419" y="1132470"/>
+            <a:chOff x="7042418" y="1132470"/>
             <a:chExt cx="2031690" cy="1641330"/>
           </a:xfrm>
         </p:grpSpPr>
@@ -15304,7 +15320,7 @@
           </p:blipFill>
           <p:spPr>
             <a:xfrm>
-              <a:off x="7042419" y="1132470"/>
+              <a:off x="7042418" y="1132470"/>
               <a:ext cx="2031690" cy="1641330"/>
             </a:xfrm>
             <a:prstGeom prst="rect">
@@ -15451,7 +15467,7 @@
           <a:p>
             <a:pPr lvl="1" indent="-342900"/>
             <a:r>
-              <a:rPr lang="es-ES" sz="1800" b="1" dirty="0">
+              <a:rPr lang="es-ES" sz="1800" b="1">
                 <a:solidFill>
                   <a:schemeClr val="tx2"/>
                 </a:solidFill>
@@ -15463,7 +15479,7 @@
             </a:r>
           </a:p>
           <a:p>
-            <a:endParaRPr lang="es-ES" dirty="0"/>
+            <a:endParaRPr lang="es-ES"/>
           </a:p>
         </p:txBody>
       </p:sp>
@@ -15493,7 +15509,7 @@
               <a:buAutoNum type="arabicPeriod" startAt="3"/>
             </a:pPr>
             <a:r>
-              <a:rPr lang="es-ES" dirty="0"/>
+              <a:rPr lang="es-ES"/>
               <a:t>Documentación de casos de uso</a:t>
             </a:r>
           </a:p>
@@ -15540,7 +15556,7 @@
               <a:defRPr/>
             </a:pPr>
             <a:r>
-              <a:rPr lang="es-ES" sz="1800" b="1" kern="1200" dirty="0">
+              <a:rPr lang="es-ES" sz="1800" b="1" kern="1200">
                 <a:solidFill>
                   <a:schemeClr val="accent2">
                     <a:lumMod val="50000"/>
@@ -15554,7 +15570,7 @@
               <a:t>3.2 </a:t>
             </a:r>
             <a:r>
-              <a:rPr lang="es-ES" sz="1800" kern="1200" dirty="0">
+              <a:rPr lang="es-ES" sz="1800" kern="1200">
                 <a:solidFill>
                   <a:schemeClr val="accent2">
                     <a:lumMod val="50000"/>
@@ -15567,12 +15583,12 @@
               </a:rPr>
               <a:t>Ejemplo Biblioteca:</a:t>
             </a:r>
-            <a:endParaRPr lang="es-ES" sz="1800" dirty="0">
+            <a:endParaRPr lang="es-ES" sz="1800">
               <a:effectLst/>
             </a:endParaRPr>
           </a:p>
           <a:p>
-            <a:endParaRPr lang="es-ES" dirty="0"/>
+            <a:endParaRPr lang="es-ES"/>
           </a:p>
         </p:txBody>
       </p:sp>
@@ -15635,7 +15651,7 @@
           <a:lstStyle/>
           <a:p>
             <a:r>
-              <a:rPr lang="es-ES" dirty="0">
+              <a:rPr lang="es-ES">
                 <a:solidFill>
                   <a:srgbClr val="FF0000"/>
                 </a:solidFill>
@@ -15674,7 +15690,7 @@
           <a:lstStyle/>
           <a:p>
             <a:r>
-              <a:rPr lang="es-ES" dirty="0">
+              <a:rPr lang="es-ES">
                 <a:solidFill>
                   <a:srgbClr val="FF0000"/>
                 </a:solidFill>
@@ -15741,27 +15757,27 @@
           <a:lstStyle/>
           <a:p>
             <a:r>
-              <a:rPr lang="es-ES" dirty="0"/>
+              <a:rPr lang="es-ES"/>
               <a:t>Análisis:</a:t>
             </a:r>
           </a:p>
           <a:p>
             <a:pPr lvl="1"/>
             <a:r>
-              <a:rPr lang="es-ES" dirty="0"/>
+              <a:rPr lang="es-ES"/>
               <a:t>Diagramas de casos de uso</a:t>
             </a:r>
           </a:p>
           <a:p>
             <a:r>
-              <a:rPr lang="es-ES" dirty="0"/>
+              <a:rPr lang="es-ES"/>
               <a:t>Diseño</a:t>
             </a:r>
           </a:p>
           <a:p>
             <a:pPr lvl="1"/>
             <a:r>
-              <a:rPr lang="es-ES" dirty="0">
+              <a:rPr lang="es-ES">
                 <a:solidFill>
                   <a:schemeClr val="bg2">
                     <a:lumMod val="50000"/>
@@ -15774,7 +15790,7 @@
           <a:p>
             <a:pPr lvl="1"/>
             <a:r>
-              <a:rPr lang="es-ES" dirty="0">
+              <a:rPr lang="es-ES">
                 <a:solidFill>
                   <a:schemeClr val="bg2">
                     <a:lumMod val="50000"/>
@@ -15812,7 +15828,7 @@
               <a:buNone/>
             </a:pPr>
             <a:r>
-              <a:rPr lang="es-ES" dirty="0"/>
+              <a:rPr lang="es-ES"/>
               <a:t>1. INTRODUCCIÓN</a:t>
             </a:r>
           </a:p>
@@ -15859,7 +15875,7 @@
               <a:defRPr/>
             </a:pPr>
             <a:r>
-              <a:rPr lang="es-ES" sz="1800" kern="1200" dirty="0">
+              <a:rPr lang="es-ES" sz="1800" kern="1200">
                 <a:solidFill>
                   <a:schemeClr val="accent2">
                     <a:lumMod val="50000"/>
@@ -15873,10 +15889,10 @@
               <a:t>(De la UT 2: Desarrollo de software)</a:t>
             </a:r>
             <a:r>
-              <a:rPr lang="es-ES" dirty="0"/>
+              <a:rPr lang="es-ES"/>
               <a:t> SE UTILIZAN DIAGRAMAS</a:t>
             </a:r>
-            <a:endParaRPr lang="es-ES" baseline="0" dirty="0"/>
+            <a:endParaRPr lang="es-ES" baseline="0"/>
           </a:p>
         </p:txBody>
       </p:sp>
@@ -15992,7 +16008,7 @@
           <a:p>
             <a:pPr lvl="0" indent="-342900"/>
             <a:r>
-              <a:rPr lang="es-ES" sz="2000" b="1" dirty="0">
+              <a:rPr lang="es-ES" sz="2000" b="1">
                 <a:solidFill>
                   <a:schemeClr val="tx2"/>
                 </a:solidFill>
@@ -16004,7 +16020,7 @@
             </a:r>
           </a:p>
           <a:p>
-            <a:endParaRPr lang="es-ES" dirty="0"/>
+            <a:endParaRPr lang="es-ES"/>
           </a:p>
         </p:txBody>
       </p:sp>
@@ -16034,7 +16050,7 @@
               <a:buAutoNum type="arabicPeriod" startAt="3"/>
             </a:pPr>
             <a:r>
-              <a:rPr lang="es-ES" dirty="0"/>
+              <a:rPr lang="es-ES"/>
               <a:t>Documentación de casos de uso</a:t>
             </a:r>
           </a:p>
@@ -16081,7 +16097,7 @@
               <a:defRPr/>
             </a:pPr>
             <a:r>
-              <a:rPr lang="es-ES" sz="1800" b="1" kern="1200" dirty="0">
+              <a:rPr lang="es-ES" sz="1800" b="1" kern="1200">
                 <a:solidFill>
                   <a:schemeClr val="accent2">
                     <a:lumMod val="50000"/>
@@ -16095,7 +16111,7 @@
               <a:t>3.2 </a:t>
             </a:r>
             <a:r>
-              <a:rPr lang="es-ES" sz="1800" kern="1200" dirty="0">
+              <a:rPr lang="es-ES" sz="1800" kern="1200">
                 <a:solidFill>
                   <a:schemeClr val="accent2">
                     <a:lumMod val="50000"/>
@@ -16108,7 +16124,7 @@
               </a:rPr>
               <a:t>Ejemplo Biblioteca:</a:t>
             </a:r>
-            <a:endParaRPr lang="es-ES" dirty="0"/>
+            <a:endParaRPr lang="es-ES"/>
           </a:p>
         </p:txBody>
       </p:sp>
@@ -16156,7 +16172,7 @@
         </p:nvGrpSpPr>
         <p:grpSpPr>
           <a:xfrm>
-            <a:off x="6959749" y="1419006"/>
+            <a:off x="6948705" y="1518397"/>
             <a:ext cx="2031690" cy="1641330"/>
             <a:chOff x="6959749" y="1419006"/>
             <a:chExt cx="2031690" cy="1641330"/>
@@ -16325,7 +16341,7 @@
           <a:p>
             <a:pPr lvl="0" indent="-342900"/>
             <a:r>
-              <a:rPr lang="es-ES" sz="2000" b="1" dirty="0">
+              <a:rPr lang="es-ES" sz="2000" b="1">
                 <a:solidFill>
                   <a:schemeClr val="tx2"/>
                 </a:solidFill>
@@ -16337,7 +16353,7 @@
             </a:r>
           </a:p>
           <a:p>
-            <a:endParaRPr lang="es-ES" dirty="0"/>
+            <a:endParaRPr lang="es-ES"/>
           </a:p>
         </p:txBody>
       </p:sp>
@@ -16367,7 +16383,7 @@
               <a:buAutoNum type="arabicPeriod" startAt="3"/>
             </a:pPr>
             <a:r>
-              <a:rPr lang="es-ES" dirty="0"/>
+              <a:rPr lang="es-ES"/>
               <a:t>Documentación de casos de uso</a:t>
             </a:r>
           </a:p>
@@ -16414,7 +16430,7 @@
               <a:defRPr/>
             </a:pPr>
             <a:r>
-              <a:rPr lang="es-ES" sz="1800" b="1" kern="1200" dirty="0">
+              <a:rPr lang="es-ES" sz="1800" b="1" kern="1200">
                 <a:solidFill>
                   <a:schemeClr val="accent2">
                     <a:lumMod val="50000"/>
@@ -16428,7 +16444,7 @@
               <a:t>3.2 </a:t>
             </a:r>
             <a:r>
-              <a:rPr lang="es-ES" sz="1800" kern="1200" dirty="0">
+              <a:rPr lang="es-ES" sz="1800" kern="1200">
                 <a:solidFill>
                   <a:schemeClr val="accent2">
                     <a:lumMod val="50000"/>
@@ -16441,7 +16457,7 @@
               </a:rPr>
               <a:t>Ejemplo Biblioteca:</a:t>
             </a:r>
-            <a:endParaRPr lang="es-ES" dirty="0"/>
+            <a:endParaRPr lang="es-ES"/>
           </a:p>
         </p:txBody>
       </p:sp>
@@ -16672,7 +16688,7 @@
           </a:p>
           <a:p>
             <a:r>
-              <a:rPr lang="es-ES" i="1" dirty="0">
+              <a:rPr lang="es-ES" i="1">
                 <a:solidFill>
                   <a:schemeClr val="tx2"/>
                 </a:solidFill>
@@ -16683,7 +16699,7 @@
               <a:t>Se </a:t>
             </a:r>
             <a:r>
-              <a:rPr lang="es-ES" b="1" i="1" dirty="0">
+              <a:rPr lang="es-ES" b="1" i="1">
                 <a:solidFill>
                   <a:schemeClr val="tx2"/>
                 </a:solidFill>
@@ -16694,7 +16710,7 @@
               <a:t>puede </a:t>
             </a:r>
             <a:r>
-              <a:rPr lang="es-ES" i="1" dirty="0">
+              <a:rPr lang="es-ES" i="1">
                 <a:solidFill>
                   <a:schemeClr val="tx2"/>
                 </a:solidFill>
@@ -16707,7 +16723,7 @@
           </a:p>
           <a:p>
             <a:r>
-              <a:rPr lang="es-ES" i="1" dirty="0">
+              <a:rPr lang="es-ES" i="1">
                 <a:solidFill>
                   <a:schemeClr val="tx2"/>
                 </a:solidFill>
@@ -16720,7 +16736,7 @@
           </a:p>
           <a:p>
             <a:pPr lvl="0"/>
-            <a:endParaRPr lang="es-ES" dirty="0"/>
+            <a:endParaRPr lang="es-ES"/>
           </a:p>
         </p:txBody>
       </p:sp>
@@ -16750,14 +16766,14 @@
               <a:buAutoNum type="arabicPeriod" startAt="4"/>
             </a:pPr>
             <a:r>
-              <a:rPr lang="es-ES" dirty="0"/>
+              <a:rPr lang="es-ES"/>
               <a:t>ED6b0302  Práctica:</a:t>
             </a:r>
             <a:r>
-              <a:rPr lang="es-ES" baseline="0" dirty="0"/>
+              <a:rPr lang="es-ES" baseline="0"/>
               <a:t> residencia de estudiantes</a:t>
             </a:r>
-            <a:endParaRPr lang="es-ES" dirty="0"/>
+            <a:endParaRPr lang="es-ES"/>
           </a:p>
         </p:txBody>
       </p:sp>
@@ -16902,57 +16918,57 @@
           <a:lstStyle/>
           <a:p>
             <a:r>
-              <a:rPr lang="es-ES" dirty="0"/>
+              <a:rPr lang="es-ES"/>
               <a:t>Diagramas de casos de uso </a:t>
             </a:r>
             <a:r>
-              <a:rPr lang="es-ES" dirty="0">
+              <a:rPr lang="es-ES">
                 <a:hlinkClick r:id="rId2"/>
               </a:rPr>
               <a:t>UPV</a:t>
             </a:r>
-            <a:endParaRPr lang="es-ES" dirty="0"/>
-          </a:p>
-          <a:p>
-            <a:r>
-              <a:rPr lang="es-ES" dirty="0"/>
+            <a:endParaRPr lang="es-ES"/>
+          </a:p>
+          <a:p>
+            <a:r>
+              <a:rPr lang="es-ES"/>
               <a:t>UML Lucid </a:t>
             </a:r>
             <a:r>
-              <a:rPr lang="es-ES" dirty="0">
+              <a:rPr lang="es-ES">
                 <a:hlinkClick r:id="rId3"/>
               </a:rPr>
               <a:t>Software</a:t>
             </a:r>
             <a:r>
-              <a:rPr lang="es-ES" dirty="0"/>
+              <a:rPr lang="es-ES"/>
               <a:t> explica inclusión y extensión</a:t>
             </a:r>
           </a:p>
           <a:p>
             <a:r>
-              <a:rPr lang="es-ES" dirty="0">
+              <a:rPr lang="es-ES">
                 <a:hlinkClick r:id="rId4"/>
               </a:rPr>
               <a:t>Apuntes</a:t>
             </a:r>
             <a:r>
-              <a:rPr lang="es-ES" dirty="0"/>
+              <a:rPr lang="es-ES"/>
               <a:t> Luis del Moral</a:t>
             </a:r>
           </a:p>
           <a:p>
             <a:r>
-              <a:rPr lang="es-ES" dirty="0"/>
+              <a:rPr lang="es-ES"/>
               <a:t>Herramienta </a:t>
             </a:r>
             <a:r>
-              <a:rPr lang="es-ES" dirty="0">
+              <a:rPr lang="es-ES">
                 <a:hlinkClick r:id="rId5"/>
               </a:rPr>
               <a:t>Draw.io</a:t>
             </a:r>
-            <a:endParaRPr lang="es-ES" dirty="0"/>
+            <a:endParaRPr lang="es-ES"/>
           </a:p>
         </p:txBody>
       </p:sp>
@@ -16982,15 +16998,15 @@
               <a:buNone/>
             </a:pPr>
             <a:r>
-              <a:rPr lang="es-ES" dirty="0"/>
+              <a:rPr lang="es-ES"/>
               <a:t>9.</a:t>
             </a:r>
             <a:r>
-              <a:rPr lang="es-ES" baseline="0" dirty="0"/>
+              <a:rPr lang="es-ES" baseline="0"/>
               <a:t> </a:t>
             </a:r>
             <a:r>
-              <a:rPr lang="es-ES" dirty="0"/>
+              <a:rPr lang="es-ES"/>
               <a:t>Bibliografía y recursos</a:t>
             </a:r>
           </a:p>
@@ -17077,7 +17093,7 @@
           <a:lstStyle/>
           <a:p>
             <a:r>
-              <a:rPr lang="es-ES" dirty="0"/>
+              <a:rPr lang="es-ES"/>
               <a:t>Diagrama de casos de uso</a:t>
             </a:r>
           </a:p>
@@ -17105,7 +17121,7 @@
           <a:lstStyle/>
           <a:p>
             <a:r>
-              <a:rPr lang="es-ES" dirty="0"/>
+              <a:rPr lang="es-ES"/>
               <a:t>Tipos</a:t>
             </a:r>
           </a:p>
@@ -17170,7 +17186,7 @@
           <a:p>
             <a:pPr algn="ctr"/>
             <a:r>
-              <a:rPr lang="es-ES" sz="4000" b="0" cap="none" spc="0" dirty="0">
+              <a:rPr lang="es-ES" sz="4000" b="0" cap="none" spc="0">
                 <a:ln w="0"/>
                 <a:gradFill>
                   <a:gsLst>
@@ -17281,7 +17297,7 @@
           <a:lstStyle/>
           <a:p>
             <a:r>
-              <a:rPr lang="es-ES" dirty="0"/>
+              <a:rPr lang="es-ES"/>
               <a:t>Diagrama de secuencia</a:t>
             </a:r>
           </a:p>
@@ -17309,7 +17325,7 @@
           <a:lstStyle/>
           <a:p>
             <a:r>
-              <a:rPr lang="es-ES" dirty="0"/>
+              <a:rPr lang="es-ES"/>
               <a:t>Tipos</a:t>
             </a:r>
           </a:p>
@@ -17375,7 +17391,7 @@
           <a:p>
             <a:pPr algn="ctr"/>
             <a:r>
-              <a:rPr lang="es-ES" sz="2000" b="0" cap="none" spc="0" dirty="0">
+              <a:rPr lang="es-ES" sz="2000" b="0" cap="none" spc="0">
                 <a:ln w="0"/>
                 <a:gradFill>
                   <a:gsLst>
@@ -17492,7 +17508,7 @@
           <a:lstStyle/>
           <a:p>
             <a:r>
-              <a:rPr lang="es-ES" dirty="0"/>
+              <a:rPr lang="es-ES"/>
               <a:t>Diagrama de estado</a:t>
             </a:r>
           </a:p>
@@ -17520,7 +17536,7 @@
           <a:lstStyle/>
           <a:p>
             <a:r>
-              <a:rPr lang="es-ES" dirty="0"/>
+              <a:rPr lang="es-ES"/>
               <a:t>Tipos</a:t>
             </a:r>
           </a:p>
@@ -17586,7 +17602,7 @@
           <a:p>
             <a:pPr algn="ctr"/>
             <a:r>
-              <a:rPr lang="es-ES" sz="2000" b="0" cap="none" spc="0" dirty="0">
+              <a:rPr lang="es-ES" sz="2000" b="0" cap="none" spc="0">
                 <a:ln w="0"/>
                 <a:gradFill>
                   <a:gsLst>
@@ -17733,7 +17749,7 @@
           <a:lstStyle/>
           <a:p>
             <a:r>
-              <a:rPr lang="es-ES" dirty="0"/>
+              <a:rPr lang="es-ES"/>
               <a:t>Diagrama de actividad</a:t>
             </a:r>
           </a:p>
@@ -17761,7 +17777,7 @@
           <a:lstStyle/>
           <a:p>
             <a:r>
-              <a:rPr lang="es-ES" dirty="0"/>
+              <a:rPr lang="es-ES"/>
               <a:t>Tipos</a:t>
             </a:r>
           </a:p>
@@ -17797,7 +17813,7 @@
           <a:p>
             <a:pPr algn="ctr"/>
             <a:r>
-              <a:rPr lang="es-ES" sz="2000" b="0" cap="none" spc="0" dirty="0">
+              <a:rPr lang="es-ES" sz="2000" b="0" cap="none" spc="0">
                 <a:ln w="0"/>
                 <a:gradFill>
                   <a:gsLst>
@@ -17914,7 +17930,7 @@
           <a:p>
             <a:pPr rtl="0" eaLnBrk="1" latinLnBrk="0" hangingPunct="1"/>
             <a:r>
-              <a:rPr lang="es-ES" sz="1800" kern="1200" dirty="0">
+              <a:rPr lang="es-ES" sz="1800" kern="1200">
                 <a:solidFill>
                   <a:schemeClr val="accent6"/>
                 </a:solidFill>
@@ -17926,7 +17942,7 @@
               <a:t>Permiten especificar </a:t>
             </a:r>
             <a:r>
-              <a:rPr lang="es-ES" sz="1800" b="1" kern="1200" dirty="0">
+              <a:rPr lang="es-ES" sz="1800" b="1" kern="1200">
                 <a:solidFill>
                   <a:schemeClr val="accent6"/>
                 </a:solidFill>
@@ -17937,7 +17953,7 @@
               </a:rPr>
               <a:t>cómo interactúa el usuario con el sistema</a:t>
             </a:r>
-            <a:endParaRPr lang="es-ES" sz="1800" dirty="0">
+            <a:endParaRPr lang="es-ES" sz="1800">
               <a:solidFill>
                 <a:schemeClr val="accent6"/>
               </a:solidFill>
@@ -17947,7 +17963,7 @@
           <a:p>
             <a:pPr rtl="0" eaLnBrk="1" latinLnBrk="0" hangingPunct="1"/>
             <a:r>
-              <a:rPr lang="es-ES" sz="1800" kern="1200" dirty="0">
+              <a:rPr lang="es-ES" sz="1800" kern="1200">
                 <a:solidFill>
                   <a:schemeClr val="accent6"/>
                 </a:solidFill>
@@ -17959,7 +17975,7 @@
               <a:t>En estos diagramas se muestra la </a:t>
             </a:r>
             <a:r>
-              <a:rPr lang="es-ES" sz="1800" b="1" kern="1200" dirty="0">
+              <a:rPr lang="es-ES" sz="1800" b="1" kern="1200">
                 <a:solidFill>
                   <a:schemeClr val="accent6"/>
                 </a:solidFill>
@@ -17971,7 +17987,7 @@
               <a:t>interacción </a:t>
             </a:r>
             <a:r>
-              <a:rPr lang="es-ES" sz="1800" kern="1200" dirty="0">
+              <a:rPr lang="es-ES" sz="1800" kern="1200">
                 <a:solidFill>
                   <a:schemeClr val="accent6"/>
                 </a:solidFill>
@@ -17983,7 +17999,7 @@
               <a:t>entre el </a:t>
             </a:r>
             <a:r>
-              <a:rPr lang="es-ES" sz="1800" b="1" kern="1200" dirty="0">
+              <a:rPr lang="es-ES" sz="1800" b="1" kern="1200">
                 <a:solidFill>
                   <a:schemeClr val="accent6"/>
                 </a:solidFill>
@@ -17995,7 +18011,7 @@
               <a:t>sistema </a:t>
             </a:r>
             <a:r>
-              <a:rPr lang="es-ES" sz="1800" kern="1200" dirty="0">
+              <a:rPr lang="es-ES" sz="1800" kern="1200">
                 <a:solidFill>
                   <a:schemeClr val="accent6"/>
                 </a:solidFill>
@@ -18007,7 +18023,7 @@
               <a:t>y el </a:t>
             </a:r>
             <a:r>
-              <a:rPr lang="es-ES" sz="1800" b="1" kern="1200" dirty="0">
+              <a:rPr lang="es-ES" sz="1800" b="1" kern="1200">
                 <a:solidFill>
                   <a:schemeClr val="accent6"/>
                 </a:solidFill>
@@ -18019,7 +18035,7 @@
               <a:t>mundo exterior </a:t>
             </a:r>
             <a:r>
-              <a:rPr lang="es-ES" sz="1800" kern="1200" dirty="0">
+              <a:rPr lang="es-ES" sz="1800" kern="1200">
                 <a:solidFill>
                   <a:schemeClr val="accent6"/>
                 </a:solidFill>
@@ -18030,7 +18046,7 @@
               </a:rPr>
               <a:t>(actores)</a:t>
             </a:r>
-            <a:endParaRPr lang="es-ES" dirty="0">
+            <a:endParaRPr lang="es-ES">
               <a:solidFill>
                 <a:schemeClr val="accent6"/>
               </a:solidFill>
@@ -18040,7 +18056,7 @@
           <a:p>
             <a:pPr rtl="0" eaLnBrk="1" latinLnBrk="0" hangingPunct="1"/>
             <a:r>
-              <a:rPr lang="es-ES" sz="1800" kern="1200" dirty="0">
+              <a:rPr lang="es-ES" sz="1800" kern="1200">
                 <a:solidFill>
                   <a:srgbClr val="FF0000"/>
                 </a:solidFill>
@@ -18052,7 +18068,7 @@
               <a:t>Aportan Valor para </a:t>
             </a:r>
             <a:r>
-              <a:rPr lang="es-ES" sz="1800" b="1" kern="1200" dirty="0">
+              <a:rPr lang="es-ES" sz="1800" b="1" kern="1200">
                 <a:solidFill>
                   <a:srgbClr val="FF0000"/>
                 </a:solidFill>
@@ -18064,7 +18080,7 @@
               <a:t>analista</a:t>
             </a:r>
             <a:r>
-              <a:rPr lang="es-ES" sz="1800" kern="1200" dirty="0">
+              <a:rPr lang="es-ES" sz="1800" kern="1200">
                 <a:solidFill>
                   <a:srgbClr val="FF0000"/>
                 </a:solidFill>
@@ -18076,7 +18092,7 @@
               <a:t> y </a:t>
             </a:r>
             <a:r>
-              <a:rPr lang="es-ES" sz="1800" b="1" kern="1200" dirty="0">
+              <a:rPr lang="es-ES" sz="1800" b="1" kern="1200">
                 <a:solidFill>
                   <a:srgbClr val="FF0000"/>
                 </a:solidFill>
@@ -18088,7 +18104,7 @@
               <a:t>cliente</a:t>
             </a:r>
             <a:r>
-              <a:rPr lang="es-ES" sz="1800" kern="1200" dirty="0">
+              <a:rPr lang="es-ES" sz="1800" kern="1200">
                 <a:solidFill>
                   <a:srgbClr val="FF0000"/>
                 </a:solidFill>
@@ -18100,7 +18116,7 @@
               <a:t>, </a:t>
             </a:r>
             <a:r>
-              <a:rPr lang="es-ES" sz="1800" i="1" kern="1200" dirty="0">
+              <a:rPr lang="es-ES" sz="1800" i="1" kern="1200">
                 <a:solidFill>
                   <a:srgbClr val="FF0000"/>
                 </a:solidFill>
@@ -18112,7 +18128,7 @@
               <a:t>ya que es </a:t>
             </a:r>
             <a:r>
-              <a:rPr lang="es-ES" sz="1800" b="1" i="1" kern="1200" dirty="0">
+              <a:rPr lang="es-ES" sz="1800" b="1" i="1" kern="1200">
                 <a:solidFill>
                   <a:srgbClr val="FF0000"/>
                 </a:solidFill>
@@ -18124,7 +18140,7 @@
               <a:t>comprensible</a:t>
             </a:r>
             <a:r>
-              <a:rPr lang="es-ES" sz="1800" i="1" kern="1200" dirty="0">
+              <a:rPr lang="es-ES" sz="1800" i="1" kern="1200">
                 <a:solidFill>
                   <a:srgbClr val="FF0000"/>
                 </a:solidFill>
@@ -18132,7 +18148,7 @@
               </a:rPr>
               <a:t> por ambos</a:t>
             </a:r>
-            <a:endParaRPr lang="es-ES" dirty="0">
+            <a:endParaRPr lang="es-ES">
               <a:solidFill>
                 <a:srgbClr val="FF0000"/>
               </a:solidFill>
@@ -18142,7 +18158,7 @@
           <a:p>
             <a:pPr rtl="0" eaLnBrk="1" latinLnBrk="0" hangingPunct="1"/>
             <a:r>
-              <a:rPr lang="es-ES" sz="1800" kern="1200" dirty="0">
+              <a:rPr lang="es-ES" sz="1800" kern="1200">
                 <a:solidFill>
                   <a:schemeClr val="accent6"/>
                 </a:solidFill>
@@ -18153,7 +18169,7 @@
               </a:rPr>
               <a:t>Base para las siguientes fases del proceso de desarrollo (8 fases)</a:t>
             </a:r>
-            <a:endParaRPr lang="es-ES" dirty="0">
+            <a:endParaRPr lang="es-ES">
               <a:solidFill>
                 <a:schemeClr val="accent6"/>
               </a:solidFill>
@@ -18163,7 +18179,7 @@
           <a:p>
             <a:pPr rtl="0" eaLnBrk="1" latinLnBrk="0" hangingPunct="1"/>
             <a:r>
-              <a:rPr lang="es-ES" sz="1800" kern="1200" dirty="0">
+              <a:rPr lang="es-ES" sz="1800" kern="1200">
                 <a:solidFill>
                   <a:schemeClr val="accent6"/>
                 </a:solidFill>
@@ -18175,7 +18191,7 @@
               <a:t>Las </a:t>
             </a:r>
             <a:r>
-              <a:rPr lang="es-ES" sz="1800" b="1" i="1" kern="1200" dirty="0">
+              <a:rPr lang="es-ES" sz="1800" b="1" i="1" kern="1200">
                 <a:solidFill>
                   <a:schemeClr val="accent6"/>
                 </a:solidFill>
@@ -18187,7 +18203,7 @@
               <a:t>pruebas</a:t>
             </a:r>
             <a:r>
-              <a:rPr lang="es-ES" sz="1800" kern="1200" dirty="0">
+              <a:rPr lang="es-ES" sz="1800" kern="1200">
                 <a:solidFill>
                   <a:schemeClr val="accent6"/>
                 </a:solidFill>
@@ -18198,7 +18214,7 @@
               </a:rPr>
               <a:t> funcionales se derivan de los casos de uso</a:t>
             </a:r>
-            <a:endParaRPr lang="es-ES" dirty="0">
+            <a:endParaRPr lang="es-ES">
               <a:solidFill>
                 <a:schemeClr val="accent6"/>
               </a:solidFill>
@@ -18208,7 +18224,7 @@
           <a:p>
             <a:pPr rtl="0" eaLnBrk="1" latinLnBrk="0" hangingPunct="1"/>
             <a:r>
-              <a:rPr lang="es-ES" sz="1800" b="1" kern="1200" dirty="0">
+              <a:rPr lang="es-ES" sz="1800" b="1" kern="1200">
                 <a:solidFill>
                   <a:schemeClr val="accent6"/>
                 </a:solidFill>
@@ -18219,7 +18235,7 @@
               </a:rPr>
               <a:t>Un mismo problema se puede expresar de distintas maneras</a:t>
             </a:r>
-            <a:endParaRPr lang="es-ES" dirty="0">
+            <a:endParaRPr lang="es-ES">
               <a:solidFill>
                 <a:schemeClr val="accent6"/>
               </a:solidFill>
@@ -18227,7 +18243,7 @@
             </a:endParaRPr>
           </a:p>
           <a:p>
-            <a:endParaRPr lang="es-ES" dirty="0"/>
+            <a:endParaRPr lang="es-ES"/>
           </a:p>
         </p:txBody>
       </p:sp>
@@ -18257,15 +18273,15 @@
               <a:buNone/>
             </a:pPr>
             <a:r>
-              <a:rPr lang="es-ES" dirty="0"/>
+              <a:rPr lang="es-ES"/>
               <a:t>2.</a:t>
             </a:r>
             <a:r>
-              <a:rPr lang="es-ES" baseline="0" dirty="0"/>
+              <a:rPr lang="es-ES" baseline="0"/>
               <a:t> </a:t>
             </a:r>
             <a:r>
-              <a:rPr lang="es-ES" dirty="0"/>
+              <a:rPr lang="es-ES"/>
               <a:t>Diagramas de casos de uso</a:t>
             </a:r>
           </a:p>
@@ -18359,18 +18375,18 @@
           <a:lstStyle/>
           <a:p>
             <a:r>
-              <a:rPr lang="es-ES" dirty="0"/>
+              <a:rPr lang="es-ES"/>
               <a:t>Elementos</a:t>
             </a:r>
             <a:r>
-              <a:rPr lang="es-ES" baseline="0" dirty="0"/>
+              <a:rPr lang="es-ES" baseline="0"/>
               <a:t> del diagrama</a:t>
             </a:r>
           </a:p>
           <a:p>
             <a:pPr lvl="1"/>
             <a:r>
-              <a:rPr lang="es-ES" sz="1600" b="1" kern="1200" dirty="0">
+              <a:rPr lang="es-ES" sz="1600" b="1" kern="1200">
                 <a:solidFill>
                   <a:srgbClr val="FF0000"/>
                 </a:solidFill>
@@ -18382,7 +18398,7 @@
               <a:t>Sistema</a:t>
             </a:r>
             <a:r>
-              <a:rPr lang="es-ES" b="1" dirty="0">
+              <a:rPr lang="es-ES" b="1">
                 <a:solidFill>
                   <a:srgbClr val="FF0000"/>
                 </a:solidFill>
@@ -18390,7 +18406,7 @@
               <a:t>:</a:t>
             </a:r>
             <a:r>
-              <a:rPr lang="es-ES" dirty="0">
+              <a:rPr lang="es-ES">
                 <a:solidFill>
                   <a:schemeClr val="accent2"/>
                 </a:solidFill>
@@ -18398,7 +18414,7 @@
               <a:t> </a:t>
             </a:r>
             <a:r>
-              <a:rPr lang="es-ES" sz="1600" kern="1200" dirty="0">
+              <a:rPr lang="es-ES" sz="1600" kern="1200">
                 <a:solidFill>
                   <a:schemeClr val="accent2"/>
                 </a:solidFill>
@@ -18410,7 +18426,7 @@
               <a:t>dentro de los límites</a:t>
             </a:r>
             <a:r>
-              <a:rPr lang="es-ES" dirty="0">
+              <a:rPr lang="es-ES">
                 <a:solidFill>
                   <a:schemeClr val="accent2"/>
                 </a:solidFill>
@@ -18418,7 +18434,7 @@
               <a:t> </a:t>
             </a:r>
             <a:r>
-              <a:rPr lang="es-ES" sz="1600" kern="1200" dirty="0">
+              <a:rPr lang="es-ES" sz="1600" kern="1200">
                 <a:solidFill>
                   <a:schemeClr val="accent2"/>
                 </a:solidFill>
@@ -18429,7 +18445,7 @@
               </a:rPr>
               <a:t> de la aplicación</a:t>
             </a:r>
-            <a:endParaRPr lang="es-ES" dirty="0">
+            <a:endParaRPr lang="es-ES">
               <a:solidFill>
                 <a:schemeClr val="accent2"/>
               </a:solidFill>
@@ -18439,7 +18455,7 @@
           <a:p>
             <a:pPr lvl="1"/>
             <a:r>
-              <a:rPr lang="es-ES" sz="1600" b="1" kern="1200" dirty="0">
+              <a:rPr lang="es-ES" sz="1600" b="1" kern="1200">
                 <a:solidFill>
                   <a:srgbClr val="FF0000"/>
                 </a:solidFill>
@@ -18451,7 +18467,7 @@
               <a:t>Caso de uso</a:t>
             </a:r>
             <a:r>
-              <a:rPr lang="es-ES" b="1" dirty="0">
+              <a:rPr lang="es-ES" b="1">
                 <a:solidFill>
                   <a:srgbClr val="FF0000"/>
                 </a:solidFill>
@@ -18459,7 +18475,7 @@
               <a:t>:</a:t>
             </a:r>
             <a:r>
-              <a:rPr lang="es-ES" sz="1600" kern="1200" dirty="0">
+              <a:rPr lang="es-ES" sz="1600" kern="1200">
                 <a:solidFill>
                   <a:srgbClr val="FF0000"/>
                 </a:solidFill>
@@ -18471,7 +18487,7 @@
               <a:t> </a:t>
             </a:r>
             <a:r>
-              <a:rPr lang="es-ES" sz="1600" kern="1200" dirty="0">
+              <a:rPr lang="es-ES" sz="1600" kern="1200">
                 <a:solidFill>
                   <a:schemeClr val="accent2"/>
                 </a:solidFill>
@@ -18483,7 +18499,7 @@
               <a:t>tarea que realiza el sistema </a:t>
             </a:r>
             <a:r>
-              <a:rPr lang="es-ES" sz="1600" b="1" kern="1200" dirty="0">
+              <a:rPr lang="es-ES" sz="1600" b="1" kern="1200">
                 <a:solidFill>
                   <a:schemeClr val="accent2"/>
                 </a:solidFill>
@@ -18494,7 +18510,7 @@
               </a:rPr>
               <a:t>A PETICIÓN DE UN ACTOR</a:t>
             </a:r>
-            <a:endParaRPr lang="es-ES" dirty="0">
+            <a:endParaRPr lang="es-ES">
               <a:solidFill>
                 <a:schemeClr val="accent2"/>
               </a:solidFill>
@@ -18503,7 +18519,7 @@
           <a:p>
             <a:pPr lvl="2"/>
             <a:r>
-              <a:rPr lang="es-ES" dirty="0">
+              <a:rPr lang="es-ES">
                 <a:solidFill>
                   <a:schemeClr val="tx1">
                     <a:lumMod val="65000"/>
@@ -18514,7 +18530,7 @@
               <a:t>Debe mostrar una funcionalidad con </a:t>
             </a:r>
             <a:r>
-              <a:rPr lang="es-ES" b="1" dirty="0">
+              <a:rPr lang="es-ES" b="1">
                 <a:solidFill>
                   <a:schemeClr val="tx1">
                     <a:lumMod val="65000"/>
@@ -18525,7 +18541,7 @@
               <a:t>VALOR</a:t>
             </a:r>
             <a:r>
-              <a:rPr lang="es-ES" dirty="0">
+              <a:rPr lang="es-ES">
                 <a:solidFill>
                   <a:schemeClr val="tx1">
                     <a:lumMod val="65000"/>
@@ -18539,7 +18555,7 @@
           <a:p>
             <a:pPr lvl="2"/>
             <a:r>
-              <a:rPr lang="es-ES" dirty="0">
+              <a:rPr lang="es-ES">
                 <a:solidFill>
                   <a:schemeClr val="tx1">
                     <a:lumMod val="65000"/>
@@ -18553,7 +18569,7 @@
           <a:p>
             <a:pPr lvl="1" rtl="0" eaLnBrk="1" latinLnBrk="0" hangingPunct="1"/>
             <a:r>
-              <a:rPr lang="es-ES" sz="1600" b="1" kern="1200" dirty="0">
+              <a:rPr lang="es-ES" sz="1600" b="1" kern="1200">
                 <a:solidFill>
                   <a:srgbClr val="FF0000"/>
                 </a:solidFill>
@@ -18565,7 +18581,7 @@
               <a:t>Actor</a:t>
             </a:r>
             <a:r>
-              <a:rPr lang="es-ES" b="1" dirty="0">
+              <a:rPr lang="es-ES" b="1">
                 <a:solidFill>
                   <a:srgbClr val="FF0000"/>
                 </a:solidFill>
@@ -18573,7 +18589,7 @@
               <a:t>:</a:t>
             </a:r>
             <a:r>
-              <a:rPr lang="es-ES" sz="1600" kern="1200" dirty="0">
+              <a:rPr lang="es-ES" sz="1600" kern="1200">
                 <a:solidFill>
                   <a:schemeClr val="accent2"/>
                 </a:solidFill>
@@ -18585,7 +18601,7 @@
               <a:t> es la persona o rol (u otro sistema) que hace uso del sistema (</a:t>
             </a:r>
             <a:r>
-              <a:rPr lang="es-ES" sz="1600" b="1" kern="1200" dirty="0">
+              <a:rPr lang="es-ES" sz="1600" b="1" kern="1200">
                 <a:solidFill>
                   <a:schemeClr val="accent2"/>
                 </a:solidFill>
@@ -18597,7 +18613,7 @@
               <a:t>interactúa</a:t>
             </a:r>
             <a:r>
-              <a:rPr lang="es-ES" sz="1600" kern="1200" dirty="0">
+              <a:rPr lang="es-ES" sz="1600" kern="1200">
                 <a:solidFill>
                   <a:schemeClr val="accent2"/>
                 </a:solidFill>
@@ -18609,7 +18625,7 @@
               <a:t> con uno o varios </a:t>
             </a:r>
             <a:r>
-              <a:rPr lang="es-ES" sz="1600" b="1" kern="1200" dirty="0">
+              <a:rPr lang="es-ES" sz="1600" b="1" kern="1200">
                 <a:solidFill>
                   <a:schemeClr val="accent2"/>
                 </a:solidFill>
@@ -18621,7 +18637,7 @@
               <a:t>casos de uso</a:t>
             </a:r>
             <a:r>
-              <a:rPr lang="es-ES" sz="1600" kern="1200" dirty="0">
+              <a:rPr lang="es-ES" sz="1600" kern="1200">
                 <a:solidFill>
                   <a:schemeClr val="accent2"/>
                 </a:solidFill>
@@ -18632,7 +18648,7 @@
               </a:rPr>
               <a:t>) Recibe un nombre que describe su ROL.</a:t>
             </a:r>
-            <a:endParaRPr lang="es-ES" dirty="0">
+            <a:endParaRPr lang="es-ES">
               <a:solidFill>
                 <a:schemeClr val="accent2"/>
               </a:solidFill>
@@ -18642,7 +18658,7 @@
           <a:p>
             <a:pPr lvl="1" rtl="0" eaLnBrk="1" latinLnBrk="0" hangingPunct="1"/>
             <a:r>
-              <a:rPr lang="es-ES" sz="1600" b="1" kern="1200" dirty="0">
+              <a:rPr lang="es-ES" sz="1600" b="1" kern="1200">
                 <a:solidFill>
                   <a:srgbClr val="FF0000"/>
                 </a:solidFill>
@@ -18651,7 +18667,7 @@
               <a:t>Asociación</a:t>
             </a:r>
             <a:r>
-              <a:rPr lang="es-ES" b="1" dirty="0">
+              <a:rPr lang="es-ES" b="1">
                 <a:solidFill>
                   <a:srgbClr val="FF0000"/>
                 </a:solidFill>
@@ -18659,7 +18675,7 @@
               <a:t>:</a:t>
             </a:r>
             <a:r>
-              <a:rPr lang="es-ES" sz="1600" kern="1200" dirty="0">
+              <a:rPr lang="es-ES" sz="1600" kern="1200">
                 <a:solidFill>
                   <a:srgbClr val="FF0000"/>
                 </a:solidFill>
@@ -18668,7 +18684,7 @@
               <a:t> </a:t>
             </a:r>
             <a:r>
-              <a:rPr lang="es-ES" sz="1600" kern="1200" dirty="0">
+              <a:rPr lang="es-ES" sz="1600" kern="1200">
                 <a:solidFill>
                   <a:schemeClr val="accent2"/>
                 </a:solidFill>
@@ -18680,7 +18696,7 @@
           <a:p>
             <a:pPr lvl="1"/>
             <a:r>
-              <a:rPr lang="es-ES" b="1" dirty="0">
+              <a:rPr lang="es-ES" b="1">
                 <a:solidFill>
                   <a:srgbClr val="FF0000"/>
                 </a:solidFill>
@@ -18688,7 +18704,7 @@
               <a:t>Relaciones: </a:t>
             </a:r>
             <a:r>
-              <a:rPr lang="es-ES" dirty="0">
+              <a:rPr lang="es-ES">
                 <a:solidFill>
                   <a:schemeClr val="accent2"/>
                 </a:solidFill>
@@ -18699,7 +18715,7 @@
           <a:p>
             <a:pPr lvl="1" rtl="0" eaLnBrk="1" latinLnBrk="0" hangingPunct="1"/>
             <a:r>
-              <a:rPr lang="es-ES" sz="1600" i="1" kern="1200" dirty="0">
+              <a:rPr lang="es-ES" sz="1600" i="1" kern="1200">
                 <a:solidFill>
                   <a:schemeClr val="accent2"/>
                 </a:solidFill>
@@ -18711,7 +18727,7 @@
               <a:t>Veamos algunos </a:t>
             </a:r>
             <a:r>
-              <a:rPr lang="es-ES" sz="1600" b="1" i="1" kern="1200" dirty="0">
+              <a:rPr lang="es-ES" sz="1600" b="1" i="1" kern="1200">
                 <a:solidFill>
                   <a:schemeClr val="accent2"/>
                 </a:solidFill>
@@ -18722,12 +18738,12 @@
               </a:rPr>
               <a:t>ejemplos</a:t>
             </a:r>
-            <a:endParaRPr lang="es-ES" dirty="0">
+            <a:endParaRPr lang="es-ES">
               <a:effectLst/>
             </a:endParaRPr>
           </a:p>
           <a:p>
-            <a:endParaRPr lang="es-ES" dirty="0"/>
+            <a:endParaRPr lang="es-ES"/>
           </a:p>
         </p:txBody>
       </p:sp>
@@ -18757,7 +18773,7 @@
               <a:buNone/>
             </a:pPr>
             <a:r>
-              <a:rPr lang="es-ES" dirty="0"/>
+              <a:rPr lang="es-ES"/>
               <a:t>2. Diagramas de casos de uso</a:t>
             </a:r>
           </a:p>
